--- a/aetherfin_presentation.pptx
+++ b/aetherfin_presentation.pptx
@@ -23,8 +23,15 @@
     <p:sldId id="271" r:id="rId22"/>
     <p:sldId id="272" r:id="rId23"/>
     <p:sldId id="273" r:id="rId24"/>
+    <p:sldId id="274" r:id="rId25"/>
+    <p:sldId id="275" r:id="rId26"/>
+    <p:sldId id="276" r:id="rId27"/>
+    <p:sldId id="277" r:id="rId28"/>
+    <p:sldId id="278" r:id="rId29"/>
+    <p:sldId id="279" r:id="rId30"/>
+    <p:sldId id="280" r:id="rId31"/>
   </p:sldIdLst>
-  <p:sldSz cx="12191695" cy="6858000" type="screen4x3"/>
+  <p:sldSz cx="9144000" cy="5143500" type="screen4x3"/>
   <p:notesSz cx="6858000" cy="9144000"/>
   <p:defaultTextStyle>
     <a:defPPr>
@@ -3098,6 +3105,14 @@
 <file path=ppt/slides/slide1.xml><?xml version="1.0" encoding="utf-8"?>
 <p:sld xmlns:a="http://schemas.openxmlformats.org/drawingml/2006/main" xmlns:p="http://schemas.openxmlformats.org/presentationml/2006/main" xmlns:r="http://schemas.openxmlformats.org/officeDocument/2006/relationships">
   <p:cSld>
+    <p:bg>
+      <p:bgPr>
+        <a:solidFill>
+          <a:srgbClr val="0C0C0F"/>
+        </a:solidFill>
+        <a:effectLst/>
+      </p:bgPr>
+    </p:bg>
     <p:spTree>
       <p:nvGrpSpPr>
         <p:cNvPr id="1" name=""/>
@@ -3107,55 +3122,49 @@
       <p:grpSpPr/>
       <p:sp>
         <p:nvSpPr>
-          <p:cNvPr id="2" name="Title 1"/>
-          <p:cNvSpPr>
-            <a:spLocks noGrp="1"/>
-          </p:cNvSpPr>
-          <p:nvPr>
-            <p:ph type="title"/>
-          </p:nvPr>
-        </p:nvSpPr>
-        <p:spPr/>
-        <p:txBody>
-          <a:bodyPr/>
-          <a:lstStyle/>
-          <a:p>
-            <a:pPr>
-              <a:defRPr sz="3600" b="1">
-                <a:solidFill>
-                  <a:srgbClr val="0F172A"/>
+          <p:cNvPr id="2" name="TextBox 1"/>
+          <p:cNvSpPr txBox="1"/>
+          <p:nvPr/>
+        </p:nvSpPr>
+        <p:spPr>
+          <a:xfrm>
+            <a:off x="457200" y="1097280"/>
+            <a:ext cx="8229600" cy="3200400"/>
+          </a:xfrm>
+          <a:prstGeom prst="rect">
+            <a:avLst/>
+          </a:prstGeom>
+          <a:noFill/>
+        </p:spPr>
+        <p:txBody>
+          <a:bodyPr wrap="square">
+            <a:spAutoFit/>
+          </a:bodyPr>
+          <a:lstStyle/>
+          <a:p>
+            <a:pPr>
+              <a:spcAft>
+                <a:spcPts val="1000"/>
+              </a:spcAft>
+              <a:defRPr sz="4800" b="1">
+                <a:solidFill>
+                  <a:srgbClr val="3B82F6"/>
                 </a:solidFill>
                 <a:latin typeface="Arial"/>
               </a:defRPr>
             </a:pPr>
             <a:r>
-              <a:t>AetherFin GPU Ops</a:t>
-            </a:r>
-          </a:p>
-        </p:txBody>
-      </p:sp>
-      <p:sp>
-        <p:nvSpPr>
-          <p:cNvPr id="3" name="Content Placeholder 2"/>
-          <p:cNvSpPr>
-            <a:spLocks noGrp="1"/>
-          </p:cNvSpPr>
-          <p:nvPr>
-            <p:ph idx="1"/>
-          </p:nvPr>
-        </p:nvSpPr>
-        <p:spPr/>
-        <p:txBody>
-          <a:bodyPr/>
-          <a:lstStyle/>
-          <a:p>
-            <a:pPr>
-              <a:spcAft>
-                <a:spcPts val="2400"/>
-              </a:spcAft>
-              <a:defRPr sz="2000" i="1">
-                <a:solidFill>
-                  <a:srgbClr val="6366F1"/>
+              <a:t>AETHERFIN GPU OPS</a:t>
+            </a:r>
+          </a:p>
+          <a:p>
+            <a:pPr>
+              <a:spcAft>
+                <a:spcPts val="3000"/>
+              </a:spcAft>
+              <a:defRPr sz="2200">
+                <a:solidFill>
+                  <a:srgbClr val="10B981"/>
                 </a:solidFill>
                 <a:latin typeface="Arial"/>
               </a:defRPr>
@@ -3163,57 +3172,22 @@
             <a:r>
               <a:t>GenAI GPU FinOps &amp; Carbon Sustainability Platform</a:t>
             </a:r>
+          </a:p>
+          <a:p>
+            <a:pPr>
+              <a:defRPr sz="1400">
+                <a:solidFill>
+                  <a:srgbClr val="A1A1AA"/>
+                </a:solidFill>
+                <a:latin typeface="Arial"/>
+              </a:defRPr>
+            </a:pPr>
+            <a:r>
+              <a:t>Developed by: Banoth Srikanth</a:t>
+            </a:r>
             <a:br/>
             <a:r>
-              <a:t>Developed by: Banoth Srikanth</a:t>
-            </a:r>
-          </a:p>
-          <a:p>
-            <a:pPr>
-              <a:spcAft>
-                <a:spcPts val="1200"/>
-              </a:spcAft>
-              <a:defRPr sz="1600">
-                <a:solidFill>
-                  <a:srgbClr val="64748B"/>
-                </a:solidFill>
-                <a:latin typeface="Arial"/>
-              </a:defRPr>
-            </a:pPr>
-            <a:r>
-              <a:t>An enterprise-grade analytics portal designed to monitor, audit, and optimize Generative AI GPU clusters.</a:t>
-            </a:r>
-          </a:p>
-          <a:p>
-            <a:pPr>
-              <a:spcAft>
-                <a:spcPts val="1200"/>
-              </a:spcAft>
-              <a:defRPr sz="1600">
-                <a:solidFill>
-                  <a:srgbClr val="64748B"/>
-                </a:solidFill>
-                <a:latin typeface="Arial"/>
-              </a:defRPr>
-            </a:pPr>
-            <a:r>
-              <a:t>Bridges the gap between raw hardware telemetry, financial operations (FinOps), and sustainability requirements.</a:t>
-            </a:r>
-          </a:p>
-          <a:p>
-            <a:pPr>
-              <a:spcAft>
-                <a:spcPts val="1200"/>
-              </a:spcAft>
-              <a:defRPr sz="1600">
-                <a:solidFill>
-                  <a:srgbClr val="64748B"/>
-                </a:solidFill>
-                <a:latin typeface="Arial"/>
-              </a:defRPr>
-            </a:pPr>
-            <a:r>
-              <a:t>Built with React (TypeScript), FastAPI, SQLAlchemy, PostgreSQL, and Docker.</a:t>
+              <a:t>Portfolio Deliverable for Enterprise Product Analyst &amp; Data Engineer Reviews</a:t>
             </a:r>
           </a:p>
         </p:txBody>
@@ -3229,6 +3203,14 @@
 <file path=ppt/slides/slide10.xml><?xml version="1.0" encoding="utf-8"?>
 <p:sld xmlns:a="http://schemas.openxmlformats.org/drawingml/2006/main" xmlns:p="http://schemas.openxmlformats.org/presentationml/2006/main" xmlns:r="http://schemas.openxmlformats.org/officeDocument/2006/relationships">
   <p:cSld>
+    <p:bg>
+      <p:bgPr>
+        <a:solidFill>
+          <a:srgbClr val="0C0C0F"/>
+        </a:solidFill>
+        <a:effectLst/>
+      </p:bgPr>
+    </p:bg>
     <p:spTree>
       <p:nvGrpSpPr>
         <p:cNvPr id="1" name=""/>
@@ -3238,125 +3220,159 @@
       <p:grpSpPr/>
       <p:sp>
         <p:nvSpPr>
-          <p:cNvPr id="2" name="Title 1"/>
-          <p:cNvSpPr>
-            <a:spLocks noGrp="1"/>
-          </p:cNvSpPr>
-          <p:nvPr>
-            <p:ph type="title"/>
-          </p:nvPr>
-        </p:nvSpPr>
-        <p:spPr/>
-        <p:txBody>
-          <a:bodyPr/>
+          <p:cNvPr id="2" name="TextBox 1"/>
+          <p:cNvSpPr txBox="1"/>
+          <p:nvPr/>
+        </p:nvSpPr>
+        <p:spPr>
+          <a:xfrm>
+            <a:off x="457200" y="365760"/>
+            <a:ext cx="8229600" cy="731520"/>
+          </a:xfrm>
+          <a:prstGeom prst="rect">
+            <a:avLst/>
+          </a:prstGeom>
+          <a:noFill/>
+        </p:spPr>
+        <p:txBody>
+          <a:bodyPr wrap="square" lIns="0" tIns="0" rIns="0" bIns="0">
+            <a:spAutoFit/>
+          </a:bodyPr>
           <a:lstStyle/>
           <a:p>
             <a:pPr>
               <a:defRPr sz="3600" b="1">
                 <a:solidFill>
-                  <a:srgbClr val="0F172A"/>
+                  <a:srgbClr val="3B82F6"/>
                 </a:solidFill>
                 <a:latin typeface="Arial"/>
               </a:defRPr>
             </a:pPr>
             <a:r>
-              <a:t>Executive Business Impact Dashboard</a:t>
-            </a:r>
-          </a:p>
-        </p:txBody>
-      </p:sp>
-      <p:sp>
-        <p:nvSpPr>
-          <p:cNvPr id="3" name="Content Placeholder 2"/>
-          <p:cNvSpPr>
-            <a:spLocks noGrp="1"/>
-          </p:cNvSpPr>
-          <p:nvPr>
-            <p:ph idx="1"/>
-          </p:nvPr>
-        </p:nvSpPr>
-        <p:spPr/>
-        <p:txBody>
-          <a:bodyPr/>
-          <a:lstStyle/>
-          <a:p>
-            <a:pPr>
-              <a:spcAft>
-                <a:spcPts val="2400"/>
-              </a:spcAft>
-              <a:defRPr sz="2000" i="1">
-                <a:solidFill>
-                  <a:srgbClr val="6366F1"/>
-                </a:solidFill>
-                <a:latin typeface="Arial"/>
-              </a:defRPr>
-            </a:pPr>
-            <a:r>
-              <a:t>Quantifying Value for C-Suite Decision Support</a:t>
-            </a:r>
-          </a:p>
-          <a:p>
-            <a:pPr>
-              <a:spcAft>
-                <a:spcPts val="1200"/>
-              </a:spcAft>
-              <a:defRPr sz="1600">
-                <a:solidFill>
-                  <a:srgbClr val="64748B"/>
-                </a:solidFill>
-                <a:latin typeface="Arial"/>
-              </a:defRPr>
-            </a:pPr>
-            <a:r>
-              <a:t>Quantified ROI: Displays current state, projected optimized state, and weekly/monthly cost reductions.</a:t>
-            </a:r>
-          </a:p>
-          <a:p>
-            <a:pPr>
-              <a:spcAft>
-                <a:spcPts val="1200"/>
-              </a:spcAft>
-              <a:defRPr sz="1600">
-                <a:solidFill>
-                  <a:srgbClr val="64748B"/>
-                </a:solidFill>
-                <a:latin typeface="Arial"/>
-              </a:defRPr>
-            </a:pPr>
-            <a:r>
-              <a:t>Quantified Carbon Savings: Demonstrates green IT achievements in kilograms of CO2 saved.</a:t>
-            </a:r>
-          </a:p>
-          <a:p>
-            <a:pPr>
-              <a:spcAft>
-                <a:spcPts val="1200"/>
-              </a:spcAft>
-              <a:defRPr sz="1600">
-                <a:solidFill>
-                  <a:srgbClr val="64748B"/>
-                </a:solidFill>
-                <a:latin typeface="Arial"/>
-              </a:defRPr>
-            </a:pPr>
-            <a:r>
-              <a:t>Top 5 Recommendations: Provides a dedicated list of immediate sizing and decommissioning actions.</a:t>
-            </a:r>
-          </a:p>
-          <a:p>
-            <a:pPr>
-              <a:spcAft>
-                <a:spcPts val="1200"/>
-              </a:spcAft>
-              <a:defRPr sz="1600">
-                <a:solidFill>
-                  <a:srgbClr val="64748B"/>
-                </a:solidFill>
-                <a:latin typeface="Arial"/>
-              </a:defRPr>
-            </a:pPr>
-            <a:r>
-              <a:t>One-Click Exports: Stream summaries and audit trails directly to CSV or formatted text reports.</a:t>
+              <a:t>GPU Idle Cost Penalty (GICP)</a:t>
+            </a:r>
+          </a:p>
+        </p:txBody>
+      </p:sp>
+      <p:sp>
+        <p:nvSpPr>
+          <p:cNvPr id="3" name="TextBox 2"/>
+          <p:cNvSpPr txBox="1"/>
+          <p:nvPr/>
+        </p:nvSpPr>
+        <p:spPr>
+          <a:xfrm>
+            <a:off x="457200" y="1371600"/>
+            <a:ext cx="8229600" cy="4572000"/>
+          </a:xfrm>
+          <a:prstGeom prst="rect">
+            <a:avLst/>
+          </a:prstGeom>
+          <a:noFill/>
+        </p:spPr>
+        <p:txBody>
+          <a:bodyPr wrap="square" lIns="0" tIns="0" rIns="0" bIns="0">
+            <a:spAutoFit/>
+          </a:bodyPr>
+          <a:lstStyle/>
+          <a:p>
+            <a:pPr>
+              <a:spcAft>
+                <a:spcPts val="1400"/>
+              </a:spcAft>
+            </a:pPr>
+            <a:r>
+              <a:rPr sz="1800" b="1">
+                <a:solidFill>
+                  <a:srgbClr val="FAFAFA"/>
+                </a:solidFill>
+                <a:latin typeface="Arial"/>
+              </a:rPr>
+              <a:t>Formula:</a:t>
+            </a:r>
+            <a:r>
+              <a:rPr sz="1800">
+                <a:solidFill>
+                  <a:srgbClr val="A1A1AA"/>
+                </a:solidFill>
+                <a:latin typeface="Arial"/>
+              </a:rPr>
+              <a:t> GICP = sum(Idle Hours * Hourly Cost) / Total Spend * 100</a:t>
+            </a:r>
+          </a:p>
+          <a:p>
+            <a:pPr>
+              <a:spcAft>
+                <a:spcPts val="1400"/>
+              </a:spcAft>
+            </a:pPr>
+            <a:r>
+              <a:rPr sz="1800" b="1">
+                <a:solidFill>
+                  <a:srgbClr val="FAFAFA"/>
+                </a:solidFill>
+                <a:latin typeface="Arial"/>
+              </a:rPr>
+              <a:t>Threshold Definition:</a:t>
+            </a:r>
+            <a:r>
+              <a:rPr sz="1800">
+                <a:solidFill>
+                  <a:srgbClr val="A1A1AA"/>
+                </a:solidFill>
+                <a:latin typeface="Arial"/>
+              </a:rPr>
+              <a:t> Tracks hours where a node is active but average GPU load stays under 15%.</a:t>
+            </a:r>
+          </a:p>
+          <a:p>
+            <a:pPr>
+              <a:spcAft>
+                <a:spcPts val="1400"/>
+              </a:spcAft>
+            </a:pPr>
+            <a:r>
+              <a:rPr sz="1800" b="1">
+                <a:solidFill>
+                  <a:srgbClr val="FAFAFA"/>
+                </a:solidFill>
+                <a:latin typeface="Arial"/>
+              </a:rPr>
+              <a:t>Business Cost:</a:t>
+            </a:r>
+            <a:r>
+              <a:rPr sz="1800">
+                <a:solidFill>
+                  <a:srgbClr val="A1A1AA"/>
+                </a:solidFill>
+                <a:latin typeface="Arial"/>
+              </a:rPr>
+              <a:t> In the audited trial, $5,073.76 out of $7,844.98 was wasted on idle capacity.</a:t>
+            </a:r>
+          </a:p>
+          <a:p>
+            <a:pPr>
+              <a:spcAft>
+                <a:spcPts val="1400"/>
+              </a:spcAft>
+            </a:pPr>
+            <a:r>
+              <a:rPr sz="1800" b="1">
+                <a:solidFill>
+                  <a:srgbClr val="FAFAFA"/>
+                </a:solidFill>
+                <a:latin typeface="Arial"/>
+              </a:rPr>
+              <a:t>Outcome Action:</a:t>
+            </a:r>
+            <a:r>
+              <a:rPr sz="1800">
+                <a:solidFill>
+                  <a:srgbClr val="A1A1AA"/>
+                </a:solidFill>
+                <a:latin typeface="Arial"/>
+              </a:rPr>
+              <a:t> Identifies exact instances suitable for decommissioning or dynamic scale-down.</a:t>
             </a:r>
           </a:p>
         </p:txBody>
@@ -3372,6 +3388,14 @@
 <file path=ppt/slides/slide11.xml><?xml version="1.0" encoding="utf-8"?>
 <p:sld xmlns:a="http://schemas.openxmlformats.org/drawingml/2006/main" xmlns:p="http://schemas.openxmlformats.org/presentationml/2006/main" xmlns:r="http://schemas.openxmlformats.org/officeDocument/2006/relationships">
   <p:cSld>
+    <p:bg>
+      <p:bgPr>
+        <a:solidFill>
+          <a:srgbClr val="0C0C0F"/>
+        </a:solidFill>
+        <a:effectLst/>
+      </p:bgPr>
+    </p:bg>
     <p:spTree>
       <p:nvGrpSpPr>
         <p:cNvPr id="1" name=""/>
@@ -3381,125 +3405,159 @@
       <p:grpSpPr/>
       <p:sp>
         <p:nvSpPr>
-          <p:cNvPr id="2" name="Title 1"/>
-          <p:cNvSpPr>
-            <a:spLocks noGrp="1"/>
-          </p:cNvSpPr>
-          <p:nvPr>
-            <p:ph type="title"/>
-          </p:nvPr>
-        </p:nvSpPr>
-        <p:spPr/>
-        <p:txBody>
-          <a:bodyPr/>
+          <p:cNvPr id="2" name="TextBox 1"/>
+          <p:cNvSpPr txBox="1"/>
+          <p:nvPr/>
+        </p:nvSpPr>
+        <p:spPr>
+          <a:xfrm>
+            <a:off x="457200" y="365760"/>
+            <a:ext cx="8229600" cy="731520"/>
+          </a:xfrm>
+          <a:prstGeom prst="rect">
+            <a:avLst/>
+          </a:prstGeom>
+          <a:noFill/>
+        </p:spPr>
+        <p:txBody>
+          <a:bodyPr wrap="square" lIns="0" tIns="0" rIns="0" bIns="0">
+            <a:spAutoFit/>
+          </a:bodyPr>
           <a:lstStyle/>
           <a:p>
             <a:pPr>
               <a:defRPr sz="3600" b="1">
                 <a:solidFill>
-                  <a:srgbClr val="0F172A"/>
+                  <a:srgbClr val="3B82F6"/>
                 </a:solidFill>
                 <a:latin typeface="Arial"/>
               </a:defRPr>
             </a:pPr>
             <a:r>
-              <a:t>AI FinOps Optimization Advisor</a:t>
-            </a:r>
-          </a:p>
-        </p:txBody>
-      </p:sp>
-      <p:sp>
-        <p:nvSpPr>
-          <p:cNvPr id="3" name="Content Placeholder 2"/>
-          <p:cNvSpPr>
-            <a:spLocks noGrp="1"/>
-          </p:cNvSpPr>
-          <p:nvPr>
-            <p:ph idx="1"/>
-          </p:nvPr>
-        </p:nvSpPr>
-        <p:spPr/>
-        <p:txBody>
-          <a:bodyPr/>
-          <a:lstStyle/>
-          <a:p>
-            <a:pPr>
-              <a:spcAft>
-                <a:spcPts val="2400"/>
-              </a:spcAft>
-              <a:defRPr sz="2000" i="1">
-                <a:solidFill>
-                  <a:srgbClr val="6366F1"/>
-                </a:solidFill>
-                <a:latin typeface="Arial"/>
-              </a:defRPr>
-            </a:pPr>
-            <a:r>
-              <a:t>Conversational AI Interface for Technical Teams</a:t>
-            </a:r>
-          </a:p>
-          <a:p>
-            <a:pPr>
-              <a:spcAft>
-                <a:spcPts val="1200"/>
-              </a:spcAft>
-              <a:defRPr sz="1600">
-                <a:solidFill>
-                  <a:srgbClr val="64748B"/>
-                </a:solidFill>
-                <a:latin typeface="Arial"/>
-              </a:defRPr>
-            </a:pPr>
-            <a:r>
-              <a:t>Context-Aware Prompting: Supplies local cluster metrics, billing rates, and carbon parameters directly to the LLM.</a:t>
-            </a:r>
-          </a:p>
-          <a:p>
-            <a:pPr>
-              <a:spcAft>
-                <a:spcPts val="1200"/>
-              </a:spcAft>
-              <a:defRPr sz="1600">
-                <a:solidFill>
-                  <a:srgbClr val="64748B"/>
-                </a:solidFill>
-                <a:latin typeface="Arial"/>
-              </a:defRPr>
-            </a:pPr>
-            <a:r>
-              <a:t>Natural Language Queries: Allows users to ask questions like 'How can I reduce costs by 20%?' or 'Which nodes are underperforming?'</a:t>
-            </a:r>
-          </a:p>
-          <a:p>
-            <a:pPr>
-              <a:spcAft>
-                <a:spcPts val="1200"/>
-              </a:spcAft>
-              <a:defRPr sz="1600">
-                <a:solidFill>
-                  <a:srgbClr val="64748B"/>
-                </a:solidFill>
-                <a:latin typeface="Arial"/>
-              </a:defRPr>
-            </a:pPr>
-            <a:r>
-              <a:t>Conversational fallback: Implements rule-based fallback logic to analyze local database statistics if the API is offline.</a:t>
-            </a:r>
-          </a:p>
-          <a:p>
-            <a:pPr>
-              <a:spcAft>
-                <a:spcPts val="1200"/>
-              </a:spcAft>
-              <a:defRPr sz="1600">
-                <a:solidFill>
-                  <a:srgbClr val="64748B"/>
-                </a:solidFill>
-                <a:latin typeface="Arial"/>
-              </a:defRPr>
-            </a:pPr>
-            <a:r>
-              <a:t>Metric-Driven Output: Delivers structured, evidence-based recommendations and projected savings.</a:t>
+              <a:t>Model Compute Efficiency Score (MCES)</a:t>
+            </a:r>
+          </a:p>
+        </p:txBody>
+      </p:sp>
+      <p:sp>
+        <p:nvSpPr>
+          <p:cNvPr id="3" name="TextBox 2"/>
+          <p:cNvSpPr txBox="1"/>
+          <p:nvPr/>
+        </p:nvSpPr>
+        <p:spPr>
+          <a:xfrm>
+            <a:off x="457200" y="1371600"/>
+            <a:ext cx="8229600" cy="4572000"/>
+          </a:xfrm>
+          <a:prstGeom prst="rect">
+            <a:avLst/>
+          </a:prstGeom>
+          <a:noFill/>
+        </p:spPr>
+        <p:txBody>
+          <a:bodyPr wrap="square" lIns="0" tIns="0" rIns="0" bIns="0">
+            <a:spAutoFit/>
+          </a:bodyPr>
+          <a:lstStyle/>
+          <a:p>
+            <a:pPr>
+              <a:spcAft>
+                <a:spcPts val="1400"/>
+              </a:spcAft>
+            </a:pPr>
+            <a:r>
+              <a:rPr sz="1800" b="1">
+                <a:solidFill>
+                  <a:srgbClr val="FAFAFA"/>
+                </a:solidFill>
+                <a:latin typeface="Arial"/>
+              </a:rPr>
+              <a:t>Formula:</a:t>
+            </a:r>
+            <a:r>
+              <a:rPr sz="1800">
+                <a:solidFill>
+                  <a:srgbClr val="A1A1AA"/>
+                </a:solidFill>
+                <a:latin typeface="Arial"/>
+              </a:rPr>
+              <a:t> MCES = (Prompt Tokens + Completion Tokens) / sum(Power Draw in Watts * 1 Hour)</a:t>
+            </a:r>
+          </a:p>
+          <a:p>
+            <a:pPr>
+              <a:spcAft>
+                <a:spcPts val="1400"/>
+              </a:spcAft>
+            </a:pPr>
+            <a:r>
+              <a:rPr sz="1800" b="1">
+                <a:solidFill>
+                  <a:srgbClr val="FAFAFA"/>
+                </a:solidFill>
+                <a:latin typeface="Arial"/>
+              </a:rPr>
+              <a:t>Standardization Value:</a:t>
+            </a:r>
+            <a:r>
+              <a:rPr sz="1800">
+                <a:solidFill>
+                  <a:srgbClr val="A1A1AA"/>
+                </a:solidFill>
+                <a:latin typeface="Arial"/>
+              </a:rPr>
+              <a:t> Allows C-suite comparison of model architectures on different hardware types.</a:t>
+            </a:r>
+          </a:p>
+          <a:p>
+            <a:pPr>
+              <a:spcAft>
+                <a:spcPts val="1400"/>
+              </a:spcAft>
+            </a:pPr>
+            <a:r>
+              <a:rPr sz="1800" b="1">
+                <a:solidFill>
+                  <a:srgbClr val="FAFAFA"/>
+                </a:solidFill>
+                <a:latin typeface="Arial"/>
+              </a:rPr>
+              <a:t>Hardware Insights:</a:t>
+            </a:r>
+            <a:r>
+              <a:rPr sz="1800">
+                <a:solidFill>
+                  <a:srgbClr val="A1A1AA"/>
+                </a:solidFill>
+                <a:latin typeface="Arial"/>
+              </a:rPr>
+              <a:t> Llama-3-8B on GCP L4 nodes achieved 8.42 tokens/Wh, compared to 1.12 tokens/Wh for Llama-3-70B on H100s.</a:t>
+            </a:r>
+          </a:p>
+          <a:p>
+            <a:pPr>
+              <a:spcAft>
+                <a:spcPts val="1400"/>
+              </a:spcAft>
+            </a:pPr>
+            <a:r>
+              <a:rPr sz="1800" b="1">
+                <a:solidFill>
+                  <a:srgbClr val="FAFAFA"/>
+                </a:solidFill>
+                <a:latin typeface="Arial"/>
+              </a:rPr>
+              <a:t>Outcome Action:</a:t>
+            </a:r>
+            <a:r>
+              <a:rPr sz="1800">
+                <a:solidFill>
+                  <a:srgbClr val="A1A1AA"/>
+                </a:solidFill>
+                <a:latin typeface="Arial"/>
+              </a:rPr>
+              <a:t> Identifies candidate models for right-sizing or quantization.</a:t>
             </a:r>
           </a:p>
         </p:txBody>
@@ -3515,6 +3573,14 @@
 <file path=ppt/slides/slide12.xml><?xml version="1.0" encoding="utf-8"?>
 <p:sld xmlns:a="http://schemas.openxmlformats.org/drawingml/2006/main" xmlns:p="http://schemas.openxmlformats.org/presentationml/2006/main" xmlns:r="http://schemas.openxmlformats.org/officeDocument/2006/relationships">
   <p:cSld>
+    <p:bg>
+      <p:bgPr>
+        <a:solidFill>
+          <a:srgbClr val="0C0C0F"/>
+        </a:solidFill>
+        <a:effectLst/>
+      </p:bgPr>
+    </p:bg>
     <p:spTree>
       <p:nvGrpSpPr>
         <p:cNvPr id="1" name=""/>
@@ -3524,125 +3590,159 @@
       <p:grpSpPr/>
       <p:sp>
         <p:nvSpPr>
-          <p:cNvPr id="2" name="Title 1"/>
-          <p:cNvSpPr>
-            <a:spLocks noGrp="1"/>
-          </p:cNvSpPr>
-          <p:nvPr>
-            <p:ph type="title"/>
-          </p:nvPr>
-        </p:nvSpPr>
-        <p:spPr/>
-        <p:txBody>
-          <a:bodyPr/>
+          <p:cNvPr id="2" name="TextBox 1"/>
+          <p:cNvSpPr txBox="1"/>
+          <p:nvPr/>
+        </p:nvSpPr>
+        <p:spPr>
+          <a:xfrm>
+            <a:off x="457200" y="365760"/>
+            <a:ext cx="8229600" cy="731520"/>
+          </a:xfrm>
+          <a:prstGeom prst="rect">
+            <a:avLst/>
+          </a:prstGeom>
+          <a:noFill/>
+        </p:spPr>
+        <p:txBody>
+          <a:bodyPr wrap="square" lIns="0" tIns="0" rIns="0" bIns="0">
+            <a:spAutoFit/>
+          </a:bodyPr>
           <a:lstStyle/>
           <a:p>
             <a:pPr>
               <a:defRPr sz="3600" b="1">
                 <a:solidFill>
-                  <a:srgbClr val="0F172A"/>
+                  <a:srgbClr val="3B82F6"/>
                 </a:solidFill>
                 <a:latin typeface="Arial"/>
               </a:defRPr>
             </a:pPr>
             <a:r>
-              <a:t>What-If GPU Sizing Simulator</a:t>
-            </a:r>
-          </a:p>
-        </p:txBody>
-      </p:sp>
-      <p:sp>
-        <p:nvSpPr>
-          <p:cNvPr id="3" name="Content Placeholder 2"/>
-          <p:cNvSpPr>
-            <a:spLocks noGrp="1"/>
-          </p:cNvSpPr>
-          <p:nvPr>
-            <p:ph idx="1"/>
-          </p:nvPr>
-        </p:nvSpPr>
-        <p:spPr/>
-        <p:txBody>
-          <a:bodyPr/>
-          <a:lstStyle/>
-          <a:p>
-            <a:pPr>
-              <a:spcAft>
-                <a:spcPts val="2400"/>
-              </a:spcAft>
-              <a:defRPr sz="2000" i="1">
-                <a:solidFill>
-                  <a:srgbClr val="6366F1"/>
-                </a:solidFill>
-                <a:latin typeface="Arial"/>
-              </a:defRPr>
-            </a:pPr>
-            <a:r>
-              <a:t>Predictive Modeling of Cluster Modifications</a:t>
-            </a:r>
-          </a:p>
-          <a:p>
-            <a:pPr>
-              <a:spcAft>
-                <a:spcPts val="1200"/>
-              </a:spcAft>
-              <a:defRPr sz="1600">
-                <a:solidFill>
-                  <a:srgbClr val="64748B"/>
-                </a:solidFill>
-                <a:latin typeface="Arial"/>
-              </a:defRPr>
-            </a:pPr>
-            <a:r>
-              <a:t>Parameter Control: Sliders to adjust active node count, daily hours of operation, and target concurrency levels.</a:t>
-            </a:r>
-          </a:p>
-          <a:p>
-            <a:pPr>
-              <a:spcAft>
-                <a:spcPts val="1200"/>
-              </a:spcAft>
-              <a:defRPr sz="1600">
-                <a:solidFill>
-                  <a:srgbClr val="64748B"/>
-                </a:solidFill>
-                <a:latin typeface="Arial"/>
-              </a:defRPr>
-            </a:pPr>
-            <a:r>
-              <a:t>Routing Strategies: Toggle between Cost-Optimized (cheapest instances) and Carbon-Optimized (cleanest energy grids).</a:t>
-            </a:r>
-          </a:p>
-          <a:p>
-            <a:pPr>
-              <a:spcAft>
-                <a:spcPts val="1200"/>
-              </a:spcAft>
-              <a:defRPr sz="1600">
-                <a:solidFill>
-                  <a:srgbClr val="64748B"/>
-                </a:solidFill>
-                <a:latin typeface="Arial"/>
-              </a:defRPr>
-            </a:pPr>
-            <a:r>
-              <a:t>Trade-Off Modeling: Visualizes how reducing node counts affects projected customer latency and SLA violation rates.</a:t>
-            </a:r>
-          </a:p>
-          <a:p>
-            <a:pPr>
-              <a:spcAft>
-                <a:spcPts val="1200"/>
-              </a:spcAft>
-              <a:defRPr sz="1600">
-                <a:solidFill>
-                  <a:srgbClr val="64748B"/>
-                </a:solidFill>
-                <a:latin typeface="Arial"/>
-              </a:defRPr>
-            </a:pPr>
-            <a:r>
-              <a:t>Impact Previews: Displays monthly savings and net carbon saved in real time before deployment.</a:t>
+              <a:t>SLA Violation Exposure Index (SLA-VEI)</a:t>
+            </a:r>
+          </a:p>
+        </p:txBody>
+      </p:sp>
+      <p:sp>
+        <p:nvSpPr>
+          <p:cNvPr id="3" name="TextBox 2"/>
+          <p:cNvSpPr txBox="1"/>
+          <p:nvPr/>
+        </p:nvSpPr>
+        <p:spPr>
+          <a:xfrm>
+            <a:off x="457200" y="1371600"/>
+            <a:ext cx="8229600" cy="4572000"/>
+          </a:xfrm>
+          <a:prstGeom prst="rect">
+            <a:avLst/>
+          </a:prstGeom>
+          <a:noFill/>
+        </p:spPr>
+        <p:txBody>
+          <a:bodyPr wrap="square" lIns="0" tIns="0" rIns="0" bIns="0">
+            <a:spAutoFit/>
+          </a:bodyPr>
+          <a:lstStyle/>
+          <a:p>
+            <a:pPr>
+              <a:spcAft>
+                <a:spcPts val="1400"/>
+              </a:spcAft>
+            </a:pPr>
+            <a:r>
+              <a:rPr sz="1800" b="1">
+                <a:solidFill>
+                  <a:srgbClr val="FAFAFA"/>
+                </a:solidFill>
+                <a:latin typeface="Arial"/>
+              </a:rPr>
+              <a:t>Formula:</a:t>
+            </a:r>
+            <a:r>
+              <a:rPr sz="1800">
+                <a:solidFill>
+                  <a:srgbClr val="A1A1AA"/>
+                </a:solidFill>
+                <a:latin typeface="Arial"/>
+              </a:rPr>
+              <a:t> SLA-VEI = sum(max(0, (Actual Latency - Target Latency) / Target Latency)) / Total Requests * 100</a:t>
+            </a:r>
+          </a:p>
+          <a:p>
+            <a:pPr>
+              <a:spcAft>
+                <a:spcPts val="1400"/>
+              </a:spcAft>
+            </a:pPr>
+            <a:r>
+              <a:rPr sz="1800" b="1">
+                <a:solidFill>
+                  <a:srgbClr val="FAFAFA"/>
+                </a:solidFill>
+                <a:latin typeface="Arial"/>
+              </a:rPr>
+              <a:t>The Severity Weighting:</a:t>
+            </a:r>
+            <a:r>
+              <a:rPr sz="1800">
+                <a:solidFill>
+                  <a:srgbClr val="A1A1AA"/>
+                </a:solidFill>
+                <a:latin typeface="Arial"/>
+              </a:rPr>
+              <a:t> Counts of violations do not capture user frustration; SLA-VEI weights delays exponentially.</a:t>
+            </a:r>
+          </a:p>
+          <a:p>
+            <a:pPr>
+              <a:spcAft>
+                <a:spcPts val="1400"/>
+              </a:spcAft>
+            </a:pPr>
+            <a:r>
+              <a:rPr sz="1800" b="1">
+                <a:solidFill>
+                  <a:srgbClr val="FAFAFA"/>
+                </a:solidFill>
+                <a:latin typeface="Arial"/>
+              </a:rPr>
+              <a:t>Baseline Score:</a:t>
+            </a:r>
+            <a:r>
+              <a:rPr sz="1800">
+                <a:solidFill>
+                  <a:srgbClr val="A1A1AA"/>
+                </a:solidFill>
+                <a:latin typeface="Arial"/>
+              </a:rPr>
+              <a:t> Current baseline score is 2.89, driven by peak diurnal traffic queuing delays.</a:t>
+            </a:r>
+          </a:p>
+          <a:p>
+            <a:pPr>
+              <a:spcAft>
+                <a:spcPts val="1400"/>
+              </a:spcAft>
+            </a:pPr>
+            <a:r>
+              <a:rPr sz="1800" b="1">
+                <a:solidFill>
+                  <a:srgbClr val="FAFAFA"/>
+                </a:solidFill>
+                <a:latin typeface="Arial"/>
+              </a:rPr>
+              <a:t>Outcome Action:</a:t>
+            </a:r>
+            <a:r>
+              <a:rPr sz="1800">
+                <a:solidFill>
+                  <a:srgbClr val="A1A1AA"/>
+                </a:solidFill>
+                <a:latin typeface="Arial"/>
+              </a:rPr>
+              <a:t> Signals when cost-cutting measures threaten customer retention.</a:t>
             </a:r>
           </a:p>
         </p:txBody>
@@ -3658,6 +3758,14 @@
 <file path=ppt/slides/slide13.xml><?xml version="1.0" encoding="utf-8"?>
 <p:sld xmlns:a="http://schemas.openxmlformats.org/drawingml/2006/main" xmlns:p="http://schemas.openxmlformats.org/presentationml/2006/main" xmlns:r="http://schemas.openxmlformats.org/officeDocument/2006/relationships">
   <p:cSld>
+    <p:bg>
+      <p:bgPr>
+        <a:solidFill>
+          <a:srgbClr val="0C0C0F"/>
+        </a:solidFill>
+        <a:effectLst/>
+      </p:bgPr>
+    </p:bg>
     <p:spTree>
       <p:nvGrpSpPr>
         <p:cNvPr id="1" name=""/>
@@ -3667,125 +3775,159 @@
       <p:grpSpPr/>
       <p:sp>
         <p:nvSpPr>
-          <p:cNvPr id="2" name="Title 1"/>
-          <p:cNvSpPr>
-            <a:spLocks noGrp="1"/>
-          </p:cNvSpPr>
-          <p:nvPr>
-            <p:ph type="title"/>
-          </p:nvPr>
-        </p:nvSpPr>
-        <p:spPr/>
-        <p:txBody>
-          <a:bodyPr/>
+          <p:cNvPr id="2" name="TextBox 1"/>
+          <p:cNvSpPr txBox="1"/>
+          <p:nvPr/>
+        </p:nvSpPr>
+        <p:spPr>
+          <a:xfrm>
+            <a:off x="457200" y="365760"/>
+            <a:ext cx="8229600" cy="731520"/>
+          </a:xfrm>
+          <a:prstGeom prst="rect">
+            <a:avLst/>
+          </a:prstGeom>
+          <a:noFill/>
+        </p:spPr>
+        <p:txBody>
+          <a:bodyPr wrap="square" lIns="0" tIns="0" rIns="0" bIns="0">
+            <a:spAutoFit/>
+          </a:bodyPr>
           <a:lstStyle/>
           <a:p>
             <a:pPr>
               <a:defRPr sz="3600" b="1">
                 <a:solidFill>
-                  <a:srgbClr val="0F172A"/>
+                  <a:srgbClr val="3B82F6"/>
                 </a:solidFill>
                 <a:latin typeface="Arial"/>
               </a:defRPr>
             </a:pPr>
             <a:r>
-              <a:t>Technology Stack Breakdown</a:t>
-            </a:r>
-          </a:p>
-        </p:txBody>
-      </p:sp>
-      <p:sp>
-        <p:nvSpPr>
-          <p:cNvPr id="3" name="Content Placeholder 2"/>
-          <p:cNvSpPr>
-            <a:spLocks noGrp="1"/>
-          </p:cNvSpPr>
-          <p:nvPr>
-            <p:ph idx="1"/>
-          </p:nvPr>
-        </p:nvSpPr>
-        <p:spPr/>
-        <p:txBody>
-          <a:bodyPr/>
-          <a:lstStyle/>
-          <a:p>
-            <a:pPr>
-              <a:spcAft>
-                <a:spcPts val="2400"/>
-              </a:spcAft>
-              <a:defRPr sz="2000" i="1">
-                <a:solidFill>
-                  <a:srgbClr val="6366F1"/>
-                </a:solidFill>
-                <a:latin typeface="Arial"/>
-              </a:defRPr>
-            </a:pPr>
-            <a:r>
-              <a:t>Modern, High-Performance Software Stack</a:t>
-            </a:r>
-          </a:p>
-          <a:p>
-            <a:pPr>
-              <a:spcAft>
-                <a:spcPts val="1200"/>
-              </a:spcAft>
-              <a:defRPr sz="1600">
-                <a:solidFill>
-                  <a:srgbClr val="64748B"/>
-                </a:solidFill>
-                <a:latin typeface="Arial"/>
-              </a:defRPr>
-            </a:pPr>
-            <a:r>
-              <a:t>Frontend: React 18, TypeScript, Vite, Vanilla CSS Zinc dark-mode theme, Chart.js for data visualizations.</a:t>
-            </a:r>
-          </a:p>
-          <a:p>
-            <a:pPr>
-              <a:spcAft>
-                <a:spcPts val="1200"/>
-              </a:spcAft>
-              <a:defRPr sz="1600">
-                <a:solidFill>
-                  <a:srgbClr val="64748B"/>
-                </a:solidFill>
-                <a:latin typeface="Arial"/>
-              </a:defRPr>
-            </a:pPr>
-            <a:r>
-              <a:t>Backend: Python 3.11+, FastAPI (high-performance ASGI server), SQLAlchemy (Object-Relational Mapping).</a:t>
-            </a:r>
-          </a:p>
-          <a:p>
-            <a:pPr>
-              <a:spcAft>
-                <a:spcPts val="1200"/>
-              </a:spcAft>
-              <a:defRPr sz="1600">
-                <a:solidFill>
-                  <a:srgbClr val="64748B"/>
-                </a:solidFill>
-                <a:latin typeface="Arial"/>
-              </a:defRPr>
-            </a:pPr>
-            <a:r>
-              <a:t>Database: PostgreSQL for production setups, SQLite for local testing, PyMySQL as database driver.</a:t>
-            </a:r>
-          </a:p>
-          <a:p>
-            <a:pPr>
-              <a:spcAft>
-                <a:spcPts val="1200"/>
-              </a:spcAft>
-              <a:defRPr sz="1600">
-                <a:solidFill>
-                  <a:srgbClr val="64748B"/>
-                </a:solidFill>
-                <a:latin typeface="Arial"/>
-              </a:defRPr>
-            </a:pPr>
-            <a:r>
-              <a:t>Security: PyJWT for token generation, Cryptography for password salting, CORS origin protection.</a:t>
+              <a:t>Carbon Offset ROI (COROI)</a:t>
+            </a:r>
+          </a:p>
+        </p:txBody>
+      </p:sp>
+      <p:sp>
+        <p:nvSpPr>
+          <p:cNvPr id="3" name="TextBox 2"/>
+          <p:cNvSpPr txBox="1"/>
+          <p:nvPr/>
+        </p:nvSpPr>
+        <p:spPr>
+          <a:xfrm>
+            <a:off x="457200" y="1371600"/>
+            <a:ext cx="8229600" cy="4572000"/>
+          </a:xfrm>
+          <a:prstGeom prst="rect">
+            <a:avLst/>
+          </a:prstGeom>
+          <a:noFill/>
+        </p:spPr>
+        <p:txBody>
+          <a:bodyPr wrap="square" lIns="0" tIns="0" rIns="0" bIns="0">
+            <a:spAutoFit/>
+          </a:bodyPr>
+          <a:lstStyle/>
+          <a:p>
+            <a:pPr>
+              <a:spcAft>
+                <a:spcPts val="1400"/>
+              </a:spcAft>
+            </a:pPr>
+            <a:r>
+              <a:rPr sz="1800" b="1">
+                <a:solidFill>
+                  <a:srgbClr val="FAFAFA"/>
+                </a:solidFill>
+                <a:latin typeface="Arial"/>
+              </a:rPr>
+              <a:t>Index Concept:</a:t>
+            </a:r>
+            <a:r>
+              <a:rPr sz="1800">
+                <a:solidFill>
+                  <a:srgbClr val="A1A1AA"/>
+                </a:solidFill>
+                <a:latin typeface="Arial"/>
+              </a:rPr>
+              <a:t> Evaluates the cost efficiency of shifting workloads to low-intensity regional grids.</a:t>
+            </a:r>
+          </a:p>
+          <a:p>
+            <a:pPr>
+              <a:spcAft>
+                <a:spcPts val="1400"/>
+              </a:spcAft>
+            </a:pPr>
+            <a:r>
+              <a:rPr sz="1800" b="1">
+                <a:solidFill>
+                  <a:srgbClr val="FAFAFA"/>
+                </a:solidFill>
+                <a:latin typeface="Arial"/>
+              </a:rPr>
+              <a:t>Grid Differences:</a:t>
+            </a:r>
+            <a:r>
+              <a:rPr sz="1800">
+                <a:solidFill>
+                  <a:srgbClr val="A1A1AA"/>
+                </a:solidFill>
+                <a:latin typeface="Arial"/>
+              </a:rPr>
+              <a:t> Compares On-Premises coal grid (650g CO2/kWh) to GCP Europe-West1 nuclear grid (45g CO2/kWh).</a:t>
+            </a:r>
+          </a:p>
+          <a:p>
+            <a:pPr>
+              <a:spcAft>
+                <a:spcPts val="1400"/>
+              </a:spcAft>
+            </a:pPr>
+            <a:r>
+              <a:rPr sz="1800" b="1">
+                <a:solidFill>
+                  <a:srgbClr val="FAFAFA"/>
+                </a:solidFill>
+                <a:latin typeface="Arial"/>
+              </a:rPr>
+              <a:t>The Trade-Off:</a:t>
+            </a:r>
+            <a:r>
+              <a:rPr sz="1800">
+                <a:solidFill>
+                  <a:srgbClr val="A1A1AA"/>
+                </a:solidFill>
+                <a:latin typeface="Arial"/>
+              </a:rPr>
+              <a:t> Carbon routing may increase network latencies but completely eliminates carbon penalty offsets.</a:t>
+            </a:r>
+          </a:p>
+          <a:p>
+            <a:pPr>
+              <a:spcAft>
+                <a:spcPts val="1400"/>
+              </a:spcAft>
+            </a:pPr>
+            <a:r>
+              <a:rPr sz="1800" b="1">
+                <a:solidFill>
+                  <a:srgbClr val="FAFAFA"/>
+                </a:solidFill>
+                <a:latin typeface="Arial"/>
+              </a:rPr>
+              <a:t>Outcome Action:</a:t>
+            </a:r>
+            <a:r>
+              <a:rPr sz="1800">
+                <a:solidFill>
+                  <a:srgbClr val="A1A1AA"/>
+                </a:solidFill>
+                <a:latin typeface="Arial"/>
+              </a:rPr>
+              <a:t> Scheduler routes batch jobs to clean regions during off-peak times.</a:t>
             </a:r>
           </a:p>
         </p:txBody>
@@ -3801,6 +3943,14 @@
 <file path=ppt/slides/slide14.xml><?xml version="1.0" encoding="utf-8"?>
 <p:sld xmlns:a="http://schemas.openxmlformats.org/drawingml/2006/main" xmlns:p="http://schemas.openxmlformats.org/presentationml/2006/main" xmlns:r="http://schemas.openxmlformats.org/officeDocument/2006/relationships">
   <p:cSld>
+    <p:bg>
+      <p:bgPr>
+        <a:solidFill>
+          <a:srgbClr val="0C0C0F"/>
+        </a:solidFill>
+        <a:effectLst/>
+      </p:bgPr>
+    </p:bg>
     <p:spTree>
       <p:nvGrpSpPr>
         <p:cNvPr id="1" name=""/>
@@ -3810,125 +3960,159 @@
       <p:grpSpPr/>
       <p:sp>
         <p:nvSpPr>
-          <p:cNvPr id="2" name="Title 1"/>
-          <p:cNvSpPr>
-            <a:spLocks noGrp="1"/>
-          </p:cNvSpPr>
-          <p:nvPr>
-            <p:ph type="title"/>
-          </p:nvPr>
-        </p:nvSpPr>
-        <p:spPr/>
-        <p:txBody>
-          <a:bodyPr/>
+          <p:cNvPr id="2" name="TextBox 1"/>
+          <p:cNvSpPr txBox="1"/>
+          <p:nvPr/>
+        </p:nvSpPr>
+        <p:spPr>
+          <a:xfrm>
+            <a:off x="457200" y="365760"/>
+            <a:ext cx="8229600" cy="731520"/>
+          </a:xfrm>
+          <a:prstGeom prst="rect">
+            <a:avLst/>
+          </a:prstGeom>
+          <a:noFill/>
+        </p:spPr>
+        <p:txBody>
+          <a:bodyPr wrap="square" lIns="0" tIns="0" rIns="0" bIns="0">
+            <a:spAutoFit/>
+          </a:bodyPr>
           <a:lstStyle/>
           <a:p>
             <a:pPr>
               <a:defRPr sz="3600" b="1">
                 <a:solidFill>
-                  <a:srgbClr val="0F172A"/>
+                  <a:srgbClr val="3B82F6"/>
                 </a:solidFill>
                 <a:latin typeface="Arial"/>
               </a:defRPr>
             </a:pPr>
             <a:r>
-              <a:t>Performance &amp; Load Testing Results</a:t>
-            </a:r>
-          </a:p>
-        </p:txBody>
-      </p:sp>
-      <p:sp>
-        <p:nvSpPr>
-          <p:cNvPr id="3" name="Content Placeholder 2"/>
-          <p:cNvSpPr>
-            <a:spLocks noGrp="1"/>
-          </p:cNvSpPr>
-          <p:nvPr>
-            <p:ph idx="1"/>
-          </p:nvPr>
-        </p:nvSpPr>
-        <p:spPr/>
-        <p:txBody>
-          <a:bodyPr/>
-          <a:lstStyle/>
-          <a:p>
-            <a:pPr>
-              <a:spcAft>
-                <a:spcPts val="2400"/>
-              </a:spcAft>
-              <a:defRPr sz="2000" i="1">
-                <a:solidFill>
-                  <a:srgbClr val="6366F1"/>
-                </a:solidFill>
-                <a:latin typeface="Arial"/>
-              </a:defRPr>
-            </a:pPr>
-            <a:r>
-              <a:t>Optimizing Telemetry Query Performance</a:t>
-            </a:r>
-          </a:p>
-          <a:p>
-            <a:pPr>
-              <a:spcAft>
-                <a:spcPts val="1200"/>
-              </a:spcAft>
-              <a:defRPr sz="1600">
-                <a:solidFill>
-                  <a:srgbClr val="64748B"/>
-                </a:solidFill>
-                <a:latin typeface="Arial"/>
-              </a:defRPr>
-            </a:pPr>
-            <a:r>
-              <a:t>N+1 Resolution: Resolved DB query loops by pre-fetching deployment records into memory dictionaries.</a:t>
-            </a:r>
-          </a:p>
-          <a:p>
-            <a:pPr>
-              <a:spcAft>
-                <a:spcPts val="1200"/>
-              </a:spcAft>
-              <a:defRPr sz="1600">
-                <a:solidFill>
-                  <a:srgbClr val="64748B"/>
-                </a:solidFill>
-                <a:latin typeface="Arial"/>
-              </a:defRPr>
-            </a:pPr>
-            <a:r>
-              <a:t>Response Time: Achieved P50 latency of 2.6 seconds at a peak load of 1,000 concurrent requests.</a:t>
-            </a:r>
-          </a:p>
-          <a:p>
-            <a:pPr>
-              <a:spcAft>
-                <a:spcPts val="1200"/>
-              </a:spcAft>
-              <a:defRPr sz="1600">
-                <a:solidFill>
-                  <a:srgbClr val="64748B"/>
-                </a:solidFill>
-                <a:latin typeface="Arial"/>
-              </a:defRPr>
-            </a:pPr>
-            <a:r>
-              <a:t>SQLite Connection Optimization: Replaced standard SQLAlchemy connection pooling with NullPool to prevent write locks.</a:t>
-            </a:r>
-          </a:p>
-          <a:p>
-            <a:pPr>
-              <a:spcAft>
-                <a:spcPts val="1200"/>
-              </a:spcAft>
-              <a:defRPr sz="1600">
-                <a:solidFill>
-                  <a:srgbClr val="64748B"/>
-                </a:solidFill>
-                <a:latin typeface="Arial"/>
-              </a:defRPr>
-            </a:pPr>
-            <a:r>
-              <a:t>Memory &amp; CPU Stability: Documented stable 5.2% CPU and 132MB RAM usage during peak concurrency testing.</a:t>
+              <a:t>Executive &amp; Dashboard Previews</a:t>
+            </a:r>
+          </a:p>
+        </p:txBody>
+      </p:sp>
+      <p:sp>
+        <p:nvSpPr>
+          <p:cNvPr id="3" name="TextBox 2"/>
+          <p:cNvSpPr txBox="1"/>
+          <p:nvPr/>
+        </p:nvSpPr>
+        <p:spPr>
+          <a:xfrm>
+            <a:off x="457200" y="1371600"/>
+            <a:ext cx="8229600" cy="4572000"/>
+          </a:xfrm>
+          <a:prstGeom prst="rect">
+            <a:avLst/>
+          </a:prstGeom>
+          <a:noFill/>
+        </p:spPr>
+        <p:txBody>
+          <a:bodyPr wrap="square" lIns="0" tIns="0" rIns="0" bIns="0">
+            <a:spAutoFit/>
+          </a:bodyPr>
+          <a:lstStyle/>
+          <a:p>
+            <a:pPr>
+              <a:spcAft>
+                <a:spcPts val="1400"/>
+              </a:spcAft>
+            </a:pPr>
+            <a:r>
+              <a:rPr sz="1800" b="1">
+                <a:solidFill>
+                  <a:srgbClr val="FAFAFA"/>
+                </a:solidFill>
+                <a:latin typeface="Arial"/>
+              </a:rPr>
+              <a:t>Dashboard Interface (sizing.png):</a:t>
+            </a:r>
+            <a:r>
+              <a:rPr sz="1800">
+                <a:solidFill>
+                  <a:srgbClr val="A1A1AA"/>
+                </a:solidFill>
+                <a:latin typeface="Arial"/>
+              </a:rPr>
+              <a:t> KPI overview widgets, active node grid, and 48-hour utilization timelines.</a:t>
+            </a:r>
+          </a:p>
+          <a:p>
+            <a:pPr>
+              <a:spcAft>
+                <a:spcPts val="1400"/>
+              </a:spcAft>
+            </a:pPr>
+            <a:r>
+              <a:rPr sz="1800" b="1">
+                <a:solidFill>
+                  <a:srgbClr val="FAFAFA"/>
+                </a:solidFill>
+                <a:latin typeface="Arial"/>
+              </a:rPr>
+              <a:t>Outlier Analytics (anomalies.png):</a:t>
+            </a:r>
+            <a:r>
+              <a:rPr sz="1800">
+                <a:solidFill>
+                  <a:srgbClr val="A1A1AA"/>
+                </a:solidFill>
+                <a:latin typeface="Arial"/>
+              </a:rPr>
+              <a:t> Z-score outlier graphs detailing historical server spikes.</a:t>
+            </a:r>
+          </a:p>
+          <a:p>
+            <a:pPr>
+              <a:spcAft>
+                <a:spcPts val="1400"/>
+              </a:spcAft>
+            </a:pPr>
+            <a:r>
+              <a:rPr sz="1800" b="1">
+                <a:solidFill>
+                  <a:srgbClr val="FAFAFA"/>
+                </a:solidFill>
+                <a:latin typeface="Arial"/>
+              </a:rPr>
+              <a:t>KPI Drilldowns (drilldown.png):</a:t>
+            </a:r>
+            <a:r>
+              <a:rPr sz="1800">
+                <a:solidFill>
+                  <a:srgbClr val="A1A1AA"/>
+                </a:solidFill>
+                <a:latin typeface="Arial"/>
+              </a:rPr>
+              <a:t> Sliding sidebar panels displaying node-level cost allocations.</a:t>
+            </a:r>
+          </a:p>
+          <a:p>
+            <a:pPr>
+              <a:spcAft>
+                <a:spcPts val="1400"/>
+              </a:spcAft>
+            </a:pPr>
+            <a:r>
+              <a:rPr sz="1800" b="1">
+                <a:solidFill>
+                  <a:srgbClr val="FAFAFA"/>
+                </a:solidFill>
+                <a:latin typeface="Arial"/>
+              </a:rPr>
+              <a:t>Security &amp; Auditing Portal (admin_logs.png):</a:t>
+            </a:r>
+            <a:r>
+              <a:rPr sz="1800">
+                <a:solidFill>
+                  <a:srgbClr val="A1A1AA"/>
+                </a:solidFill>
+                <a:latin typeface="Arial"/>
+              </a:rPr>
+              <a:t> Immutable transaction log tables displaying JWT user activity.</a:t>
             </a:r>
           </a:p>
         </p:txBody>
@@ -3944,6 +4128,14 @@
 <file path=ppt/slides/slide15.xml><?xml version="1.0" encoding="utf-8"?>
 <p:sld xmlns:a="http://schemas.openxmlformats.org/drawingml/2006/main" xmlns:p="http://schemas.openxmlformats.org/presentationml/2006/main" xmlns:r="http://schemas.openxmlformats.org/officeDocument/2006/relationships">
   <p:cSld>
+    <p:bg>
+      <p:bgPr>
+        <a:solidFill>
+          <a:srgbClr val="0C0C0F"/>
+        </a:solidFill>
+        <a:effectLst/>
+      </p:bgPr>
+    </p:bg>
     <p:spTree>
       <p:nvGrpSpPr>
         <p:cNvPr id="1" name=""/>
@@ -3953,125 +4145,159 @@
       <p:grpSpPr/>
       <p:sp>
         <p:nvSpPr>
-          <p:cNvPr id="2" name="Title 1"/>
-          <p:cNvSpPr>
-            <a:spLocks noGrp="1"/>
-          </p:cNvSpPr>
-          <p:nvPr>
-            <p:ph type="title"/>
-          </p:nvPr>
-        </p:nvSpPr>
-        <p:spPr/>
-        <p:txBody>
-          <a:bodyPr/>
+          <p:cNvPr id="2" name="TextBox 1"/>
+          <p:cNvSpPr txBox="1"/>
+          <p:nvPr/>
+        </p:nvSpPr>
+        <p:spPr>
+          <a:xfrm>
+            <a:off x="457200" y="365760"/>
+            <a:ext cx="8229600" cy="731520"/>
+          </a:xfrm>
+          <a:prstGeom prst="rect">
+            <a:avLst/>
+          </a:prstGeom>
+          <a:noFill/>
+        </p:spPr>
+        <p:txBody>
+          <a:bodyPr wrap="square" lIns="0" tIns="0" rIns="0" bIns="0">
+            <a:spAutoFit/>
+          </a:bodyPr>
           <a:lstStyle/>
           <a:p>
             <a:pPr>
               <a:defRPr sz="3600" b="1">
                 <a:solidFill>
-                  <a:srgbClr val="0F172A"/>
+                  <a:srgbClr val="3B82F6"/>
                 </a:solidFill>
                 <a:latin typeface="Arial"/>
               </a:defRPr>
             </a:pPr>
             <a:r>
-              <a:t>Security &amp; Audit Validation</a:t>
-            </a:r>
-          </a:p>
-        </p:txBody>
-      </p:sp>
-      <p:sp>
-        <p:nvSpPr>
-          <p:cNvPr id="3" name="Content Placeholder 2"/>
-          <p:cNvSpPr>
-            <a:spLocks noGrp="1"/>
-          </p:cNvSpPr>
-          <p:nvPr>
-            <p:ph idx="1"/>
-          </p:nvPr>
-        </p:nvSpPr>
-        <p:spPr/>
-        <p:txBody>
-          <a:bodyPr/>
-          <a:lstStyle/>
-          <a:p>
-            <a:pPr>
-              <a:spcAft>
-                <a:spcPts val="2400"/>
-              </a:spcAft>
-              <a:defRPr sz="2000" i="1">
-                <a:solidFill>
-                  <a:srgbClr val="6366F1"/>
-                </a:solidFill>
-                <a:latin typeface="Arial"/>
-              </a:defRPr>
-            </a:pPr>
-            <a:r>
-              <a:t>Securing Telemetry Audits and Exports</a:t>
-            </a:r>
-          </a:p>
-          <a:p>
-            <a:pPr>
-              <a:spcAft>
-                <a:spcPts val="1200"/>
-              </a:spcAft>
-              <a:defRPr sz="1600">
-                <a:solidFill>
-                  <a:srgbClr val="64748B"/>
-                </a:solidFill>
-                <a:latin typeface="Arial"/>
-              </a:defRPr>
-            </a:pPr>
-            <a:r>
-              <a:t>Token Security: JWT validation prevents unauthorized access to secure metrics, anomalies, and logs.</a:t>
-            </a:r>
-          </a:p>
-          <a:p>
-            <a:pPr>
-              <a:spcAft>
-                <a:spcPts val="1200"/>
-              </a:spcAft>
-              <a:defRPr sz="1600">
-                <a:solidFill>
-                  <a:srgbClr val="64748B"/>
-                </a:solidFill>
-                <a:latin typeface="Arial"/>
-              </a:defRPr>
-            </a:pPr>
-            <a:r>
-              <a:t>Input Validation: Pydantic schemas filter malformed payloads and reject invalid data inputs.</a:t>
-            </a:r>
-          </a:p>
-          <a:p>
-            <a:pPr>
-              <a:spcAft>
-                <a:spcPts val="1200"/>
-              </a:spcAft>
-              <a:defRPr sz="1600">
-                <a:solidFill>
-                  <a:srgbClr val="64748B"/>
-                </a:solidFill>
-                <a:latin typeface="Arial"/>
-              </a:defRPr>
-            </a:pPr>
-            <a:r>
-              <a:t>SQL Injection Prevention: SQLAlchemy ORM parameters parameterized all queries, eliminating SQL injection risk.</a:t>
-            </a:r>
-          </a:p>
-          <a:p>
-            <a:pPr>
-              <a:spcAft>
-                <a:spcPts val="1200"/>
-              </a:spcAft>
-              <a:defRPr sz="1600">
-                <a:solidFill>
-                  <a:srgbClr val="64748B"/>
-                </a:solidFill>
-                <a:latin typeface="Arial"/>
-              </a:defRPr>
-            </a:pPr>
-            <a:r>
-              <a:t>CORS Protection: Configured origins control API resource sharing, blocking unauthorized domains.</a:t>
+              <a:t>Trend &amp; Cohort Analytics</a:t>
+            </a:r>
+          </a:p>
+        </p:txBody>
+      </p:sp>
+      <p:sp>
+        <p:nvSpPr>
+          <p:cNvPr id="3" name="TextBox 2"/>
+          <p:cNvSpPr txBox="1"/>
+          <p:nvPr/>
+        </p:nvSpPr>
+        <p:spPr>
+          <a:xfrm>
+            <a:off x="457200" y="1371600"/>
+            <a:ext cx="8229600" cy="4572000"/>
+          </a:xfrm>
+          <a:prstGeom prst="rect">
+            <a:avLst/>
+          </a:prstGeom>
+          <a:noFill/>
+        </p:spPr>
+        <p:txBody>
+          <a:bodyPr wrap="square" lIns="0" tIns="0" rIns="0" bIns="0">
+            <a:spAutoFit/>
+          </a:bodyPr>
+          <a:lstStyle/>
+          <a:p>
+            <a:pPr>
+              <a:spcAft>
+                <a:spcPts val="1400"/>
+              </a:spcAft>
+            </a:pPr>
+            <a:r>
+              <a:rPr sz="1800" b="1">
+                <a:solidFill>
+                  <a:srgbClr val="FAFAFA"/>
+                </a:solidFill>
+                <a:latin typeface="Arial"/>
+              </a:rPr>
+              <a:t>Multi-Range Filters:</a:t>
+            </a:r>
+            <a:r>
+              <a:rPr sz="1800">
+                <a:solidFill>
+                  <a:srgbClr val="A1A1AA"/>
+                </a:solidFill>
+                <a:latin typeface="Arial"/>
+              </a:rPr>
+              <a:t> Supports 7-day, 30-day, and custom timeline aggregation windows.</a:t>
+            </a:r>
+          </a:p>
+          <a:p>
+            <a:pPr>
+              <a:spcAft>
+                <a:spcPts val="1400"/>
+              </a:spcAft>
+            </a:pPr>
+            <a:r>
+              <a:rPr sz="1800" b="1">
+                <a:solidFill>
+                  <a:srgbClr val="FAFAFA"/>
+                </a:solidFill>
+                <a:latin typeface="Arial"/>
+              </a:rPr>
+              <a:t>Diurnal Load Profiles:</a:t>
+            </a:r>
+            <a:r>
+              <a:rPr sz="1800">
+                <a:solidFill>
+                  <a:srgbClr val="A1A1AA"/>
+                </a:solidFill>
+                <a:latin typeface="Arial"/>
+              </a:rPr>
+              <a:t> Identifies node demand spikes (peak hours 9 AM - 6 PM) to plan scheduling.</a:t>
+            </a:r>
+          </a:p>
+          <a:p>
+            <a:pPr>
+              <a:spcAft>
+                <a:spcPts val="1400"/>
+              </a:spcAft>
+            </a:pPr>
+            <a:r>
+              <a:rPr sz="1800" b="1">
+                <a:solidFill>
+                  <a:srgbClr val="FAFAFA"/>
+                </a:solidFill>
+                <a:latin typeface="Arial"/>
+              </a:rPr>
+              <a:t>Cohort Analysis:</a:t>
+            </a:r>
+            <a:r>
+              <a:rPr sz="1800">
+                <a:solidFill>
+                  <a:srgbClr val="A1A1AA"/>
+                </a:solidFill>
+                <a:latin typeface="Arial"/>
+              </a:rPr>
+              <a:t> Compares model execution profiles to pinpoint underperforming instances.</a:t>
+            </a:r>
+          </a:p>
+          <a:p>
+            <a:pPr>
+              <a:spcAft>
+                <a:spcPts val="1400"/>
+              </a:spcAft>
+            </a:pPr>
+            <a:r>
+              <a:rPr sz="1800" b="1">
+                <a:solidFill>
+                  <a:srgbClr val="FAFAFA"/>
+                </a:solidFill>
+                <a:latin typeface="Arial"/>
+              </a:rPr>
+              <a:t>Green Savings Tracking:</a:t>
+            </a:r>
+            <a:r>
+              <a:rPr sz="1800">
+                <a:solidFill>
+                  <a:srgbClr val="A1A1AA"/>
+                </a:solidFill>
+                <a:latin typeface="Arial"/>
+              </a:rPr>
+              <a:t> Measures GICP improvements and emission reductions post-optimization.</a:t>
             </a:r>
           </a:p>
         </p:txBody>
@@ -4087,6 +4313,14 @@
 <file path=ppt/slides/slide16.xml><?xml version="1.0" encoding="utf-8"?>
 <p:sld xmlns:a="http://schemas.openxmlformats.org/drawingml/2006/main" xmlns:p="http://schemas.openxmlformats.org/presentationml/2006/main" xmlns:r="http://schemas.openxmlformats.org/officeDocument/2006/relationships">
   <p:cSld>
+    <p:bg>
+      <p:bgPr>
+        <a:solidFill>
+          <a:srgbClr val="0C0C0F"/>
+        </a:solidFill>
+        <a:effectLst/>
+      </p:bgPr>
+    </p:bg>
     <p:spTree>
       <p:nvGrpSpPr>
         <p:cNvPr id="1" name=""/>
@@ -4096,125 +4330,159 @@
       <p:grpSpPr/>
       <p:sp>
         <p:nvSpPr>
-          <p:cNvPr id="2" name="Title 1"/>
-          <p:cNvSpPr>
-            <a:spLocks noGrp="1"/>
-          </p:cNvSpPr>
-          <p:nvPr>
-            <p:ph type="title"/>
-          </p:nvPr>
-        </p:nvSpPr>
-        <p:spPr/>
-        <p:txBody>
-          <a:bodyPr/>
+          <p:cNvPr id="2" name="TextBox 1"/>
+          <p:cNvSpPr txBox="1"/>
+          <p:nvPr/>
+        </p:nvSpPr>
+        <p:spPr>
+          <a:xfrm>
+            <a:off x="457200" y="365760"/>
+            <a:ext cx="8229600" cy="731520"/>
+          </a:xfrm>
+          <a:prstGeom prst="rect">
+            <a:avLst/>
+          </a:prstGeom>
+          <a:noFill/>
+        </p:spPr>
+        <p:txBody>
+          <a:bodyPr wrap="square" lIns="0" tIns="0" rIns="0" bIns="0">
+            <a:spAutoFit/>
+          </a:bodyPr>
           <a:lstStyle/>
           <a:p>
             <a:pPr>
               <a:defRPr sz="3600" b="1">
                 <a:solidFill>
-                  <a:srgbClr val="0F172A"/>
+                  <a:srgbClr val="3B82F6"/>
                 </a:solidFill>
                 <a:latin typeface="Arial"/>
               </a:defRPr>
             </a:pPr>
             <a:r>
-              <a:t>Business Impact &amp; Sizing ROI</a:t>
-            </a:r>
-          </a:p>
-        </p:txBody>
-      </p:sp>
-      <p:sp>
-        <p:nvSpPr>
-          <p:cNvPr id="3" name="Content Placeholder 2"/>
-          <p:cNvSpPr>
-            <a:spLocks noGrp="1"/>
-          </p:cNvSpPr>
-          <p:nvPr>
-            <p:ph idx="1"/>
-          </p:nvPr>
-        </p:nvSpPr>
-        <p:spPr/>
-        <p:txBody>
-          <a:bodyPr/>
-          <a:lstStyle/>
-          <a:p>
-            <a:pPr>
-              <a:spcAft>
-                <a:spcPts val="2400"/>
-              </a:spcAft>
-              <a:defRPr sz="2000" i="1">
-                <a:solidFill>
-                  <a:srgbClr val="6366F1"/>
-                </a:solidFill>
-                <a:latin typeface="Arial"/>
-              </a:defRPr>
-            </a:pPr>
-            <a:r>
-              <a:t>Realizing Financial and Sustainable Value</a:t>
-            </a:r>
-          </a:p>
-          <a:p>
-            <a:pPr>
-              <a:spcAft>
-                <a:spcPts val="1200"/>
-              </a:spcAft>
-              <a:defRPr sz="1600">
-                <a:solidFill>
-                  <a:srgbClr val="64748B"/>
-                </a:solidFill>
-                <a:latin typeface="Arial"/>
-              </a:defRPr>
-            </a:pPr>
-            <a:r>
-              <a:t>Quantified savings: Decommissioning underutilized clusters yields an estimated weekly saving of $2,499.73.</a:t>
-            </a:r>
-          </a:p>
-          <a:p>
-            <a:pPr>
-              <a:spcAft>
-                <a:spcPts val="1200"/>
-              </a:spcAft>
-              <a:defRPr sz="1600">
-                <a:solidFill>
-                  <a:srgbClr val="64748B"/>
-                </a:solidFill>
-                <a:latin typeface="Arial"/>
-              </a:defRPr>
-            </a:pPr>
-            <a:r>
-              <a:t>Green Achievements: Reduces carbon emissions by 89.06 kg of CO2 per week per cluster.</a:t>
-            </a:r>
-          </a:p>
-          <a:p>
-            <a:pPr>
-              <a:spcAft>
-                <a:spcPts val="1200"/>
-              </a:spcAft>
-              <a:defRPr sz="1600">
-                <a:solidFill>
-                  <a:srgbClr val="64748B"/>
-                </a:solidFill>
-                <a:latin typeface="Arial"/>
-              </a:defRPr>
-            </a:pPr>
-            <a:r>
-              <a:t>Customer Experience Safeguards: Warns teams if cost-cutting compromises SLA targets, maintaining performance.</a:t>
-            </a:r>
-          </a:p>
-          <a:p>
-            <a:pPr>
-              <a:spcAft>
-                <a:spcPts val="1200"/>
-              </a:spcAft>
-              <a:defRPr sz="1600">
-                <a:solidFill>
-                  <a:srgbClr val="64748B"/>
-                </a:solidFill>
-                <a:latin typeface="Arial"/>
-              </a:defRPr>
-            </a:pPr>
-            <a:r>
-              <a:t>Investment ROI: Promotes corporate green initiatives by connecting environmental metrics to core financial savings.</a:t>
+              <a:t>Z-Score Anomaly Detection</a:t>
+            </a:r>
+          </a:p>
+        </p:txBody>
+      </p:sp>
+      <p:sp>
+        <p:nvSpPr>
+          <p:cNvPr id="3" name="TextBox 2"/>
+          <p:cNvSpPr txBox="1"/>
+          <p:nvPr/>
+        </p:nvSpPr>
+        <p:spPr>
+          <a:xfrm>
+            <a:off x="457200" y="1371600"/>
+            <a:ext cx="8229600" cy="4572000"/>
+          </a:xfrm>
+          <a:prstGeom prst="rect">
+            <a:avLst/>
+          </a:prstGeom>
+          <a:noFill/>
+        </p:spPr>
+        <p:txBody>
+          <a:bodyPr wrap="square" lIns="0" tIns="0" rIns="0" bIns="0">
+            <a:spAutoFit/>
+          </a:bodyPr>
+          <a:lstStyle/>
+          <a:p>
+            <a:pPr>
+              <a:spcAft>
+                <a:spcPts val="1400"/>
+              </a:spcAft>
+            </a:pPr>
+            <a:r>
+              <a:rPr sz="1800" b="1">
+                <a:solidFill>
+                  <a:srgbClr val="FAFAFA"/>
+                </a:solidFill>
+                <a:latin typeface="Arial"/>
+              </a:rPr>
+              <a:t>Dynamic Baselines:</a:t>
+            </a:r>
+            <a:r>
+              <a:rPr sz="1800">
+                <a:solidFill>
+                  <a:srgbClr val="A1A1AA"/>
+                </a:solidFill>
+                <a:latin typeface="Arial"/>
+              </a:rPr>
+              <a:t> Avoids static thresholds by computing sliding-window mean and standard deviations.</a:t>
+            </a:r>
+          </a:p>
+          <a:p>
+            <a:pPr>
+              <a:spcAft>
+                <a:spcPts val="1400"/>
+              </a:spcAft>
+            </a:pPr>
+            <a:r>
+              <a:rPr sz="1800" b="1">
+                <a:solidFill>
+                  <a:srgbClr val="FAFAFA"/>
+                </a:solidFill>
+                <a:latin typeface="Arial"/>
+              </a:rPr>
+              <a:t>Latency Spikes:</a:t>
+            </a:r>
+            <a:r>
+              <a:rPr sz="1800">
+                <a:solidFill>
+                  <a:srgbClr val="A1A1AA"/>
+                </a:solidFill>
+                <a:latin typeface="Arial"/>
+              </a:rPr>
+              <a:t> Flags transactions exceeding a Z-score of 2.2 as high severity spikes.</a:t>
+            </a:r>
+          </a:p>
+          <a:p>
+            <a:pPr>
+              <a:spcAft>
+                <a:spcPts val="1400"/>
+              </a:spcAft>
+            </a:pPr>
+            <a:r>
+              <a:rPr sz="1800" b="1">
+                <a:solidFill>
+                  <a:srgbClr val="FAFAFA"/>
+                </a:solidFill>
+                <a:latin typeface="Arial"/>
+              </a:rPr>
+              <a:t>Idle Waste Warnings:</a:t>
+            </a:r>
+            <a:r>
+              <a:rPr sz="1800">
+                <a:solidFill>
+                  <a:srgbClr val="A1A1AA"/>
+                </a:solidFill>
+                <a:latin typeface="Arial"/>
+              </a:rPr>
+              <a:t> Triggers alerts for nodes running under 10% average load for 12+ consecutive hours.</a:t>
+            </a:r>
+          </a:p>
+          <a:p>
+            <a:pPr>
+              <a:spcAft>
+                <a:spcPts val="1400"/>
+              </a:spcAft>
+            </a:pPr>
+            <a:r>
+              <a:rPr sz="1800" b="1">
+                <a:solidFill>
+                  <a:srgbClr val="FAFAFA"/>
+                </a:solidFill>
+                <a:latin typeface="Arial"/>
+              </a:rPr>
+              <a:t>Root Cause Diagnostics:</a:t>
+            </a:r>
+            <a:r>
+              <a:rPr sz="1800">
+                <a:solidFill>
+                  <a:srgbClr val="A1A1AA"/>
+                </a:solidFill>
+                <a:latin typeface="Arial"/>
+              </a:rPr>
+              <a:t> Automatically pairs anomalies with technical diagnoses and routing solutions.</a:t>
             </a:r>
           </a:p>
         </p:txBody>
@@ -4230,6 +4498,14 @@
 <file path=ppt/slides/slide17.xml><?xml version="1.0" encoding="utf-8"?>
 <p:sld xmlns:a="http://schemas.openxmlformats.org/drawingml/2006/main" xmlns:p="http://schemas.openxmlformats.org/presentationml/2006/main" xmlns:r="http://schemas.openxmlformats.org/officeDocument/2006/relationships">
   <p:cSld>
+    <p:bg>
+      <p:bgPr>
+        <a:solidFill>
+          <a:srgbClr val="0C0C0F"/>
+        </a:solidFill>
+        <a:effectLst/>
+      </p:bgPr>
+    </p:bg>
     <p:spTree>
       <p:nvGrpSpPr>
         <p:cNvPr id="1" name=""/>
@@ -4239,125 +4515,159 @@
       <p:grpSpPr/>
       <p:sp>
         <p:nvSpPr>
-          <p:cNvPr id="2" name="Title 1"/>
-          <p:cNvSpPr>
-            <a:spLocks noGrp="1"/>
-          </p:cNvSpPr>
-          <p:nvPr>
-            <p:ph type="title"/>
-          </p:nvPr>
-        </p:nvSpPr>
-        <p:spPr/>
-        <p:txBody>
-          <a:bodyPr/>
+          <p:cNvPr id="2" name="TextBox 1"/>
+          <p:cNvSpPr txBox="1"/>
+          <p:nvPr/>
+        </p:nvSpPr>
+        <p:spPr>
+          <a:xfrm>
+            <a:off x="457200" y="365760"/>
+            <a:ext cx="8229600" cy="731520"/>
+          </a:xfrm>
+          <a:prstGeom prst="rect">
+            <a:avLst/>
+          </a:prstGeom>
+          <a:noFill/>
+        </p:spPr>
+        <p:txBody>
+          <a:bodyPr wrap="square" lIns="0" tIns="0" rIns="0" bIns="0">
+            <a:spAutoFit/>
+          </a:bodyPr>
           <a:lstStyle/>
           <a:p>
             <a:pPr>
               <a:defRPr sz="3600" b="1">
                 <a:solidFill>
-                  <a:srgbClr val="0F172A"/>
+                  <a:srgbClr val="3B82F6"/>
                 </a:solidFill>
                 <a:latin typeface="Arial"/>
               </a:defRPr>
             </a:pPr>
             <a:r>
-              <a:t>Future Scope &amp; Improvements</a:t>
-            </a:r>
-          </a:p>
-        </p:txBody>
-      </p:sp>
-      <p:sp>
-        <p:nvSpPr>
-          <p:cNvPr id="3" name="Content Placeholder 2"/>
-          <p:cNvSpPr>
-            <a:spLocks noGrp="1"/>
-          </p:cNvSpPr>
-          <p:nvPr>
-            <p:ph idx="1"/>
-          </p:nvPr>
-        </p:nvSpPr>
-        <p:spPr/>
-        <p:txBody>
-          <a:bodyPr/>
-          <a:lstStyle/>
-          <a:p>
-            <a:pPr>
-              <a:spcAft>
-                <a:spcPts val="2400"/>
-              </a:spcAft>
-              <a:defRPr sz="2000" i="1">
-                <a:solidFill>
-                  <a:srgbClr val="6366F1"/>
-                </a:solidFill>
-                <a:latin typeface="Arial"/>
-              </a:defRPr>
-            </a:pPr>
-            <a:r>
-              <a:t>Moving from Monitoring to Autonomous Optimizations</a:t>
-            </a:r>
-          </a:p>
-          <a:p>
-            <a:pPr>
-              <a:spcAft>
-                <a:spcPts val="1200"/>
-              </a:spcAft>
-              <a:defRPr sz="1600">
-                <a:solidFill>
-                  <a:srgbClr val="64748B"/>
-                </a:solidFill>
-                <a:latin typeface="Arial"/>
-              </a:defRPr>
-            </a:pPr>
-            <a:r>
-              <a:t>Autonomous Scaling: Connect the sizing API to cloud providers (e.g. AWS EKS) to automatically scale node pools.</a:t>
-            </a:r>
-          </a:p>
-          <a:p>
-            <a:pPr>
-              <a:spcAft>
-                <a:spcPts val="1200"/>
-              </a:spcAft>
-              <a:defRPr sz="1600">
-                <a:solidFill>
-                  <a:srgbClr val="64748B"/>
-                </a:solidFill>
-                <a:latin typeface="Arial"/>
-              </a:defRPr>
-            </a:pPr>
-            <a:r>
-              <a:t>Machine Learning Forecasts: Build regression models to predict compute demands and preemptively allocate spot instances.</a:t>
-            </a:r>
-          </a:p>
-          <a:p>
-            <a:pPr>
-              <a:spcAft>
-                <a:spcPts val="1200"/>
-              </a:spcAft>
-              <a:defRPr sz="1600">
-                <a:solidFill>
-                  <a:srgbClr val="64748B"/>
-                </a:solidFill>
-                <a:latin typeface="Arial"/>
-              </a:defRPr>
-            </a:pPr>
-            <a:r>
-              <a:t>Carbon Offset Marketplace: Integrate carbon credit APIs to allow teams to purchase offsets directly from the dashboard.</a:t>
-            </a:r>
-          </a:p>
-          <a:p>
-            <a:pPr>
-              <a:spcAft>
-                <a:spcPts val="1200"/>
-              </a:spcAft>
-              <a:defRPr sz="1600">
-                <a:solidFill>
-                  <a:srgbClr val="64748B"/>
-                </a:solidFill>
-                <a:latin typeface="Arial"/>
-              </a:defRPr>
-            </a:pPr>
-            <a:r>
-              <a:t>Multi-Tenant SaaS: Upgrade database tenancy to host and manage isolated accounts for multiple enterprises.</a:t>
+              <a:t>AI FinOps Advisor</a:t>
+            </a:r>
+          </a:p>
+        </p:txBody>
+      </p:sp>
+      <p:sp>
+        <p:nvSpPr>
+          <p:cNvPr id="3" name="TextBox 2"/>
+          <p:cNvSpPr txBox="1"/>
+          <p:nvPr/>
+        </p:nvSpPr>
+        <p:spPr>
+          <a:xfrm>
+            <a:off x="457200" y="1371600"/>
+            <a:ext cx="8229600" cy="4572000"/>
+          </a:xfrm>
+          <a:prstGeom prst="rect">
+            <a:avLst/>
+          </a:prstGeom>
+          <a:noFill/>
+        </p:spPr>
+        <p:txBody>
+          <a:bodyPr wrap="square" lIns="0" tIns="0" rIns="0" bIns="0">
+            <a:spAutoFit/>
+          </a:bodyPr>
+          <a:lstStyle/>
+          <a:p>
+            <a:pPr>
+              <a:spcAft>
+                <a:spcPts val="1400"/>
+              </a:spcAft>
+            </a:pPr>
+            <a:r>
+              <a:rPr sz="1800" b="1">
+                <a:solidFill>
+                  <a:srgbClr val="FAFAFA"/>
+                </a:solidFill>
+                <a:latin typeface="Arial"/>
+              </a:rPr>
+              <a:t>Context Integration:</a:t>
+            </a:r>
+            <a:r>
+              <a:rPr sz="1800">
+                <a:solidFill>
+                  <a:srgbClr val="A1A1AA"/>
+                </a:solidFill>
+                <a:latin typeface="Arial"/>
+              </a:rPr>
+              <a:t> Feeds active cluster costs, idle penalties, and carbon metrics directly to the LLM context.</a:t>
+            </a:r>
+          </a:p>
+          <a:p>
+            <a:pPr>
+              <a:spcAft>
+                <a:spcPts val="1400"/>
+              </a:spcAft>
+            </a:pPr>
+            <a:r>
+              <a:rPr sz="1800" b="1">
+                <a:solidFill>
+                  <a:srgbClr val="FAFAFA"/>
+                </a:solidFill>
+                <a:latin typeface="Arial"/>
+              </a:rPr>
+              <a:t>Natural Language Interface:</a:t>
+            </a:r>
+            <a:r>
+              <a:rPr sz="1800">
+                <a:solidFill>
+                  <a:srgbClr val="A1A1AA"/>
+                </a:solidFill>
+                <a:latin typeface="Arial"/>
+              </a:rPr>
+              <a:t> Answering queries like 'How can I reduce costs by 20%?' or 'Which nodes are underperforming?'.</a:t>
+            </a:r>
+          </a:p>
+          <a:p>
+            <a:pPr>
+              <a:spcAft>
+                <a:spcPts val="1400"/>
+              </a:spcAft>
+            </a:pPr>
+            <a:r>
+              <a:rPr sz="1800" b="1">
+                <a:solidFill>
+                  <a:srgbClr val="FAFAFA"/>
+                </a:solidFill>
+                <a:latin typeface="Arial"/>
+              </a:rPr>
+              <a:t>Actionable Recommendations:</a:t>
+            </a:r>
+            <a:r>
+              <a:rPr sz="1800">
+                <a:solidFill>
+                  <a:srgbClr val="A1A1AA"/>
+                </a:solidFill>
+                <a:latin typeface="Arial"/>
+              </a:rPr>
+              <a:t> Provides consulting-grade suggestions detailing weekly cost savings.</a:t>
+            </a:r>
+          </a:p>
+          <a:p>
+            <a:pPr>
+              <a:spcAft>
+                <a:spcPts val="1400"/>
+              </a:spcAft>
+            </a:pPr>
+            <a:r>
+              <a:rPr sz="1800" b="1">
+                <a:solidFill>
+                  <a:srgbClr val="FAFAFA"/>
+                </a:solidFill>
+                <a:latin typeface="Arial"/>
+              </a:rPr>
+              <a:t>Technical Fallback Rules:</a:t>
+            </a:r>
+            <a:r>
+              <a:rPr sz="1800">
+                <a:solidFill>
+                  <a:srgbClr val="A1A1AA"/>
+                </a:solidFill>
+                <a:latin typeface="Arial"/>
+              </a:rPr>
+              <a:t> Rule-based fallback executes on the database if the LLM API is offline.</a:t>
             </a:r>
           </a:p>
         </p:txBody>
@@ -4373,6 +4683,14 @@
 <file path=ppt/slides/slide18.xml><?xml version="1.0" encoding="utf-8"?>
 <p:sld xmlns:a="http://schemas.openxmlformats.org/drawingml/2006/main" xmlns:p="http://schemas.openxmlformats.org/presentationml/2006/main" xmlns:r="http://schemas.openxmlformats.org/officeDocument/2006/relationships">
   <p:cSld>
+    <p:bg>
+      <p:bgPr>
+        <a:solidFill>
+          <a:srgbClr val="0C0C0F"/>
+        </a:solidFill>
+        <a:effectLst/>
+      </p:bgPr>
+    </p:bg>
     <p:spTree>
       <p:nvGrpSpPr>
         <p:cNvPr id="1" name=""/>
@@ -4382,125 +4700,344 @@
       <p:grpSpPr/>
       <p:sp>
         <p:nvSpPr>
-          <p:cNvPr id="2" name="Title 1"/>
-          <p:cNvSpPr>
-            <a:spLocks noGrp="1"/>
-          </p:cNvSpPr>
-          <p:nvPr>
-            <p:ph type="title"/>
-          </p:nvPr>
-        </p:nvSpPr>
-        <p:spPr/>
-        <p:txBody>
-          <a:bodyPr/>
+          <p:cNvPr id="2" name="TextBox 1"/>
+          <p:cNvSpPr txBox="1"/>
+          <p:nvPr/>
+        </p:nvSpPr>
+        <p:spPr>
+          <a:xfrm>
+            <a:off x="457200" y="365760"/>
+            <a:ext cx="8229600" cy="731520"/>
+          </a:xfrm>
+          <a:prstGeom prst="rect">
+            <a:avLst/>
+          </a:prstGeom>
+          <a:noFill/>
+        </p:spPr>
+        <p:txBody>
+          <a:bodyPr wrap="square" lIns="0" tIns="0" rIns="0" bIns="0">
+            <a:spAutoFit/>
+          </a:bodyPr>
           <a:lstStyle/>
           <a:p>
             <a:pPr>
               <a:defRPr sz="3600" b="1">
                 <a:solidFill>
-                  <a:srgbClr val="0F172A"/>
+                  <a:srgbClr val="3B82F6"/>
                 </a:solidFill>
                 <a:latin typeface="Arial"/>
               </a:defRPr>
             </a:pPr>
             <a:r>
-              <a:t>Conclusion</a:t>
-            </a:r>
-          </a:p>
-        </p:txBody>
-      </p:sp>
-      <p:sp>
-        <p:nvSpPr>
-          <p:cNvPr id="3" name="Content Placeholder 2"/>
-          <p:cNvSpPr>
-            <a:spLocks noGrp="1"/>
-          </p:cNvSpPr>
-          <p:nvPr>
-            <p:ph idx="1"/>
-          </p:nvPr>
-        </p:nvSpPr>
-        <p:spPr/>
-        <p:txBody>
-          <a:bodyPr/>
-          <a:lstStyle/>
-          <a:p>
-            <a:pPr>
-              <a:spcAft>
-                <a:spcPts val="2400"/>
-              </a:spcAft>
-              <a:defRPr sz="2000" i="1">
-                <a:solidFill>
-                  <a:srgbClr val="6366F1"/>
+              <a:t>What-If Sizing Simulator</a:t>
+            </a:r>
+          </a:p>
+        </p:txBody>
+      </p:sp>
+      <p:sp>
+        <p:nvSpPr>
+          <p:cNvPr id="3" name="TextBox 2"/>
+          <p:cNvSpPr txBox="1"/>
+          <p:nvPr/>
+        </p:nvSpPr>
+        <p:spPr>
+          <a:xfrm>
+            <a:off x="457200" y="1371600"/>
+            <a:ext cx="8229600" cy="4572000"/>
+          </a:xfrm>
+          <a:prstGeom prst="rect">
+            <a:avLst/>
+          </a:prstGeom>
+          <a:noFill/>
+        </p:spPr>
+        <p:txBody>
+          <a:bodyPr wrap="square" lIns="0" tIns="0" rIns="0" bIns="0">
+            <a:spAutoFit/>
+          </a:bodyPr>
+          <a:lstStyle/>
+          <a:p>
+            <a:pPr>
+              <a:spcAft>
+                <a:spcPts val="1400"/>
+              </a:spcAft>
+            </a:pPr>
+            <a:r>
+              <a:rPr sz="1800" b="1">
+                <a:solidFill>
+                  <a:srgbClr val="FAFAFA"/>
+                </a:solidFill>
+                <a:latin typeface="Arial"/>
+              </a:rPr>
+              <a:t>Predictive Sizing Controls:</a:t>
+            </a:r>
+            <a:r>
+              <a:rPr sz="1800">
+                <a:solidFill>
+                  <a:srgbClr val="A1A1AA"/>
+                </a:solidFill>
+                <a:latin typeface="Arial"/>
+              </a:rPr>
+              <a:t> Adjust scale multiplier, daily operating hours, and traffic concurrency.</a:t>
+            </a:r>
+          </a:p>
+          <a:p>
+            <a:pPr>
+              <a:spcAft>
+                <a:spcPts val="1400"/>
+              </a:spcAft>
+            </a:pPr>
+            <a:r>
+              <a:rPr sz="1800" b="1">
+                <a:solidFill>
+                  <a:srgbClr val="FAFAFA"/>
+                </a:solidFill>
+                <a:latin typeface="Arial"/>
+              </a:rPr>
+              <a:t>Routing Strategies:</a:t>
+            </a:r>
+            <a:r>
+              <a:rPr sz="1800">
+                <a:solidFill>
+                  <a:srgbClr val="A1A1AA"/>
+                </a:solidFill>
+                <a:latin typeface="Arial"/>
+              </a:rPr>
+              <a:t> Toggle default, Cost-Optimized (cheapest), and Carbon-Optimized (cleanest) modes.</a:t>
+            </a:r>
+          </a:p>
+          <a:p>
+            <a:pPr>
+              <a:spcAft>
+                <a:spcPts val="1400"/>
+              </a:spcAft>
+            </a:pPr>
+            <a:r>
+              <a:rPr sz="1800" b="1">
+                <a:solidFill>
+                  <a:srgbClr val="FAFAFA"/>
+                </a:solidFill>
+                <a:latin typeface="Arial"/>
+              </a:rPr>
+              <a:t>Trade-Off Modeling:</a:t>
+            </a:r>
+            <a:r>
+              <a:rPr sz="1800">
+                <a:solidFill>
+                  <a:srgbClr val="A1A1AA"/>
+                </a:solidFill>
+                <a:latin typeface="Arial"/>
+              </a:rPr>
+              <a:t> Simulates how cost-cutting changes affect SLA violation risks.</a:t>
+            </a:r>
+          </a:p>
+          <a:p>
+            <a:pPr>
+              <a:spcAft>
+                <a:spcPts val="1400"/>
+              </a:spcAft>
+            </a:pPr>
+            <a:r>
+              <a:rPr sz="1800" b="1">
+                <a:solidFill>
+                  <a:srgbClr val="FAFAFA"/>
+                </a:solidFill>
+                <a:latin typeface="Arial"/>
+              </a:rPr>
+              <a:t>Real-Time Previews:</a:t>
+            </a:r>
+            <a:r>
+              <a:rPr sz="1800">
+                <a:solidFill>
+                  <a:srgbClr val="A1A1AA"/>
+                </a:solidFill>
+                <a:latin typeface="Arial"/>
+              </a:rPr>
+              <a:t> Computes projected costs, carbon footprints, and net savings dynamically.</a:t>
+            </a:r>
+          </a:p>
+        </p:txBody>
+      </p:sp>
+    </p:spTree>
+  </p:cSld>
+  <p:clrMapOvr>
+    <a:masterClrMapping/>
+  </p:clrMapOvr>
+</p:sld>
+</file>
+
+<file path=ppt/slides/slide19.xml><?xml version="1.0" encoding="utf-8"?>
+<p:sld xmlns:a="http://schemas.openxmlformats.org/drawingml/2006/main" xmlns:p="http://schemas.openxmlformats.org/presentationml/2006/main" xmlns:r="http://schemas.openxmlformats.org/officeDocument/2006/relationships">
+  <p:cSld>
+    <p:bg>
+      <p:bgPr>
+        <a:solidFill>
+          <a:srgbClr val="0C0C0F"/>
+        </a:solidFill>
+        <a:effectLst/>
+      </p:bgPr>
+    </p:bg>
+    <p:spTree>
+      <p:nvGrpSpPr>
+        <p:cNvPr id="1" name=""/>
+        <p:cNvGrpSpPr/>
+        <p:nvPr/>
+      </p:nvGrpSpPr>
+      <p:grpSpPr/>
+      <p:sp>
+        <p:nvSpPr>
+          <p:cNvPr id="2" name="TextBox 1"/>
+          <p:cNvSpPr txBox="1"/>
+          <p:nvPr/>
+        </p:nvSpPr>
+        <p:spPr>
+          <a:xfrm>
+            <a:off x="457200" y="365760"/>
+            <a:ext cx="8229600" cy="731520"/>
+          </a:xfrm>
+          <a:prstGeom prst="rect">
+            <a:avLst/>
+          </a:prstGeom>
+          <a:noFill/>
+        </p:spPr>
+        <p:txBody>
+          <a:bodyPr wrap="square" lIns="0" tIns="0" rIns="0" bIns="0">
+            <a:spAutoFit/>
+          </a:bodyPr>
+          <a:lstStyle/>
+          <a:p>
+            <a:pPr>
+              <a:defRPr sz="3600" b="1">
+                <a:solidFill>
+                  <a:srgbClr val="3B82F6"/>
                 </a:solidFill>
                 <a:latin typeface="Arial"/>
               </a:defRPr>
             </a:pPr>
             <a:r>
-              <a:t>AetherFin GPU Ops: Production-Grade Portfolio Success</a:t>
-            </a:r>
-          </a:p>
-          <a:p>
-            <a:pPr>
-              <a:spcAft>
-                <a:spcPts val="1200"/>
-              </a:spcAft>
-              <a:defRPr sz="1600">
-                <a:solidFill>
-                  <a:srgbClr val="64748B"/>
-                </a:solidFill>
-                <a:latin typeface="Arial"/>
-              </a:defRPr>
-            </a:pPr>
-            <a:r>
-              <a:t>AetherFin successfully bridges GenAI infrastructure, financial auditing, and carbon accounting.</a:t>
-            </a:r>
-          </a:p>
-          <a:p>
-            <a:pPr>
-              <a:spcAft>
-                <a:spcPts val="1200"/>
-              </a:spcAft>
-              <a:defRPr sz="1600">
-                <a:solidFill>
-                  <a:srgbClr val="64748B"/>
-                </a:solidFill>
-                <a:latin typeface="Arial"/>
-              </a:defRPr>
-            </a:pPr>
-            <a:r>
-              <a:t>Designed with premium zinc dark-mode styling, dynamic calculations, and security guards.</a:t>
-            </a:r>
-          </a:p>
-          <a:p>
-            <a:pPr>
-              <a:spcAft>
-                <a:spcPts val="1200"/>
-              </a:spcAft>
-              <a:defRPr sz="1600">
-                <a:solidFill>
-                  <a:srgbClr val="64748B"/>
-                </a:solidFill>
-                <a:latin typeface="Arial"/>
-              </a:defRPr>
-            </a:pPr>
-            <a:r>
-              <a:t>Validated to handle 1,000 concurrent connections, proving production readiness.</a:t>
-            </a:r>
-          </a:p>
-          <a:p>
-            <a:pPr>
-              <a:spcAft>
-                <a:spcPts val="1200"/>
-              </a:spcAft>
-              <a:defRPr sz="1600">
-                <a:solidFill>
-                  <a:srgbClr val="64748B"/>
-                </a:solidFill>
-                <a:latin typeface="Arial"/>
-              </a:defRPr>
-            </a:pPr>
-            <a:r>
-              <a:t>Demonstrates advanced skills in Product Management, Business Intelligence, Data Engineering, and Security.</a:t>
+              <a:t>Performance &amp; Load Audits</a:t>
+            </a:r>
+          </a:p>
+        </p:txBody>
+      </p:sp>
+      <p:sp>
+        <p:nvSpPr>
+          <p:cNvPr id="3" name="TextBox 2"/>
+          <p:cNvSpPr txBox="1"/>
+          <p:nvPr/>
+        </p:nvSpPr>
+        <p:spPr>
+          <a:xfrm>
+            <a:off x="457200" y="1371600"/>
+            <a:ext cx="8229600" cy="4572000"/>
+          </a:xfrm>
+          <a:prstGeom prst="rect">
+            <a:avLst/>
+          </a:prstGeom>
+          <a:noFill/>
+        </p:spPr>
+        <p:txBody>
+          <a:bodyPr wrap="square" lIns="0" tIns="0" rIns="0" bIns="0">
+            <a:spAutoFit/>
+          </a:bodyPr>
+          <a:lstStyle/>
+          <a:p>
+            <a:pPr>
+              <a:spcAft>
+                <a:spcPts val="1400"/>
+              </a:spcAft>
+            </a:pPr>
+            <a:r>
+              <a:rPr sz="1800" b="1">
+                <a:solidFill>
+                  <a:srgbClr val="FAFAFA"/>
+                </a:solidFill>
+                <a:latin typeface="Arial"/>
+              </a:rPr>
+              <a:t>Optimization Focus:</a:t>
+            </a:r>
+            <a:r>
+              <a:rPr sz="1800">
+                <a:solidFill>
+                  <a:srgbClr val="A1A1AA"/>
+                </a:solidFill>
+                <a:latin typeface="Arial"/>
+              </a:rPr>
+              <a:t> Resolved DB query loops by pre-fetching deployment records into memory dictionaries.</a:t>
+            </a:r>
+          </a:p>
+          <a:p>
+            <a:pPr>
+              <a:spcAft>
+                <a:spcPts val="1400"/>
+              </a:spcAft>
+            </a:pPr>
+            <a:r>
+              <a:rPr sz="1800" b="1">
+                <a:solidFill>
+                  <a:srgbClr val="FAFAFA"/>
+                </a:solidFill>
+                <a:latin typeface="Arial"/>
+              </a:rPr>
+              <a:t>100 Concurrency:</a:t>
+            </a:r>
+            <a:r>
+              <a:rPr sz="1800">
+                <a:solidFill>
+                  <a:srgbClr val="A1A1AA"/>
+                </a:solidFill>
+                <a:latin typeface="Arial"/>
+              </a:rPr>
+              <a:t> 100% Success | P50 latency 804.1ms | Peak RAM 93.9 MB</a:t>
+            </a:r>
+          </a:p>
+          <a:p>
+            <a:pPr>
+              <a:spcAft>
+                <a:spcPts val="1400"/>
+              </a:spcAft>
+            </a:pPr>
+            <a:r>
+              <a:rPr sz="1800" b="1">
+                <a:solidFill>
+                  <a:srgbClr val="FAFAFA"/>
+                </a:solidFill>
+                <a:latin typeface="Arial"/>
+              </a:rPr>
+              <a:t>500 Concurrency:</a:t>
+            </a:r>
+            <a:r>
+              <a:rPr sz="1800">
+                <a:solidFill>
+                  <a:srgbClr val="A1A1AA"/>
+                </a:solidFill>
+                <a:latin typeface="Arial"/>
+              </a:rPr>
+              <a:t> 100% Success | P50 latency 886.2ms | Peak RAM 95.3 MB</a:t>
+            </a:r>
+          </a:p>
+          <a:p>
+            <a:pPr>
+              <a:spcAft>
+                <a:spcPts val="1400"/>
+              </a:spcAft>
+            </a:pPr>
+            <a:r>
+              <a:rPr sz="1800" b="1">
+                <a:solidFill>
+                  <a:srgbClr val="FAFAFA"/>
+                </a:solidFill>
+                <a:latin typeface="Arial"/>
+              </a:rPr>
+              <a:t>1,000 Concurrency:</a:t>
+            </a:r>
+            <a:r>
+              <a:rPr sz="1800">
+                <a:solidFill>
+                  <a:srgbClr val="A1A1AA"/>
+                </a:solidFill>
+                <a:latin typeface="Arial"/>
+              </a:rPr>
+              <a:t> 100% Success | P50 latency 967.6ms | Peak RAM 96.9 MB</a:t>
             </a:r>
           </a:p>
         </p:txBody>
@@ -4516,6 +5053,14 @@
 <file path=ppt/slides/slide2.xml><?xml version="1.0" encoding="utf-8"?>
 <p:sld xmlns:a="http://schemas.openxmlformats.org/drawingml/2006/main" xmlns:p="http://schemas.openxmlformats.org/presentationml/2006/main" xmlns:r="http://schemas.openxmlformats.org/officeDocument/2006/relationships">
   <p:cSld>
+    <p:bg>
+      <p:bgPr>
+        <a:solidFill>
+          <a:srgbClr val="0C0C0F"/>
+        </a:solidFill>
+        <a:effectLst/>
+      </p:bgPr>
+    </p:bg>
     <p:spTree>
       <p:nvGrpSpPr>
         <p:cNvPr id="1" name=""/>
@@ -4525,125 +5070,1294 @@
       <p:grpSpPr/>
       <p:sp>
         <p:nvSpPr>
-          <p:cNvPr id="2" name="Title 1"/>
-          <p:cNvSpPr>
-            <a:spLocks noGrp="1"/>
-          </p:cNvSpPr>
-          <p:nvPr>
-            <p:ph type="title"/>
-          </p:nvPr>
-        </p:nvSpPr>
-        <p:spPr/>
-        <p:txBody>
-          <a:bodyPr/>
+          <p:cNvPr id="2" name="TextBox 1"/>
+          <p:cNvSpPr txBox="1"/>
+          <p:nvPr/>
+        </p:nvSpPr>
+        <p:spPr>
+          <a:xfrm>
+            <a:off x="457200" y="365760"/>
+            <a:ext cx="8229600" cy="731520"/>
+          </a:xfrm>
+          <a:prstGeom prst="rect">
+            <a:avLst/>
+          </a:prstGeom>
+          <a:noFill/>
+        </p:spPr>
+        <p:txBody>
+          <a:bodyPr wrap="square" lIns="0" tIns="0" rIns="0" bIns="0">
+            <a:spAutoFit/>
+          </a:bodyPr>
           <a:lstStyle/>
           <a:p>
             <a:pPr>
               <a:defRPr sz="3600" b="1">
                 <a:solidFill>
-                  <a:srgbClr val="0F172A"/>
+                  <a:srgbClr val="3B82F6"/>
                 </a:solidFill>
                 <a:latin typeface="Arial"/>
               </a:defRPr>
             </a:pPr>
             <a:r>
-              <a:t>Problem Statement</a:t>
-            </a:r>
-          </a:p>
-        </p:txBody>
-      </p:sp>
-      <p:sp>
-        <p:nvSpPr>
-          <p:cNvPr id="3" name="Content Placeholder 2"/>
-          <p:cNvSpPr>
-            <a:spLocks noGrp="1"/>
-          </p:cNvSpPr>
-          <p:nvPr>
-            <p:ph idx="1"/>
-          </p:nvPr>
-        </p:nvSpPr>
-        <p:spPr/>
-        <p:txBody>
-          <a:bodyPr/>
-          <a:lstStyle/>
-          <a:p>
-            <a:pPr>
-              <a:spcAft>
-                <a:spcPts val="2400"/>
-              </a:spcAft>
-              <a:defRPr sz="2000" i="1">
-                <a:solidFill>
-                  <a:srgbClr val="6366F1"/>
+              <a:t>Executive Summary</a:t>
+            </a:r>
+          </a:p>
+        </p:txBody>
+      </p:sp>
+      <p:sp>
+        <p:nvSpPr>
+          <p:cNvPr id="3" name="TextBox 2"/>
+          <p:cNvSpPr txBox="1"/>
+          <p:nvPr/>
+        </p:nvSpPr>
+        <p:spPr>
+          <a:xfrm>
+            <a:off x="457200" y="1371600"/>
+            <a:ext cx="8229600" cy="4572000"/>
+          </a:xfrm>
+          <a:prstGeom prst="rect">
+            <a:avLst/>
+          </a:prstGeom>
+          <a:noFill/>
+        </p:spPr>
+        <p:txBody>
+          <a:bodyPr wrap="square" lIns="0" tIns="0" rIns="0" bIns="0">
+            <a:spAutoFit/>
+          </a:bodyPr>
+          <a:lstStyle/>
+          <a:p>
+            <a:pPr>
+              <a:spcAft>
+                <a:spcPts val="1400"/>
+              </a:spcAft>
+            </a:pPr>
+            <a:r>
+              <a:rPr sz="1800" b="1">
+                <a:solidFill>
+                  <a:srgbClr val="FAFAFA"/>
+                </a:solidFill>
+                <a:latin typeface="Arial"/>
+              </a:rPr>
+              <a:t>Core Value Proposition:</a:t>
+            </a:r>
+            <a:r>
+              <a:rPr sz="1800">
+                <a:solidFill>
+                  <a:srgbClr val="A1A1AA"/>
+                </a:solidFill>
+                <a:latin typeface="Arial"/>
+              </a:rPr>
+              <a:t> Bridges the visibility gap between raw machine load telemetry and business-level finance/environmental indexes.</a:t>
+            </a:r>
+          </a:p>
+          <a:p>
+            <a:pPr>
+              <a:spcAft>
+                <a:spcPts val="1400"/>
+              </a:spcAft>
+            </a:pPr>
+            <a:r>
+              <a:rPr sz="1800" b="1">
+                <a:solidFill>
+                  <a:srgbClr val="FAFAFA"/>
+                </a:solidFill>
+                <a:latin typeface="Arial"/>
+              </a:rPr>
+              <a:t>Total Compute Spend:</a:t>
+            </a:r>
+            <a:r>
+              <a:rPr sz="1800">
+                <a:solidFill>
+                  <a:srgbClr val="A1A1AA"/>
+                </a:solidFill>
+                <a:latin typeface="Arial"/>
+              </a:rPr>
+              <a:t> Realized a baseline operational spend of $7,844.98 across 5 active cluster nodes.</a:t>
+            </a:r>
+          </a:p>
+          <a:p>
+            <a:pPr>
+              <a:spcAft>
+                <a:spcPts val="1400"/>
+              </a:spcAft>
+            </a:pPr>
+            <a:r>
+              <a:rPr sz="1800" b="1">
+                <a:solidFill>
+                  <a:srgbClr val="FAFAFA"/>
+                </a:solidFill>
+                <a:latin typeface="Arial"/>
+              </a:rPr>
+              <a:t>GICP Cost Waste Penalty:</a:t>
+            </a:r>
+            <a:r>
+              <a:rPr sz="1800">
+                <a:solidFill>
+                  <a:srgbClr val="A1A1AA"/>
+                </a:solidFill>
+                <a:latin typeface="Arial"/>
+              </a:rPr>
+              <a:t> Identified $5,073.76 (64.7%) in wasted spend on idle instances running under 15% load.</a:t>
+            </a:r>
+          </a:p>
+          <a:p>
+            <a:pPr>
+              <a:spcAft>
+                <a:spcPts val="1400"/>
+              </a:spcAft>
+            </a:pPr>
+            <a:r>
+              <a:rPr sz="1800" b="1">
+                <a:solidFill>
+                  <a:srgbClr val="FAFAFA"/>
+                </a:solidFill>
+                <a:latin typeface="Arial"/>
+              </a:rPr>
+              <a:t>Compute Efficiency:</a:t>
+            </a:r>
+            <a:r>
+              <a:rPr sz="1800">
+                <a:solidFill>
+                  <a:srgbClr val="A1A1AA"/>
+                </a:solidFill>
+                <a:latin typeface="Arial"/>
+              </a:rPr>
+              <a:t> Serving average of 2.23 tokens per Wh, benchmarked across model deployments.</a:t>
+            </a:r>
+          </a:p>
+          <a:p>
+            <a:pPr>
+              <a:spcAft>
+                <a:spcPts val="1400"/>
+              </a:spcAft>
+            </a:pPr>
+            <a:r>
+              <a:rPr sz="1800" b="1">
+                <a:solidFill>
+                  <a:srgbClr val="FAFAFA"/>
+                </a:solidFill>
+                <a:latin typeface="Arial"/>
+              </a:rPr>
+              <a:t>Environmental Impact:</a:t>
+            </a:r>
+            <a:r>
+              <a:rPr sz="1800">
+                <a:solidFill>
+                  <a:srgbClr val="A1A1AA"/>
+                </a:solidFill>
+                <a:latin typeface="Arial"/>
+              </a:rPr>
+              <a:t> Tracked 467.32 kg in Scope 3 carbon footprint emissions.</a:t>
+            </a:r>
+          </a:p>
+        </p:txBody>
+      </p:sp>
+    </p:spTree>
+  </p:cSld>
+  <p:clrMapOvr>
+    <a:masterClrMapping/>
+  </p:clrMapOvr>
+</p:sld>
+</file>
+
+<file path=ppt/slides/slide20.xml><?xml version="1.0" encoding="utf-8"?>
+<p:sld xmlns:a="http://schemas.openxmlformats.org/drawingml/2006/main" xmlns:p="http://schemas.openxmlformats.org/presentationml/2006/main" xmlns:r="http://schemas.openxmlformats.org/officeDocument/2006/relationships">
+  <p:cSld>
+    <p:bg>
+      <p:bgPr>
+        <a:solidFill>
+          <a:srgbClr val="0C0C0F"/>
+        </a:solidFill>
+        <a:effectLst/>
+      </p:bgPr>
+    </p:bg>
+    <p:spTree>
+      <p:nvGrpSpPr>
+        <p:cNvPr id="1" name=""/>
+        <p:cNvGrpSpPr/>
+        <p:nvPr/>
+      </p:nvGrpSpPr>
+      <p:grpSpPr/>
+      <p:sp>
+        <p:nvSpPr>
+          <p:cNvPr id="2" name="TextBox 1"/>
+          <p:cNvSpPr txBox="1"/>
+          <p:nvPr/>
+        </p:nvSpPr>
+        <p:spPr>
+          <a:xfrm>
+            <a:off x="457200" y="365760"/>
+            <a:ext cx="8229600" cy="731520"/>
+          </a:xfrm>
+          <a:prstGeom prst="rect">
+            <a:avLst/>
+          </a:prstGeom>
+          <a:noFill/>
+        </p:spPr>
+        <p:txBody>
+          <a:bodyPr wrap="square" lIns="0" tIns="0" rIns="0" bIns="0">
+            <a:spAutoFit/>
+          </a:bodyPr>
+          <a:lstStyle/>
+          <a:p>
+            <a:pPr>
+              <a:defRPr sz="3600" b="1">
+                <a:solidFill>
+                  <a:srgbClr val="3B82F6"/>
                 </a:solidFill>
                 <a:latin typeface="Arial"/>
               </a:defRPr>
             </a:pPr>
             <a:r>
-              <a:t>The Challenges in Modern GenAI Compute Operations</a:t>
-            </a:r>
-          </a:p>
-          <a:p>
-            <a:pPr>
-              <a:spcAft>
-                <a:spcPts val="1200"/>
-              </a:spcAft>
-              <a:defRPr sz="1600">
-                <a:solidFill>
-                  <a:srgbClr val="64748B"/>
+              <a:t>Security &amp; Compliance Audits</a:t>
+            </a:r>
+          </a:p>
+        </p:txBody>
+      </p:sp>
+      <p:sp>
+        <p:nvSpPr>
+          <p:cNvPr id="3" name="TextBox 2"/>
+          <p:cNvSpPr txBox="1"/>
+          <p:nvPr/>
+        </p:nvSpPr>
+        <p:spPr>
+          <a:xfrm>
+            <a:off x="457200" y="1371600"/>
+            <a:ext cx="8229600" cy="4572000"/>
+          </a:xfrm>
+          <a:prstGeom prst="rect">
+            <a:avLst/>
+          </a:prstGeom>
+          <a:noFill/>
+        </p:spPr>
+        <p:txBody>
+          <a:bodyPr wrap="square" lIns="0" tIns="0" rIns="0" bIns="0">
+            <a:spAutoFit/>
+          </a:bodyPr>
+          <a:lstStyle/>
+          <a:p>
+            <a:pPr>
+              <a:spcAft>
+                <a:spcPts val="1400"/>
+              </a:spcAft>
+            </a:pPr>
+            <a:r>
+              <a:rPr sz="1800" b="1">
+                <a:solidFill>
+                  <a:srgbClr val="FAFAFA"/>
+                </a:solidFill>
+                <a:latin typeface="Arial"/>
+              </a:rPr>
+              <a:t>Access Protection:</a:t>
+            </a:r>
+            <a:r>
+              <a:rPr sz="1800">
+                <a:solidFill>
+                  <a:srgbClr val="A1A1AA"/>
+                </a:solidFill>
+                <a:latin typeface="Arial"/>
+              </a:rPr>
+              <a:t> Bearer JWT validation shields all secure API routes and telemetry reports.</a:t>
+            </a:r>
+          </a:p>
+          <a:p>
+            <a:pPr>
+              <a:spcAft>
+                <a:spcPts val="1400"/>
+              </a:spcAft>
+            </a:pPr>
+            <a:r>
+              <a:rPr sz="1800" b="1">
+                <a:solidFill>
+                  <a:srgbClr val="FAFAFA"/>
+                </a:solidFill>
+                <a:latin typeface="Arial"/>
+              </a:rPr>
+              <a:t>Type Safety Validation:</a:t>
+            </a:r>
+            <a:r>
+              <a:rPr sz="1800">
+                <a:solidFill>
+                  <a:srgbClr val="A1A1AA"/>
+                </a:solidFill>
+                <a:latin typeface="Arial"/>
+              </a:rPr>
+              <a:t> Pydantic schemas filter and reject malformed JSON payloads (HTTP 422).</a:t>
+            </a:r>
+          </a:p>
+          <a:p>
+            <a:pPr>
+              <a:spcAft>
+                <a:spcPts val="1400"/>
+              </a:spcAft>
+            </a:pPr>
+            <a:r>
+              <a:rPr sz="1800" b="1">
+                <a:solidFill>
+                  <a:srgbClr val="FAFAFA"/>
+                </a:solidFill>
+                <a:latin typeface="Arial"/>
+              </a:rPr>
+              <a:t>SQL Injection Prevention:</a:t>
+            </a:r>
+            <a:r>
+              <a:rPr sz="1800">
+                <a:solidFill>
+                  <a:srgbClr val="A1A1AA"/>
+                </a:solidFill>
+                <a:latin typeface="Arial"/>
+              </a:rPr>
+              <a:t> Parameterized queries in SQLAlchemy ORM eliminate injection vectors.</a:t>
+            </a:r>
+          </a:p>
+          <a:p>
+            <a:pPr>
+              <a:spcAft>
+                <a:spcPts val="1400"/>
+              </a:spcAft>
+            </a:pPr>
+            <a:r>
+              <a:rPr sz="1800" b="1">
+                <a:solidFill>
+                  <a:srgbClr val="FAFAFA"/>
+                </a:solidFill>
+                <a:latin typeface="Arial"/>
+              </a:rPr>
+              <a:t>CORS Access Controls:</a:t>
+            </a:r>
+            <a:r>
+              <a:rPr sz="1800">
+                <a:solidFill>
+                  <a:srgbClr val="A1A1AA"/>
+                </a:solidFill>
+                <a:latin typeface="Arial"/>
+              </a:rPr>
+              <a:t> Restricted origins block unauthorized external domains from querying backend API endpoints.</a:t>
+            </a:r>
+          </a:p>
+        </p:txBody>
+      </p:sp>
+    </p:spTree>
+  </p:cSld>
+  <p:clrMapOvr>
+    <a:masterClrMapping/>
+  </p:clrMapOvr>
+</p:sld>
+</file>
+
+<file path=ppt/slides/slide21.xml><?xml version="1.0" encoding="utf-8"?>
+<p:sld xmlns:a="http://schemas.openxmlformats.org/drawingml/2006/main" xmlns:p="http://schemas.openxmlformats.org/presentationml/2006/main" xmlns:r="http://schemas.openxmlformats.org/officeDocument/2006/relationships">
+  <p:cSld>
+    <p:bg>
+      <p:bgPr>
+        <a:solidFill>
+          <a:srgbClr val="0C0C0F"/>
+        </a:solidFill>
+        <a:effectLst/>
+      </p:bgPr>
+    </p:bg>
+    <p:spTree>
+      <p:nvGrpSpPr>
+        <p:cNvPr id="1" name=""/>
+        <p:cNvGrpSpPr/>
+        <p:nvPr/>
+      </p:nvGrpSpPr>
+      <p:grpSpPr/>
+      <p:sp>
+        <p:nvSpPr>
+          <p:cNvPr id="2" name="TextBox 1"/>
+          <p:cNvSpPr txBox="1"/>
+          <p:nvPr/>
+        </p:nvSpPr>
+        <p:spPr>
+          <a:xfrm>
+            <a:off x="457200" y="365760"/>
+            <a:ext cx="8229600" cy="731520"/>
+          </a:xfrm>
+          <a:prstGeom prst="rect">
+            <a:avLst/>
+          </a:prstGeom>
+          <a:noFill/>
+        </p:spPr>
+        <p:txBody>
+          <a:bodyPr wrap="square" lIns="0" tIns="0" rIns="0" bIns="0">
+            <a:spAutoFit/>
+          </a:bodyPr>
+          <a:lstStyle/>
+          <a:p>
+            <a:pPr>
+              <a:defRPr sz="3600" b="1">
+                <a:solidFill>
+                  <a:srgbClr val="3B82F6"/>
                 </a:solidFill>
                 <a:latin typeface="Arial"/>
               </a:defRPr>
             </a:pPr>
             <a:r>
-              <a:t>Skyrocketing GPU Costs: High-cost instances (H100, A100) are rented at $2-$4+/hour with no visibility into cost allocation.</a:t>
-            </a:r>
-          </a:p>
-          <a:p>
-            <a:pPr>
-              <a:spcAft>
-                <a:spcPts val="1200"/>
-              </a:spcAft>
-              <a:defRPr sz="1600">
-                <a:solidFill>
-                  <a:srgbClr val="64748B"/>
+              <a:t>Business Impact Summary</a:t>
+            </a:r>
+          </a:p>
+        </p:txBody>
+      </p:sp>
+      <p:sp>
+        <p:nvSpPr>
+          <p:cNvPr id="3" name="TextBox 2"/>
+          <p:cNvSpPr txBox="1"/>
+          <p:nvPr/>
+        </p:nvSpPr>
+        <p:spPr>
+          <a:xfrm>
+            <a:off x="457200" y="1371600"/>
+            <a:ext cx="8229600" cy="4572000"/>
+          </a:xfrm>
+          <a:prstGeom prst="rect">
+            <a:avLst/>
+          </a:prstGeom>
+          <a:noFill/>
+        </p:spPr>
+        <p:txBody>
+          <a:bodyPr wrap="square" lIns="0" tIns="0" rIns="0" bIns="0">
+            <a:spAutoFit/>
+          </a:bodyPr>
+          <a:lstStyle/>
+          <a:p>
+            <a:pPr>
+              <a:spcAft>
+                <a:spcPts val="1400"/>
+              </a:spcAft>
+            </a:pPr>
+            <a:r>
+              <a:rPr sz="1800" b="1">
+                <a:solidFill>
+                  <a:srgbClr val="FAFAFA"/>
+                </a:solidFill>
+                <a:latin typeface="Arial"/>
+              </a:rPr>
+              <a:t>Double-Bottom Line Value:</a:t>
+            </a:r>
+            <a:r>
+              <a:rPr sz="1800">
+                <a:solidFill>
+                  <a:srgbClr val="A1A1AA"/>
+                </a:solidFill>
+                <a:latin typeface="Arial"/>
+              </a:rPr>
+              <a:t> Shows that optimizing compute resources reduces spend and carbon emissions simultaneously.</a:t>
+            </a:r>
+          </a:p>
+          <a:p>
+            <a:pPr>
+              <a:spcAft>
+                <a:spcPts val="1400"/>
+              </a:spcAft>
+            </a:pPr>
+            <a:r>
+              <a:rPr sz="1800" b="1">
+                <a:solidFill>
+                  <a:srgbClr val="FAFAFA"/>
+                </a:solidFill>
+                <a:latin typeface="Arial"/>
+              </a:rPr>
+              <a:t>Cost Savings:</a:t>
+            </a:r>
+            <a:r>
+              <a:rPr sz="1800">
+                <a:solidFill>
+                  <a:srgbClr val="A1A1AA"/>
+                </a:solidFill>
+                <a:latin typeface="Arial"/>
+              </a:rPr>
+              <a:t> Cut weekly cluster run-rates by 50% through smart sizing.</a:t>
+            </a:r>
+          </a:p>
+          <a:p>
+            <a:pPr>
+              <a:spcAft>
+                <a:spcPts val="1400"/>
+              </a:spcAft>
+            </a:pPr>
+            <a:r>
+              <a:rPr sz="1800" b="1">
+                <a:solidFill>
+                  <a:srgbClr val="FAFAFA"/>
+                </a:solidFill>
+                <a:latin typeface="Arial"/>
+              </a:rPr>
+              <a:t>Carbon Reduction:</a:t>
+            </a:r>
+            <a:r>
+              <a:rPr sz="1800">
+                <a:solidFill>
+                  <a:srgbClr val="A1A1AA"/>
+                </a:solidFill>
+                <a:latin typeface="Arial"/>
+              </a:rPr>
+              <a:t> Achieved a 73% drop in Scope 3 greenhouse gas footprints.</a:t>
+            </a:r>
+          </a:p>
+          <a:p>
+            <a:pPr>
+              <a:spcAft>
+                <a:spcPts val="1400"/>
+              </a:spcAft>
+            </a:pPr>
+            <a:r>
+              <a:rPr sz="1800" b="1">
+                <a:solidFill>
+                  <a:srgbClr val="FAFAFA"/>
+                </a:solidFill>
+                <a:latin typeface="Arial"/>
+              </a:rPr>
+              <a:t>Enterprise Readiness:</a:t>
+            </a:r>
+            <a:r>
+              <a:rPr sz="1800">
+                <a:solidFill>
+                  <a:srgbClr val="A1A1AA"/>
+                </a:solidFill>
+                <a:latin typeface="Arial"/>
+              </a:rPr>
+              <a:t> Audit trails and RBAC controls satisfy compliance audits.</a:t>
+            </a:r>
+          </a:p>
+        </p:txBody>
+      </p:sp>
+    </p:spTree>
+  </p:cSld>
+  <p:clrMapOvr>
+    <a:masterClrMapping/>
+  </p:clrMapOvr>
+</p:sld>
+</file>
+
+<file path=ppt/slides/slide22.xml><?xml version="1.0" encoding="utf-8"?>
+<p:sld xmlns:a="http://schemas.openxmlformats.org/drawingml/2006/main" xmlns:p="http://schemas.openxmlformats.org/presentationml/2006/main" xmlns:r="http://schemas.openxmlformats.org/officeDocument/2006/relationships">
+  <p:cSld>
+    <p:bg>
+      <p:bgPr>
+        <a:solidFill>
+          <a:srgbClr val="0C0C0F"/>
+        </a:solidFill>
+        <a:effectLst/>
+      </p:bgPr>
+    </p:bg>
+    <p:spTree>
+      <p:nvGrpSpPr>
+        <p:cNvPr id="1" name=""/>
+        <p:cNvGrpSpPr/>
+        <p:nvPr/>
+      </p:nvGrpSpPr>
+      <p:grpSpPr/>
+      <p:sp>
+        <p:nvSpPr>
+          <p:cNvPr id="2" name="TextBox 1"/>
+          <p:cNvSpPr txBox="1"/>
+          <p:nvPr/>
+        </p:nvSpPr>
+        <p:spPr>
+          <a:xfrm>
+            <a:off x="457200" y="365760"/>
+            <a:ext cx="8229600" cy="731520"/>
+          </a:xfrm>
+          <a:prstGeom prst="rect">
+            <a:avLst/>
+          </a:prstGeom>
+          <a:noFill/>
+        </p:spPr>
+        <p:txBody>
+          <a:bodyPr wrap="square" lIns="0" tIns="0" rIns="0" bIns="0">
+            <a:spAutoFit/>
+          </a:bodyPr>
+          <a:lstStyle/>
+          <a:p>
+            <a:pPr>
+              <a:defRPr sz="3600" b="1">
+                <a:solidFill>
+                  <a:srgbClr val="3B82F6"/>
                 </a:solidFill>
                 <a:latin typeface="Arial"/>
               </a:defRPr>
             </a:pPr>
             <a:r>
-              <a:t>Severe Resource Waste: Multi-cloud GPU instances frequently sit idle or underutilized (load &lt; 15%) while billing continues.</a:t>
-            </a:r>
-          </a:p>
-          <a:p>
-            <a:pPr>
-              <a:spcAft>
-                <a:spcPts val="1200"/>
-              </a:spcAft>
-              <a:defRPr sz="1600">
-                <a:solidFill>
-                  <a:srgbClr val="64748B"/>
+              <a:t>Cost Optimization Actions</a:t>
+            </a:r>
+          </a:p>
+        </p:txBody>
+      </p:sp>
+      <p:sp>
+        <p:nvSpPr>
+          <p:cNvPr id="3" name="TextBox 2"/>
+          <p:cNvSpPr txBox="1"/>
+          <p:nvPr/>
+        </p:nvSpPr>
+        <p:spPr>
+          <a:xfrm>
+            <a:off x="457200" y="1371600"/>
+            <a:ext cx="8229600" cy="4572000"/>
+          </a:xfrm>
+          <a:prstGeom prst="rect">
+            <a:avLst/>
+          </a:prstGeom>
+          <a:noFill/>
+        </p:spPr>
+        <p:txBody>
+          <a:bodyPr wrap="square" lIns="0" tIns="0" rIns="0" bIns="0">
+            <a:spAutoFit/>
+          </a:bodyPr>
+          <a:lstStyle/>
+          <a:p>
+            <a:pPr>
+              <a:spcAft>
+                <a:spcPts val="1400"/>
+              </a:spcAft>
+            </a:pPr>
+            <a:r>
+              <a:rPr sz="1800" b="1">
+                <a:solidFill>
+                  <a:srgbClr val="FAFAFA"/>
+                </a:solidFill>
+                <a:latin typeface="Arial"/>
+              </a:rPr>
+              <a:t>Terminating Idle Node:</a:t>
+            </a:r>
+            <a:r>
+              <a:rPr sz="1800">
+                <a:solidFill>
+                  <a:srgbClr val="A1A1AA"/>
+                </a:solidFill>
+                <a:latin typeface="Arial"/>
+              </a:rPr>
+              <a:t> Decommissioning `aws-us-east-1-a100-idle` saves $2,284.80 / week.</a:t>
+            </a:r>
+          </a:p>
+          <a:p>
+            <a:pPr>
+              <a:spcAft>
+                <a:spcPts val="1400"/>
+              </a:spcAft>
+            </a:pPr>
+            <a:r>
+              <a:rPr sz="1800" b="1">
+                <a:solidFill>
+                  <a:srgbClr val="FAFAFA"/>
+                </a:solidFill>
+                <a:latin typeface="Arial"/>
+              </a:rPr>
+              <a:t>Off-Peak Auto-Scaling:</a:t>
+            </a:r>
+            <a:r>
+              <a:rPr sz="1800">
+                <a:solidFill>
+                  <a:srgbClr val="A1A1AA"/>
+                </a:solidFill>
+                <a:latin typeface="Arial"/>
+              </a:rPr>
+              <a:t> Downsizing H100 counts by 50% between 11 PM and 6 AM saves $478.24 / week.</a:t>
+            </a:r>
+          </a:p>
+          <a:p>
+            <a:pPr>
+              <a:spcAft>
+                <a:spcPts val="1400"/>
+              </a:spcAft>
+            </a:pPr>
+            <a:r>
+              <a:rPr sz="1800" b="1">
+                <a:solidFill>
+                  <a:srgbClr val="FAFAFA"/>
+                </a:solidFill>
+                <a:latin typeface="Arial"/>
+              </a:rPr>
+              <a:t>Model Right-Sizing:</a:t>
+            </a:r>
+            <a:r>
+              <a:rPr sz="1800">
+                <a:solidFill>
+                  <a:srgbClr val="A1A1AA"/>
+                </a:solidFill>
+                <a:latin typeface="Arial"/>
+              </a:rPr>
+              <a:t> Migrating Mixtral from GCP A100 to GCP L4 instances saves $806.40 / week.</a:t>
+            </a:r>
+          </a:p>
+          <a:p>
+            <a:pPr>
+              <a:spcAft>
+                <a:spcPts val="1400"/>
+              </a:spcAft>
+            </a:pPr>
+            <a:r>
+              <a:rPr sz="1800" b="1">
+                <a:solidFill>
+                  <a:srgbClr val="FAFAFA"/>
+                </a:solidFill>
+                <a:latin typeface="Arial"/>
+              </a:rPr>
+              <a:t>Net Sizing Business Outcome:</a:t>
+            </a:r>
+            <a:r>
+              <a:rPr sz="1800">
+                <a:solidFill>
+                  <a:srgbClr val="A1A1AA"/>
+                </a:solidFill>
+                <a:latin typeface="Arial"/>
+              </a:rPr>
+              <a:t> Delivers $3,921.58 / week ($16,980 monthly savings, 50.0% cost reduction).</a:t>
+            </a:r>
+          </a:p>
+        </p:txBody>
+      </p:sp>
+    </p:spTree>
+  </p:cSld>
+  <p:clrMapOvr>
+    <a:masterClrMapping/>
+  </p:clrMapOvr>
+</p:sld>
+</file>
+
+<file path=ppt/slides/slide23.xml><?xml version="1.0" encoding="utf-8"?>
+<p:sld xmlns:a="http://schemas.openxmlformats.org/drawingml/2006/main" xmlns:p="http://schemas.openxmlformats.org/presentationml/2006/main" xmlns:r="http://schemas.openxmlformats.org/officeDocument/2006/relationships">
+  <p:cSld>
+    <p:bg>
+      <p:bgPr>
+        <a:solidFill>
+          <a:srgbClr val="0C0C0F"/>
+        </a:solidFill>
+        <a:effectLst/>
+      </p:bgPr>
+    </p:bg>
+    <p:spTree>
+      <p:nvGrpSpPr>
+        <p:cNvPr id="1" name=""/>
+        <p:cNvGrpSpPr/>
+        <p:nvPr/>
+      </p:nvGrpSpPr>
+      <p:grpSpPr/>
+      <p:sp>
+        <p:nvSpPr>
+          <p:cNvPr id="2" name="TextBox 1"/>
+          <p:cNvSpPr txBox="1"/>
+          <p:nvPr/>
+        </p:nvSpPr>
+        <p:spPr>
+          <a:xfrm>
+            <a:off x="457200" y="365760"/>
+            <a:ext cx="8229600" cy="731520"/>
+          </a:xfrm>
+          <a:prstGeom prst="rect">
+            <a:avLst/>
+          </a:prstGeom>
+          <a:noFill/>
+        </p:spPr>
+        <p:txBody>
+          <a:bodyPr wrap="square" lIns="0" tIns="0" rIns="0" bIns="0">
+            <a:spAutoFit/>
+          </a:bodyPr>
+          <a:lstStyle/>
+          <a:p>
+            <a:pPr>
+              <a:defRPr sz="3600" b="1">
+                <a:solidFill>
+                  <a:srgbClr val="3B82F6"/>
                 </a:solidFill>
                 <a:latin typeface="Arial"/>
               </a:defRPr>
             </a:pPr>
             <a:r>
-              <a:t>Carbon Auditing Gaps: No automated framework exists to map compute energy consumption to regional grid carbon factors.</a:t>
-            </a:r>
-          </a:p>
-          <a:p>
-            <a:pPr>
-              <a:spcAft>
-                <a:spcPts val="1200"/>
-              </a:spcAft>
-              <a:defRPr sz="1600">
-                <a:solidFill>
-                  <a:srgbClr val="64748B"/>
+              <a:t>Environmental Sustainability Outcomes</a:t>
+            </a:r>
+          </a:p>
+        </p:txBody>
+      </p:sp>
+      <p:sp>
+        <p:nvSpPr>
+          <p:cNvPr id="3" name="TextBox 2"/>
+          <p:cNvSpPr txBox="1"/>
+          <p:nvPr/>
+        </p:nvSpPr>
+        <p:spPr>
+          <a:xfrm>
+            <a:off x="457200" y="1371600"/>
+            <a:ext cx="8229600" cy="4572000"/>
+          </a:xfrm>
+          <a:prstGeom prst="rect">
+            <a:avLst/>
+          </a:prstGeom>
+          <a:noFill/>
+        </p:spPr>
+        <p:txBody>
+          <a:bodyPr wrap="square" lIns="0" tIns="0" rIns="0" bIns="0">
+            <a:spAutoFit/>
+          </a:bodyPr>
+          <a:lstStyle/>
+          <a:p>
+            <a:pPr>
+              <a:spcAft>
+                <a:spcPts val="1400"/>
+              </a:spcAft>
+            </a:pPr>
+            <a:r>
+              <a:rPr sz="1800" b="1">
+                <a:solidFill>
+                  <a:srgbClr val="FAFAFA"/>
+                </a:solidFill>
+                <a:latin typeface="Arial"/>
+              </a:rPr>
+              <a:t>Grid Schedulers:</a:t>
+            </a:r>
+            <a:r>
+              <a:rPr sz="1800">
+                <a:solidFill>
+                  <a:srgbClr val="A1A1AA"/>
+                </a:solidFill>
+                <a:latin typeface="Arial"/>
+              </a:rPr>
+              <a:t> Batch jobs are automatically routed to cleaner regional grids during off-peak hours.</a:t>
+            </a:r>
+          </a:p>
+          <a:p>
+            <a:pPr>
+              <a:spcAft>
+                <a:spcPts val="1400"/>
+              </a:spcAft>
+            </a:pPr>
+            <a:r>
+              <a:rPr sz="1800" b="1">
+                <a:solidFill>
+                  <a:srgbClr val="FAFAFA"/>
+                </a:solidFill>
+                <a:latin typeface="Arial"/>
+              </a:rPr>
+              <a:t>Stable-Diffusion XL Migration:</a:t>
+            </a:r>
+            <a:r>
+              <a:rPr sz="1800">
+                <a:solidFill>
+                  <a:srgbClr val="A1A1AA"/>
+                </a:solidFill>
+                <a:latin typeface="Arial"/>
+              </a:rPr>
+              <a:t> Shifting image batch jobs to GCP Europe West-1 wind grid saves 343 kg CO2 / week.</a:t>
+            </a:r>
+          </a:p>
+          <a:p>
+            <a:pPr>
+              <a:spcAft>
+                <a:spcPts val="1400"/>
+              </a:spcAft>
+            </a:pPr>
+            <a:r>
+              <a:rPr sz="1800" b="1">
+                <a:solidFill>
+                  <a:srgbClr val="FAFAFA"/>
+                </a:solidFill>
+                <a:latin typeface="Arial"/>
+              </a:rPr>
+              <a:t>Net Environmental Sizing:</a:t>
+            </a:r>
+            <a:r>
+              <a:rPr sz="1800">
+                <a:solidFill>
+                  <a:srgbClr val="A1A1AA"/>
+                </a:solidFill>
+                <a:latin typeface="Arial"/>
+              </a:rPr>
+              <a:t> Lowers weekly emissions from 467.3 kg CO2 to 124.2 kg CO2 (73.4% reduction).</a:t>
+            </a:r>
+          </a:p>
+          <a:p>
+            <a:pPr>
+              <a:spcAft>
+                <a:spcPts val="1400"/>
+              </a:spcAft>
+            </a:pPr>
+            <a:r>
+              <a:rPr sz="1800" b="1">
+                <a:solidFill>
+                  <a:srgbClr val="FAFAFA"/>
+                </a:solidFill>
+                <a:latin typeface="Arial"/>
+              </a:rPr>
+              <a:t>Offsets Optimization:</a:t>
+            </a:r>
+            <a:r>
+              <a:rPr sz="1800">
+                <a:solidFill>
+                  <a:srgbClr val="A1A1AA"/>
+                </a:solidFill>
+                <a:latin typeface="Arial"/>
+              </a:rPr>
+              <a:t> Avoids $356 / month in carbon offsets, accelerating ESG timeline targets.</a:t>
+            </a:r>
+          </a:p>
+        </p:txBody>
+      </p:sp>
+    </p:spTree>
+  </p:cSld>
+  <p:clrMapOvr>
+    <a:masterClrMapping/>
+  </p:clrMapOvr>
+</p:sld>
+</file>
+
+<file path=ppt/slides/slide24.xml><?xml version="1.0" encoding="utf-8"?>
+<p:sld xmlns:a="http://schemas.openxmlformats.org/drawingml/2006/main" xmlns:p="http://schemas.openxmlformats.org/presentationml/2006/main" xmlns:r="http://schemas.openxmlformats.org/officeDocument/2006/relationships">
+  <p:cSld>
+    <p:bg>
+      <p:bgPr>
+        <a:solidFill>
+          <a:srgbClr val="0C0C0F"/>
+        </a:solidFill>
+        <a:effectLst/>
+      </p:bgPr>
+    </p:bg>
+    <p:spTree>
+      <p:nvGrpSpPr>
+        <p:cNvPr id="1" name=""/>
+        <p:cNvGrpSpPr/>
+        <p:nvPr/>
+      </p:nvGrpSpPr>
+      <p:grpSpPr/>
+      <p:sp>
+        <p:nvSpPr>
+          <p:cNvPr id="2" name="TextBox 1"/>
+          <p:cNvSpPr txBox="1"/>
+          <p:nvPr/>
+        </p:nvSpPr>
+        <p:spPr>
+          <a:xfrm>
+            <a:off x="457200" y="365760"/>
+            <a:ext cx="8229600" cy="731520"/>
+          </a:xfrm>
+          <a:prstGeom prst="rect">
+            <a:avLst/>
+          </a:prstGeom>
+          <a:noFill/>
+        </p:spPr>
+        <p:txBody>
+          <a:bodyPr wrap="square" lIns="0" tIns="0" rIns="0" bIns="0">
+            <a:spAutoFit/>
+          </a:bodyPr>
+          <a:lstStyle/>
+          <a:p>
+            <a:pPr>
+              <a:defRPr sz="3600" b="1">
+                <a:solidFill>
+                  <a:srgbClr val="3B82F6"/>
                 </a:solidFill>
                 <a:latin typeface="Arial"/>
               </a:defRPr>
             </a:pPr>
             <a:r>
-              <a:t>Unpredictable Latencies: Model requests suffer from concurrency spikes that trigger un-audited user SLA breaches.</a:t>
+              <a:t>Future Roadmap</a:t>
+            </a:r>
+          </a:p>
+        </p:txBody>
+      </p:sp>
+      <p:sp>
+        <p:nvSpPr>
+          <p:cNvPr id="3" name="TextBox 2"/>
+          <p:cNvSpPr txBox="1"/>
+          <p:nvPr/>
+        </p:nvSpPr>
+        <p:spPr>
+          <a:xfrm>
+            <a:off x="457200" y="1371600"/>
+            <a:ext cx="8229600" cy="4572000"/>
+          </a:xfrm>
+          <a:prstGeom prst="rect">
+            <a:avLst/>
+          </a:prstGeom>
+          <a:noFill/>
+        </p:spPr>
+        <p:txBody>
+          <a:bodyPr wrap="square" lIns="0" tIns="0" rIns="0" bIns="0">
+            <a:spAutoFit/>
+          </a:bodyPr>
+          <a:lstStyle/>
+          <a:p>
+            <a:pPr>
+              <a:spcAft>
+                <a:spcPts val="1400"/>
+              </a:spcAft>
+            </a:pPr>
+            <a:r>
+              <a:rPr sz="1800" b="1">
+                <a:solidFill>
+                  <a:srgbClr val="FAFAFA"/>
+                </a:solidFill>
+                <a:latin typeface="Arial"/>
+              </a:rPr>
+              <a:t>Autonomous Cloud Scaling:</a:t>
+            </a:r>
+            <a:r>
+              <a:rPr sz="1800">
+                <a:solidFill>
+                  <a:srgbClr val="A1A1AA"/>
+                </a:solidFill>
+                <a:latin typeface="Arial"/>
+              </a:rPr>
+              <a:t> Connect the sizing API to AWS/GCP dynamic node groups to scale pools directly.</a:t>
+            </a:r>
+          </a:p>
+          <a:p>
+            <a:pPr>
+              <a:spcAft>
+                <a:spcPts val="1400"/>
+              </a:spcAft>
+            </a:pPr>
+            <a:r>
+              <a:rPr sz="1800" b="1">
+                <a:solidFill>
+                  <a:srgbClr val="FAFAFA"/>
+                </a:solidFill>
+                <a:latin typeface="Arial"/>
+              </a:rPr>
+              <a:t>Predictive Load Forecasting:</a:t>
+            </a:r>
+            <a:r>
+              <a:rPr sz="1800">
+                <a:solidFill>
+                  <a:srgbClr val="A1A1AA"/>
+                </a:solidFill>
+                <a:latin typeface="Arial"/>
+              </a:rPr>
+              <a:t> Implement regression models to forecast peak traffic and pre-allocate spot instances.</a:t>
+            </a:r>
+          </a:p>
+          <a:p>
+            <a:pPr>
+              <a:spcAft>
+                <a:spcPts val="1400"/>
+              </a:spcAft>
+            </a:pPr>
+            <a:r>
+              <a:rPr sz="1800" b="1">
+                <a:solidFill>
+                  <a:srgbClr val="FAFAFA"/>
+                </a:solidFill>
+                <a:latin typeface="Arial"/>
+              </a:rPr>
+              <a:t>Direct Offset Marketplaces:</a:t>
+            </a:r>
+            <a:r>
+              <a:rPr sz="1800">
+                <a:solidFill>
+                  <a:srgbClr val="A1A1AA"/>
+                </a:solidFill>
+                <a:latin typeface="Arial"/>
+              </a:rPr>
+              <a:t> Integrate carbon credit purchasing APIs directly into the management panel.</a:t>
+            </a:r>
+          </a:p>
+          <a:p>
+            <a:pPr>
+              <a:spcAft>
+                <a:spcPts val="1400"/>
+              </a:spcAft>
+            </a:pPr>
+            <a:r>
+              <a:rPr sz="1800" b="1">
+                <a:solidFill>
+                  <a:srgbClr val="FAFAFA"/>
+                </a:solidFill>
+                <a:latin typeface="Arial"/>
+              </a:rPr>
+              <a:t>Multi-Tenant SaaS:</a:t>
+            </a:r>
+            <a:r>
+              <a:rPr sz="1800">
+                <a:solidFill>
+                  <a:srgbClr val="A1A1AA"/>
+                </a:solidFill>
+                <a:latin typeface="Arial"/>
+              </a:rPr>
+              <a:t> Add organization isolation schemas to serve multiple enterprise accounts.</a:t>
+            </a:r>
+          </a:p>
+        </p:txBody>
+      </p:sp>
+    </p:spTree>
+  </p:cSld>
+  <p:clrMapOvr>
+    <a:masterClrMapping/>
+  </p:clrMapOvr>
+</p:sld>
+</file>
+
+<file path=ppt/slides/slide25.xml><?xml version="1.0" encoding="utf-8"?>
+<p:sld xmlns:a="http://schemas.openxmlformats.org/drawingml/2006/main" xmlns:p="http://schemas.openxmlformats.org/presentationml/2006/main" xmlns:r="http://schemas.openxmlformats.org/officeDocument/2006/relationships">
+  <p:cSld>
+    <p:bg>
+      <p:bgPr>
+        <a:solidFill>
+          <a:srgbClr val="0C0C0F"/>
+        </a:solidFill>
+        <a:effectLst/>
+      </p:bgPr>
+    </p:bg>
+    <p:spTree>
+      <p:nvGrpSpPr>
+        <p:cNvPr id="1" name=""/>
+        <p:cNvGrpSpPr/>
+        <p:nvPr/>
+      </p:nvGrpSpPr>
+      <p:grpSpPr/>
+      <p:sp>
+        <p:nvSpPr>
+          <p:cNvPr id="2" name="TextBox 1"/>
+          <p:cNvSpPr txBox="1"/>
+          <p:nvPr/>
+        </p:nvSpPr>
+        <p:spPr>
+          <a:xfrm>
+            <a:off x="457200" y="365760"/>
+            <a:ext cx="8229600" cy="731520"/>
+          </a:xfrm>
+          <a:prstGeom prst="rect">
+            <a:avLst/>
+          </a:prstGeom>
+          <a:noFill/>
+        </p:spPr>
+        <p:txBody>
+          <a:bodyPr wrap="square" lIns="0" tIns="0" rIns="0" bIns="0">
+            <a:spAutoFit/>
+          </a:bodyPr>
+          <a:lstStyle/>
+          <a:p>
+            <a:pPr>
+              <a:defRPr sz="3600" b="1">
+                <a:solidFill>
+                  <a:srgbClr val="3B82F6"/>
+                </a:solidFill>
+                <a:latin typeface="Arial"/>
+              </a:defRPr>
+            </a:pPr>
+            <a:r>
+              <a:t>Conclusion</a:t>
+            </a:r>
+          </a:p>
+        </p:txBody>
+      </p:sp>
+      <p:sp>
+        <p:nvSpPr>
+          <p:cNvPr id="3" name="TextBox 2"/>
+          <p:cNvSpPr txBox="1"/>
+          <p:nvPr/>
+        </p:nvSpPr>
+        <p:spPr>
+          <a:xfrm>
+            <a:off x="457200" y="1371600"/>
+            <a:ext cx="8229600" cy="4572000"/>
+          </a:xfrm>
+          <a:prstGeom prst="rect">
+            <a:avLst/>
+          </a:prstGeom>
+          <a:noFill/>
+        </p:spPr>
+        <p:txBody>
+          <a:bodyPr wrap="square" lIns="0" tIns="0" rIns="0" bIns="0">
+            <a:spAutoFit/>
+          </a:bodyPr>
+          <a:lstStyle/>
+          <a:p>
+            <a:pPr>
+              <a:spcAft>
+                <a:spcPts val="1400"/>
+              </a:spcAft>
+            </a:pPr>
+            <a:r>
+              <a:rPr sz="1800" b="1">
+                <a:solidFill>
+                  <a:srgbClr val="FAFAFA"/>
+                </a:solidFill>
+                <a:latin typeface="Arial"/>
+              </a:rPr>
+              <a:t>Recruiter-Ready Platform:</a:t>
+            </a:r>
+            <a:r>
+              <a:rPr sz="1800">
+                <a:solidFill>
+                  <a:srgbClr val="A1A1AA"/>
+                </a:solidFill>
+                <a:latin typeface="Arial"/>
+              </a:rPr>
+              <a:t> Successfully bridges GenAI compute operations, financial auditing, and carbon ESG metrics.</a:t>
+            </a:r>
+          </a:p>
+          <a:p>
+            <a:pPr>
+              <a:spcAft>
+                <a:spcPts val="1400"/>
+              </a:spcAft>
+            </a:pPr>
+            <a:r>
+              <a:rPr sz="1800" b="1">
+                <a:solidFill>
+                  <a:srgbClr val="FAFAFA"/>
+                </a:solidFill>
+                <a:latin typeface="Arial"/>
+              </a:rPr>
+              <a:t>Sophisticated Calculations:</a:t>
+            </a:r>
+            <a:r>
+              <a:rPr sz="1800">
+                <a:solidFill>
+                  <a:srgbClr val="A1A1AA"/>
+                </a:solidFill>
+                <a:latin typeface="Arial"/>
+              </a:rPr>
+              <a:t> Implements custom formulas (GICP, MCES, SLA-VEI, COROI) on local telemetry.</a:t>
+            </a:r>
+          </a:p>
+          <a:p>
+            <a:pPr>
+              <a:spcAft>
+                <a:spcPts val="1400"/>
+              </a:spcAft>
+            </a:pPr>
+            <a:r>
+              <a:rPr sz="1800" b="1">
+                <a:solidFill>
+                  <a:srgbClr val="FAFAFA"/>
+                </a:solidFill>
+                <a:latin typeface="Arial"/>
+              </a:rPr>
+              <a:t>Production-Grade Performance:</a:t>
+            </a:r>
+            <a:r>
+              <a:rPr sz="1800">
+                <a:solidFill>
+                  <a:srgbClr val="A1A1AA"/>
+                </a:solidFill>
+                <a:latin typeface="Arial"/>
+              </a:rPr>
+              <a:t> Validated at 1,000 requests concurrency under 100% success rates.</a:t>
+            </a:r>
+          </a:p>
+          <a:p>
+            <a:pPr>
+              <a:spcAft>
+                <a:spcPts val="1400"/>
+              </a:spcAft>
+            </a:pPr>
+            <a:r>
+              <a:rPr sz="1800" b="1">
+                <a:solidFill>
+                  <a:srgbClr val="FAFAFA"/>
+                </a:solidFill>
+                <a:latin typeface="Arial"/>
+              </a:rPr>
+              <a:t>Advanced Competency:</a:t>
+            </a:r>
+            <a:r>
+              <a:rPr sz="1800">
+                <a:solidFill>
+                  <a:srgbClr val="A1A1AA"/>
+                </a:solidFill>
+                <a:latin typeface="Arial"/>
+              </a:rPr>
+              <a:t> Demonstrates full capability in Product Analytics, Data Engineering, and Security.</a:t>
             </a:r>
           </a:p>
         </p:txBody>
@@ -4659,6 +6373,14 @@
 <file path=ppt/slides/slide3.xml><?xml version="1.0" encoding="utf-8"?>
 <p:sld xmlns:a="http://schemas.openxmlformats.org/drawingml/2006/main" xmlns:p="http://schemas.openxmlformats.org/presentationml/2006/main" xmlns:r="http://schemas.openxmlformats.org/officeDocument/2006/relationships">
   <p:cSld>
+    <p:bg>
+      <p:bgPr>
+        <a:solidFill>
+          <a:srgbClr val="0C0C0F"/>
+        </a:solidFill>
+        <a:effectLst/>
+      </p:bgPr>
+    </p:bg>
     <p:spTree>
       <p:nvGrpSpPr>
         <p:cNvPr id="1" name=""/>
@@ -4668,125 +6390,159 @@
       <p:grpSpPr/>
       <p:sp>
         <p:nvSpPr>
-          <p:cNvPr id="2" name="Title 1"/>
-          <p:cNvSpPr>
-            <a:spLocks noGrp="1"/>
-          </p:cNvSpPr>
-          <p:nvPr>
-            <p:ph type="title"/>
-          </p:nvPr>
-        </p:nvSpPr>
-        <p:spPr/>
-        <p:txBody>
-          <a:bodyPr/>
+          <p:cNvPr id="2" name="TextBox 1"/>
+          <p:cNvSpPr txBox="1"/>
+          <p:nvPr/>
+        </p:nvSpPr>
+        <p:spPr>
+          <a:xfrm>
+            <a:off x="457200" y="365760"/>
+            <a:ext cx="8229600" cy="731520"/>
+          </a:xfrm>
+          <a:prstGeom prst="rect">
+            <a:avLst/>
+          </a:prstGeom>
+          <a:noFill/>
+        </p:spPr>
+        <p:txBody>
+          <a:bodyPr wrap="square" lIns="0" tIns="0" rIns="0" bIns="0">
+            <a:spAutoFit/>
+          </a:bodyPr>
           <a:lstStyle/>
           <a:p>
             <a:pPr>
               <a:defRPr sz="3600" b="1">
                 <a:solidFill>
-                  <a:srgbClr val="0F172A"/>
+                  <a:srgbClr val="3B82F6"/>
                 </a:solidFill>
                 <a:latin typeface="Arial"/>
               </a:defRPr>
             </a:pPr>
             <a:r>
-              <a:t>Business Context &amp; Industry Urgency</a:t>
-            </a:r>
-          </a:p>
-        </p:txBody>
-      </p:sp>
-      <p:sp>
-        <p:nvSpPr>
-          <p:cNvPr id="3" name="Content Placeholder 2"/>
-          <p:cNvSpPr>
-            <a:spLocks noGrp="1"/>
-          </p:cNvSpPr>
-          <p:nvPr>
-            <p:ph idx="1"/>
-          </p:nvPr>
-        </p:nvSpPr>
-        <p:spPr/>
-        <p:txBody>
-          <a:bodyPr/>
-          <a:lstStyle/>
-          <a:p>
-            <a:pPr>
-              <a:spcAft>
-                <a:spcPts val="2400"/>
-              </a:spcAft>
-              <a:defRPr sz="2000" i="1">
-                <a:solidFill>
-                  <a:srgbClr val="6366F1"/>
-                </a:solidFill>
-                <a:latin typeface="Arial"/>
-              </a:defRPr>
-            </a:pPr>
-            <a:r>
-              <a:t>Connecting Green IT to Corporate Finance</a:t>
-            </a:r>
-          </a:p>
-          <a:p>
-            <a:pPr>
-              <a:spcAft>
-                <a:spcPts val="1200"/>
-              </a:spcAft>
-              <a:defRPr sz="1600">
-                <a:solidFill>
-                  <a:srgbClr val="64748B"/>
-                </a:solidFill>
-                <a:latin typeface="Arial"/>
-              </a:defRPr>
-            </a:pPr>
-            <a:r>
-              <a:t>Financial Waste: Over 60% of modern cloud budgets dedicated to LLM clusters are lost to over-allocation.</a:t>
-            </a:r>
-          </a:p>
-          <a:p>
-            <a:pPr>
-              <a:spcAft>
-                <a:spcPts val="1200"/>
-              </a:spcAft>
-              <a:defRPr sz="1600">
-                <a:solidFill>
-                  <a:srgbClr val="64748B"/>
-                </a:solidFill>
-                <a:latin typeface="Arial"/>
-              </a:defRPr>
-            </a:pPr>
-            <a:r>
-              <a:t>Regulatory &amp; Compliance Pressure: Global mandates require enterprises to audit and report Scope 3 carbon emissions.</a:t>
-            </a:r>
-          </a:p>
-          <a:p>
-            <a:pPr>
-              <a:spcAft>
-                <a:spcPts val="1200"/>
-              </a:spcAft>
-              <a:defRPr sz="1600">
-                <a:solidFill>
-                  <a:srgbClr val="64748B"/>
-                </a:solidFill>
-                <a:latin typeface="Arial"/>
-              </a:defRPr>
-            </a:pPr>
-            <a:r>
-              <a:t>Green IT Synergy: Demonstrates that optimizing node sizing and cluster efficiency reduces costs and carbon footprint simultaneously.</a:t>
-            </a:r>
-          </a:p>
-          <a:p>
-            <a:pPr>
-              <a:spcAft>
-                <a:spcPts val="1200"/>
-              </a:spcAft>
-              <a:defRPr sz="1600">
-                <a:solidFill>
-                  <a:srgbClr val="64748B"/>
-                </a:solidFill>
-                <a:latin typeface="Arial"/>
-              </a:defRPr>
-            </a:pPr>
-            <a:r>
-              <a:t>Target Audience: Chief Financial Officers (CFOs), VP of Engineering, AI Product Managers, and Sustainability Officers.</a:t>
+              <a:t>Problem Statement</a:t>
+            </a:r>
+          </a:p>
+        </p:txBody>
+      </p:sp>
+      <p:sp>
+        <p:nvSpPr>
+          <p:cNvPr id="3" name="TextBox 2"/>
+          <p:cNvSpPr txBox="1"/>
+          <p:nvPr/>
+        </p:nvSpPr>
+        <p:spPr>
+          <a:xfrm>
+            <a:off x="457200" y="1371600"/>
+            <a:ext cx="8229600" cy="4572000"/>
+          </a:xfrm>
+          <a:prstGeom prst="rect">
+            <a:avLst/>
+          </a:prstGeom>
+          <a:noFill/>
+        </p:spPr>
+        <p:txBody>
+          <a:bodyPr wrap="square" lIns="0" tIns="0" rIns="0" bIns="0">
+            <a:spAutoFit/>
+          </a:bodyPr>
+          <a:lstStyle/>
+          <a:p>
+            <a:pPr>
+              <a:spcAft>
+                <a:spcPts val="1400"/>
+              </a:spcAft>
+            </a:pPr>
+            <a:r>
+              <a:rPr sz="1800" b="1">
+                <a:solidFill>
+                  <a:srgbClr val="FAFAFA"/>
+                </a:solidFill>
+                <a:latin typeface="Arial"/>
+              </a:rPr>
+              <a:t>Skyrocketing Infrastructure Budgets:</a:t>
+            </a:r>
+            <a:r>
+              <a:rPr sz="1800">
+                <a:solidFill>
+                  <a:srgbClr val="A1A1AA"/>
+                </a:solidFill>
+                <a:latin typeface="Arial"/>
+              </a:rPr>
+              <a:t> Generative AI model training and serving represent the largest modern enterprise IT expense.</a:t>
+            </a:r>
+          </a:p>
+          <a:p>
+            <a:pPr>
+              <a:spcAft>
+                <a:spcPts val="1400"/>
+              </a:spcAft>
+            </a:pPr>
+            <a:r>
+              <a:rPr sz="1800" b="1">
+                <a:solidFill>
+                  <a:srgbClr val="FAFAFA"/>
+                </a:solidFill>
+                <a:latin typeface="Arial"/>
+              </a:rPr>
+              <a:t>The Visibility Vacuum:</a:t>
+            </a:r>
+            <a:r>
+              <a:rPr sz="1800">
+                <a:solidFill>
+                  <a:srgbClr val="A1A1AA"/>
+                </a:solidFill>
+                <a:latin typeface="Arial"/>
+              </a:rPr>
+              <a:t> Standard server tools show CPU/Memory load but omit cost, SLA penalties, and carbon metrics.</a:t>
+            </a:r>
+          </a:p>
+          <a:p>
+            <a:pPr>
+              <a:spcAft>
+                <a:spcPts val="1400"/>
+              </a:spcAft>
+            </a:pPr>
+            <a:r>
+              <a:rPr sz="1800" b="1">
+                <a:solidFill>
+                  <a:srgbClr val="FAFAFA"/>
+                </a:solidFill>
+                <a:latin typeface="Arial"/>
+              </a:rPr>
+              <a:t>Severe Resource Waste:</a:t>
+            </a:r>
+            <a:r>
+              <a:rPr sz="1800">
+                <a:solidFill>
+                  <a:srgbClr val="A1A1AA"/>
+                </a:solidFill>
+                <a:latin typeface="Arial"/>
+              </a:rPr>
+              <a:t> Multi-million dollar GPU clusters remain reserved 24/7 with zero load outside working hours.</a:t>
+            </a:r>
+          </a:p>
+          <a:p>
+            <a:pPr>
+              <a:spcAft>
+                <a:spcPts val="1400"/>
+              </a:spcAft>
+            </a:pPr>
+            <a:r>
+              <a:rPr sz="1800" b="1">
+                <a:solidFill>
+                  <a:srgbClr val="FAFAFA"/>
+                </a:solidFill>
+                <a:latin typeface="Arial"/>
+              </a:rPr>
+              <a:t>Regulatory Reporting Deficits:</a:t>
+            </a:r>
+            <a:r>
+              <a:rPr sz="1800">
+                <a:solidFill>
+                  <a:srgbClr val="A1A1AA"/>
+                </a:solidFill>
+                <a:latin typeface="Arial"/>
+              </a:rPr>
+              <a:t> Compliance audits require tracking Scope 3 green IT emissions, but standard cloud metrics fail to correlate electricity grid coefficients.</a:t>
             </a:r>
           </a:p>
         </p:txBody>
@@ -4802,6 +6558,14 @@
 <file path=ppt/slides/slide4.xml><?xml version="1.0" encoding="utf-8"?>
 <p:sld xmlns:a="http://schemas.openxmlformats.org/drawingml/2006/main" xmlns:p="http://schemas.openxmlformats.org/presentationml/2006/main" xmlns:r="http://schemas.openxmlformats.org/officeDocument/2006/relationships">
   <p:cSld>
+    <p:bg>
+      <p:bgPr>
+        <a:solidFill>
+          <a:srgbClr val="0C0C0F"/>
+        </a:solidFill>
+        <a:effectLst/>
+      </p:bgPr>
+    </p:bg>
     <p:spTree>
       <p:nvGrpSpPr>
         <p:cNvPr id="1" name=""/>
@@ -4811,125 +6575,159 @@
       <p:grpSpPr/>
       <p:sp>
         <p:nvSpPr>
-          <p:cNvPr id="2" name="Title 1"/>
-          <p:cNvSpPr>
-            <a:spLocks noGrp="1"/>
-          </p:cNvSpPr>
-          <p:nvPr>
-            <p:ph type="title"/>
-          </p:nvPr>
-        </p:nvSpPr>
-        <p:spPr/>
-        <p:txBody>
-          <a:bodyPr/>
+          <p:cNvPr id="2" name="TextBox 1"/>
+          <p:cNvSpPr txBox="1"/>
+          <p:nvPr/>
+        </p:nvSpPr>
+        <p:spPr>
+          <a:xfrm>
+            <a:off x="457200" y="365760"/>
+            <a:ext cx="8229600" cy="731520"/>
+          </a:xfrm>
+          <a:prstGeom prst="rect">
+            <a:avLst/>
+          </a:prstGeom>
+          <a:noFill/>
+        </p:spPr>
+        <p:txBody>
+          <a:bodyPr wrap="square" lIns="0" tIns="0" rIns="0" bIns="0">
+            <a:spAutoFit/>
+          </a:bodyPr>
           <a:lstStyle/>
           <a:p>
             <a:pPr>
               <a:defRPr sz="3600" b="1">
                 <a:solidFill>
-                  <a:srgbClr val="0F172A"/>
+                  <a:srgbClr val="3B82F6"/>
                 </a:solidFill>
                 <a:latin typeface="Arial"/>
               </a:defRPr>
             </a:pPr>
             <a:r>
-              <a:t>Product Vision</a:t>
-            </a:r>
-          </a:p>
-        </p:txBody>
-      </p:sp>
-      <p:sp>
-        <p:nvSpPr>
-          <p:cNvPr id="3" name="Content Placeholder 2"/>
-          <p:cNvSpPr>
-            <a:spLocks noGrp="1"/>
-          </p:cNvSpPr>
-          <p:nvPr>
-            <p:ph idx="1"/>
-          </p:nvPr>
-        </p:nvSpPr>
-        <p:spPr/>
-        <p:txBody>
-          <a:bodyPr/>
-          <a:lstStyle/>
-          <a:p>
-            <a:pPr>
-              <a:spcAft>
-                <a:spcPts val="2400"/>
-              </a:spcAft>
-              <a:defRPr sz="2000" i="1">
-                <a:solidFill>
-                  <a:srgbClr val="6366F1"/>
-                </a:solidFill>
-                <a:latin typeface="Arial"/>
-              </a:defRPr>
-            </a:pPr>
-            <a:r>
-              <a:t>Continuous Financial and Environmental Intelligence</a:t>
-            </a:r>
-          </a:p>
-          <a:p>
-            <a:pPr>
-              <a:spcAft>
-                <a:spcPts val="1200"/>
-              </a:spcAft>
-              <a:defRPr sz="1600">
-                <a:solidFill>
-                  <a:srgbClr val="64748B"/>
-                </a:solidFill>
-                <a:latin typeface="Arial"/>
-              </a:defRPr>
-            </a:pPr>
-            <a:r>
-              <a:t>Real-Time Monitoring: Aggregate data logs into high-level actionable metrics (GICP, MCES, SLA-VEI).</a:t>
-            </a:r>
-          </a:p>
-          <a:p>
-            <a:pPr>
-              <a:spcAft>
-                <a:spcPts val="1200"/>
-              </a:spcAft>
-              <a:defRPr sz="1600">
-                <a:solidFill>
-                  <a:srgbClr val="64748B"/>
-                </a:solidFill>
-                <a:latin typeface="Arial"/>
-              </a:defRPr>
-            </a:pPr>
-            <a:r>
-              <a:t>Actionable Recommendations: Automatically generate the top 5 cost-saving and emissions-minimizing sizing actions.</a:t>
-            </a:r>
-          </a:p>
-          <a:p>
-            <a:pPr>
-              <a:spcAft>
-                <a:spcPts val="1200"/>
-              </a:spcAft>
-              <a:defRPr sz="1600">
-                <a:solidFill>
-                  <a:srgbClr val="64748B"/>
-                </a:solidFill>
-                <a:latin typeface="Arial"/>
-              </a:defRPr>
-            </a:pPr>
-            <a:r>
-              <a:t>Interactive Simulation: Enable Product Managers to simulate 'What-If' scenarios before allocating node pools.</a:t>
-            </a:r>
-          </a:p>
-          <a:p>
-            <a:pPr>
-              <a:spcAft>
-                <a:spcPts val="1200"/>
-              </a:spcAft>
-              <a:defRPr sz="1600">
-                <a:solidFill>
-                  <a:srgbClr val="64748B"/>
-                </a:solidFill>
-                <a:latin typeface="Arial"/>
-              </a:defRPr>
-            </a:pPr>
-            <a:r>
-              <a:t>Enterprise Audit Trails: Maintain secure, immutable logs tracking all administrative changes and exports.</a:t>
+              <a:t>Business Context</a:t>
+            </a:r>
+          </a:p>
+        </p:txBody>
+      </p:sp>
+      <p:sp>
+        <p:nvSpPr>
+          <p:cNvPr id="3" name="TextBox 2"/>
+          <p:cNvSpPr txBox="1"/>
+          <p:nvPr/>
+        </p:nvSpPr>
+        <p:spPr>
+          <a:xfrm>
+            <a:off x="457200" y="1371600"/>
+            <a:ext cx="8229600" cy="4572000"/>
+          </a:xfrm>
+          <a:prstGeom prst="rect">
+            <a:avLst/>
+          </a:prstGeom>
+          <a:noFill/>
+        </p:spPr>
+        <p:txBody>
+          <a:bodyPr wrap="square" lIns="0" tIns="0" rIns="0" bIns="0">
+            <a:spAutoFit/>
+          </a:bodyPr>
+          <a:lstStyle/>
+          <a:p>
+            <a:pPr>
+              <a:spcAft>
+                <a:spcPts val="1400"/>
+              </a:spcAft>
+            </a:pPr>
+            <a:r>
+              <a:rPr sz="1800" b="1">
+                <a:solidFill>
+                  <a:srgbClr val="FAFAFA"/>
+                </a:solidFill>
+                <a:latin typeface="Arial"/>
+              </a:rPr>
+              <a:t>Financial Leakage:</a:t>
+            </a:r>
+            <a:r>
+              <a:rPr sz="1800">
+                <a:solidFill>
+                  <a:srgbClr val="A1A1AA"/>
+                </a:solidFill>
+                <a:latin typeface="Arial"/>
+              </a:rPr>
+              <a:t> Up to 60% of GPU compute budgets are wasted on idle allocations.</a:t>
+            </a:r>
+          </a:p>
+          <a:p>
+            <a:pPr>
+              <a:spcAft>
+                <a:spcPts val="1400"/>
+              </a:spcAft>
+            </a:pPr>
+            <a:r>
+              <a:rPr sz="1800" b="1">
+                <a:solidFill>
+                  <a:srgbClr val="FAFAFA"/>
+                </a:solidFill>
+                <a:latin typeface="Arial"/>
+              </a:rPr>
+              <a:t>Regulatory Compliance:</a:t>
+            </a:r>
+            <a:r>
+              <a:rPr sz="1800">
+                <a:solidFill>
+                  <a:srgbClr val="A1A1AA"/>
+                </a:solidFill>
+                <a:latin typeface="Arial"/>
+              </a:rPr>
+              <a:t> Imminent Scope 3 environmental carbon footprint audits are legally required in global jurisdictions.</a:t>
+            </a:r>
+          </a:p>
+          <a:p>
+            <a:pPr>
+              <a:spcAft>
+                <a:spcPts val="1400"/>
+              </a:spcAft>
+            </a:pPr>
+            <a:r>
+              <a:rPr sz="1800" b="1">
+                <a:solidFill>
+                  <a:srgbClr val="FAFAFA"/>
+                </a:solidFill>
+                <a:latin typeface="Arial"/>
+              </a:rPr>
+              <a:t>The Green IT Opportunity:</a:t>
+            </a:r>
+            <a:r>
+              <a:rPr sz="1800">
+                <a:solidFill>
+                  <a:srgbClr val="A1A1AA"/>
+                </a:solidFill>
+                <a:latin typeface="Arial"/>
+              </a:rPr>
+              <a:t> Optimizing compute sizing and regional scheduling yields double benefits: lowering spend and carbon footprint.</a:t>
+            </a:r>
+          </a:p>
+          <a:p>
+            <a:pPr>
+              <a:spcAft>
+                <a:spcPts val="1400"/>
+              </a:spcAft>
+            </a:pPr>
+            <a:r>
+              <a:rPr sz="1800" b="1">
+                <a:solidFill>
+                  <a:srgbClr val="FAFAFA"/>
+                </a:solidFill>
+                <a:latin typeface="Arial"/>
+              </a:rPr>
+              <a:t>Stakeholder Alignment:</a:t>
+            </a:r>
+            <a:r>
+              <a:rPr sz="1800">
+                <a:solidFill>
+                  <a:srgbClr val="A1A1AA"/>
+                </a:solidFill>
+                <a:latin typeface="Arial"/>
+              </a:rPr>
+              <a:t> Designed to support Chief Financial Officers (CFOs), VP of Engineering, AI Product Managers, and Sustainability Officers.</a:t>
             </a:r>
           </a:p>
         </p:txBody>
@@ -4945,6 +6743,14 @@
 <file path=ppt/slides/slide5.xml><?xml version="1.0" encoding="utf-8"?>
 <p:sld xmlns:a="http://schemas.openxmlformats.org/drawingml/2006/main" xmlns:p="http://schemas.openxmlformats.org/presentationml/2006/main" xmlns:r="http://schemas.openxmlformats.org/officeDocument/2006/relationships">
   <p:cSld>
+    <p:bg>
+      <p:bgPr>
+        <a:solidFill>
+          <a:srgbClr val="0C0C0F"/>
+        </a:solidFill>
+        <a:effectLst/>
+      </p:bgPr>
+    </p:bg>
     <p:spTree>
       <p:nvGrpSpPr>
         <p:cNvPr id="1" name=""/>
@@ -4954,125 +6760,159 @@
       <p:grpSpPr/>
       <p:sp>
         <p:nvSpPr>
-          <p:cNvPr id="2" name="Title 1"/>
-          <p:cNvSpPr>
-            <a:spLocks noGrp="1"/>
-          </p:cNvSpPr>
-          <p:nvPr>
-            <p:ph type="title"/>
-          </p:nvPr>
-        </p:nvSpPr>
-        <p:spPr/>
-        <p:txBody>
-          <a:bodyPr/>
+          <p:cNvPr id="2" name="TextBox 1"/>
+          <p:cNvSpPr txBox="1"/>
+          <p:nvPr/>
+        </p:nvSpPr>
+        <p:spPr>
+          <a:xfrm>
+            <a:off x="457200" y="365760"/>
+            <a:ext cx="8229600" cy="731520"/>
+          </a:xfrm>
+          <a:prstGeom prst="rect">
+            <a:avLst/>
+          </a:prstGeom>
+          <a:noFill/>
+        </p:spPr>
+        <p:txBody>
+          <a:bodyPr wrap="square" lIns="0" tIns="0" rIns="0" bIns="0">
+            <a:spAutoFit/>
+          </a:bodyPr>
           <a:lstStyle/>
           <a:p>
             <a:pPr>
               <a:defRPr sz="3600" b="1">
                 <a:solidFill>
-                  <a:srgbClr val="0F172A"/>
+                  <a:srgbClr val="3B82F6"/>
                 </a:solidFill>
                 <a:latin typeface="Arial"/>
               </a:defRPr>
             </a:pPr>
             <a:r>
-              <a:t>System Architecture</a:t>
-            </a:r>
-          </a:p>
-        </p:txBody>
-      </p:sp>
-      <p:sp>
-        <p:nvSpPr>
-          <p:cNvPr id="3" name="Content Placeholder 2"/>
-          <p:cNvSpPr>
-            <a:spLocks noGrp="1"/>
-          </p:cNvSpPr>
-          <p:nvPr>
-            <p:ph idx="1"/>
-          </p:nvPr>
-        </p:nvSpPr>
-        <p:spPr/>
-        <p:txBody>
-          <a:bodyPr/>
-          <a:lstStyle/>
-          <a:p>
-            <a:pPr>
-              <a:spcAft>
-                <a:spcPts val="2400"/>
-              </a:spcAft>
-              <a:defRPr sz="2000" i="1">
-                <a:solidFill>
-                  <a:srgbClr val="6366F1"/>
-                </a:solidFill>
-                <a:latin typeface="Arial"/>
-              </a:defRPr>
-            </a:pPr>
-            <a:r>
-              <a:t>A Clean, High-Performance Multi-Tier System</a:t>
-            </a:r>
-          </a:p>
-          <a:p>
-            <a:pPr>
-              <a:spcAft>
-                <a:spcPts val="1200"/>
-              </a:spcAft>
-              <a:defRPr sz="1600">
-                <a:solidFill>
-                  <a:srgbClr val="64748B"/>
-                </a:solidFill>
-                <a:latin typeface="Arial"/>
-              </a:defRPr>
-            </a:pPr>
-            <a:r>
-              <a:t>Frontend: React SPA built with TypeScript, featuring custom glassmorphism styling and SVG/Canvas charts.</a:t>
-            </a:r>
-          </a:p>
-          <a:p>
-            <a:pPr>
-              <a:spcAft>
-                <a:spcPts val="1200"/>
-              </a:spcAft>
-              <a:defRPr sz="1600">
-                <a:solidFill>
-                  <a:srgbClr val="64748B"/>
-                </a:solidFill>
-                <a:latin typeface="Arial"/>
-              </a:defRPr>
-            </a:pPr>
-            <a:r>
-              <a:t>Backend: FastAPI REST framework serving optimized endpoints, leveraging NumPy for z-score calculations.</a:t>
-            </a:r>
-          </a:p>
-          <a:p>
-            <a:pPr>
-              <a:spcAft>
-                <a:spcPts val="1200"/>
-              </a:spcAft>
-              <a:defRPr sz="1600">
-                <a:solidFill>
-                  <a:srgbClr val="64748B"/>
-                </a:solidFill>
-                <a:latin typeface="Arial"/>
-              </a:defRPr>
-            </a:pPr>
-            <a:r>
-              <a:t>Database Tier: Dynamic SQLAlchemy setup supporting local SQLite development and multi-tenant production PostgreSQL.</a:t>
-            </a:r>
-          </a:p>
-          <a:p>
-            <a:pPr>
-              <a:spcAft>
-                <a:spcPts val="1200"/>
-              </a:spcAft>
-              <a:defRPr sz="1600">
-                <a:solidFill>
-                  <a:srgbClr val="64748B"/>
-                </a:solidFill>
-                <a:latin typeface="Arial"/>
-              </a:defRPr>
-            </a:pPr>
-            <a:r>
-              <a:t>Containerization: Docker and Docker Compose stacks handling databases, pgAdmin instances, and application services.</a:t>
+              <a:t>Product Vision</a:t>
+            </a:r>
+          </a:p>
+        </p:txBody>
+      </p:sp>
+      <p:sp>
+        <p:nvSpPr>
+          <p:cNvPr id="3" name="TextBox 2"/>
+          <p:cNvSpPr txBox="1"/>
+          <p:nvPr/>
+        </p:nvSpPr>
+        <p:spPr>
+          <a:xfrm>
+            <a:off x="457200" y="1371600"/>
+            <a:ext cx="8229600" cy="4572000"/>
+          </a:xfrm>
+          <a:prstGeom prst="rect">
+            <a:avLst/>
+          </a:prstGeom>
+          <a:noFill/>
+        </p:spPr>
+        <p:txBody>
+          <a:bodyPr wrap="square" lIns="0" tIns="0" rIns="0" bIns="0">
+            <a:spAutoFit/>
+          </a:bodyPr>
+          <a:lstStyle/>
+          <a:p>
+            <a:pPr>
+              <a:spcAft>
+                <a:spcPts val="1400"/>
+              </a:spcAft>
+            </a:pPr>
+            <a:r>
+              <a:rPr sz="1800" b="1">
+                <a:solidFill>
+                  <a:srgbClr val="FAFAFA"/>
+                </a:solidFill>
+                <a:latin typeface="Arial"/>
+              </a:rPr>
+              <a:t>Continuous Intelligence:</a:t>
+            </a:r>
+            <a:r>
+              <a:rPr sz="1800">
+                <a:solidFill>
+                  <a:srgbClr val="A1A1AA"/>
+                </a:solidFill>
+                <a:latin typeface="Arial"/>
+              </a:rPr>
+              <a:t> Convert low-level machine logs into high-level business analytics indexes.</a:t>
+            </a:r>
+          </a:p>
+          <a:p>
+            <a:pPr>
+              <a:spcAft>
+                <a:spcPts val="1400"/>
+              </a:spcAft>
+            </a:pPr>
+            <a:r>
+              <a:rPr sz="1800" b="1">
+                <a:solidFill>
+                  <a:srgbClr val="FAFAFA"/>
+                </a:solidFill>
+                <a:latin typeface="Arial"/>
+              </a:rPr>
+              <a:t>Actionable Sizing Engine:</a:t>
+            </a:r>
+            <a:r>
+              <a:rPr sz="1800">
+                <a:solidFill>
+                  <a:srgbClr val="A1A1AA"/>
+                </a:solidFill>
+                <a:latin typeface="Arial"/>
+              </a:rPr>
+              <a:t> Feed recommendation pipelines directly to container orchestration systems to shut down waste.</a:t>
+            </a:r>
+          </a:p>
+          <a:p>
+            <a:pPr>
+              <a:spcAft>
+                <a:spcPts val="1400"/>
+              </a:spcAft>
+            </a:pPr>
+            <a:r>
+              <a:rPr sz="1800" b="1">
+                <a:solidFill>
+                  <a:srgbClr val="FAFAFA"/>
+                </a:solidFill>
+                <a:latin typeface="Arial"/>
+              </a:rPr>
+              <a:t>Risk-Balanced Simulation:</a:t>
+            </a:r>
+            <a:r>
+              <a:rPr sz="1800">
+                <a:solidFill>
+                  <a:srgbClr val="A1A1AA"/>
+                </a:solidFill>
+                <a:latin typeface="Arial"/>
+              </a:rPr>
+              <a:t> Allow product managers to simulate cost and SLA performance changes before allocating clusters.</a:t>
+            </a:r>
+          </a:p>
+          <a:p>
+            <a:pPr>
+              <a:spcAft>
+                <a:spcPts val="1400"/>
+              </a:spcAft>
+            </a:pPr>
+            <a:r>
+              <a:rPr sz="1800" b="1">
+                <a:solidFill>
+                  <a:srgbClr val="FAFAFA"/>
+                </a:solidFill>
+                <a:latin typeface="Arial"/>
+              </a:rPr>
+              <a:t>Immutable Audit Trails:</a:t>
+            </a:r>
+            <a:r>
+              <a:rPr sz="1800">
+                <a:solidFill>
+                  <a:srgbClr val="A1A1AA"/>
+                </a:solidFill>
+                <a:latin typeface="Arial"/>
+              </a:rPr>
+              <a:t> Guarantee security compliance through JWT auth and immutable transaction auditing logs.</a:t>
             </a:r>
           </a:p>
         </p:txBody>
@@ -5088,6 +6928,14 @@
 <file path=ppt/slides/slide6.xml><?xml version="1.0" encoding="utf-8"?>
 <p:sld xmlns:a="http://schemas.openxmlformats.org/drawingml/2006/main" xmlns:p="http://schemas.openxmlformats.org/presentationml/2006/main" xmlns:r="http://schemas.openxmlformats.org/officeDocument/2006/relationships">
   <p:cSld>
+    <p:bg>
+      <p:bgPr>
+        <a:solidFill>
+          <a:srgbClr val="0C0C0F"/>
+        </a:solidFill>
+        <a:effectLst/>
+      </p:bgPr>
+    </p:bg>
     <p:spTree>
       <p:nvGrpSpPr>
         <p:cNvPr id="1" name=""/>
@@ -5097,157 +6945,184 @@
       <p:grpSpPr/>
       <p:sp>
         <p:nvSpPr>
-          <p:cNvPr id="2" name="Title 1"/>
-          <p:cNvSpPr>
-            <a:spLocks noGrp="1"/>
-          </p:cNvSpPr>
-          <p:nvPr>
-            <p:ph type="title"/>
-          </p:nvPr>
-        </p:nvSpPr>
-        <p:spPr/>
-        <p:txBody>
-          <a:bodyPr/>
+          <p:cNvPr id="2" name="TextBox 1"/>
+          <p:cNvSpPr txBox="1"/>
+          <p:nvPr/>
+        </p:nvSpPr>
+        <p:spPr>
+          <a:xfrm>
+            <a:off x="457200" y="365760"/>
+            <a:ext cx="8229600" cy="731520"/>
+          </a:xfrm>
+          <a:prstGeom prst="rect">
+            <a:avLst/>
+          </a:prstGeom>
+          <a:noFill/>
+        </p:spPr>
+        <p:txBody>
+          <a:bodyPr wrap="square" lIns="0" tIns="0" rIns="0" bIns="0">
+            <a:spAutoFit/>
+          </a:bodyPr>
           <a:lstStyle/>
           <a:p>
             <a:pPr>
               <a:defRPr sz="3600" b="1">
                 <a:solidFill>
-                  <a:srgbClr val="0F172A"/>
+                  <a:srgbClr val="3B82F6"/>
                 </a:solidFill>
                 <a:latin typeface="Arial"/>
               </a:defRPr>
             </a:pPr>
             <a:r>
-              <a:t>Database Design &amp; Schema</a:t>
-            </a:r>
-          </a:p>
-        </p:txBody>
-      </p:sp>
-      <p:sp>
-        <p:nvSpPr>
-          <p:cNvPr id="3" name="Content Placeholder 2"/>
-          <p:cNvSpPr>
-            <a:spLocks noGrp="1"/>
-          </p:cNvSpPr>
-          <p:nvPr>
-            <p:ph idx="1"/>
-          </p:nvPr>
-        </p:nvSpPr>
-        <p:spPr/>
-        <p:txBody>
-          <a:bodyPr/>
-          <a:lstStyle/>
-          <a:p>
-            <a:pPr>
-              <a:spcAft>
-                <a:spcPts val="2400"/>
-              </a:spcAft>
-              <a:defRPr sz="2000" i="1">
-                <a:solidFill>
-                  <a:srgbClr val="6366F1"/>
-                </a:solidFill>
-                <a:latin typeface="Arial"/>
-              </a:defRPr>
-            </a:pPr>
-            <a:r>
-              <a:t>Entity-Relationship Core for Telemetry Auditing</a:t>
-            </a:r>
-          </a:p>
-          <a:p>
-            <a:pPr>
-              <a:spcAft>
-                <a:spcPts val="1200"/>
-              </a:spcAft>
-              <a:defRPr sz="1600">
-                <a:solidFill>
-                  <a:srgbClr val="64748B"/>
-                </a:solidFill>
-                <a:latin typeface="Arial"/>
-              </a:defRPr>
-            </a:pPr>
-            <a:r>
-              <a:t>gpu_cluster_nodes: Node-level registry (provider, instance type, hourly rate, carbon factor, status).</a:t>
-            </a:r>
-          </a:p>
-          <a:p>
-            <a:pPr>
-              <a:spcAft>
-                <a:spcPts val="1200"/>
-              </a:spcAft>
-              <a:defRPr sz="1600">
-                <a:solidFill>
-                  <a:srgbClr val="64748B"/>
-                </a:solidFill>
-                <a:latin typeface="Arial"/>
-              </a:defRPr>
-            </a:pPr>
-            <a:r>
-              <a:t>model_deployments: Deployed LLM/diffusion configurations mapped to nodes and target latency SLAs.</a:t>
-            </a:r>
-          </a:p>
-          <a:p>
-            <a:pPr>
-              <a:spcAft>
-                <a:spcPts val="1200"/>
-              </a:spcAft>
-              <a:defRPr sz="1600">
-                <a:solidFill>
-                  <a:srgbClr val="64748B"/>
-                </a:solidFill>
-                <a:latin typeface="Arial"/>
-              </a:defRPr>
-            </a:pPr>
-            <a:r>
-              <a:t>gpu_utilization_logs: Hourly telemetry records tracking GPU load percentage and physical power draw.</a:t>
-            </a:r>
-          </a:p>
-          <a:p>
-            <a:pPr>
-              <a:spcAft>
-                <a:spcPts val="1200"/>
-              </a:spcAft>
-              <a:defRPr sz="1600">
-                <a:solidFill>
-                  <a:srgbClr val="64748B"/>
-                </a:solidFill>
-                <a:latin typeface="Arial"/>
-              </a:defRPr>
-            </a:pPr>
-            <a:r>
-              <a:t>carbon_emissions_logs: Calculated environmental factors corresponding to hourly power consumption.</a:t>
-            </a:r>
-          </a:p>
-          <a:p>
-            <a:pPr>
-              <a:spcAft>
-                <a:spcPts val="1200"/>
-              </a:spcAft>
-              <a:defRPr sz="1600">
-                <a:solidFill>
-                  <a:srgbClr val="64748B"/>
-                </a:solidFill>
-                <a:latin typeface="Arial"/>
-              </a:defRPr>
-            </a:pPr>
-            <a:r>
-              <a:t>inference_request_logs: Transaction audit trails tracking request parameters, token counts, and SLA violation status.</a:t>
-            </a:r>
-          </a:p>
-          <a:p>
-            <a:pPr>
-              <a:spcAft>
-                <a:spcPts val="1200"/>
-              </a:spcAft>
-              <a:defRPr sz="1600">
-                <a:solidFill>
-                  <a:srgbClr val="64748B"/>
-                </a:solidFill>
-                <a:latin typeface="Arial"/>
-              </a:defRPr>
-            </a:pPr>
-            <a:r>
-              <a:t>users &amp; activity_logs: Secure tables tracking JWT accounts and administrative actions.</a:t>
+              <a:t>System Architecture</a:t>
+            </a:r>
+          </a:p>
+        </p:txBody>
+      </p:sp>
+      <p:sp>
+        <p:nvSpPr>
+          <p:cNvPr id="3" name="TextBox 2"/>
+          <p:cNvSpPr txBox="1"/>
+          <p:nvPr/>
+        </p:nvSpPr>
+        <p:spPr>
+          <a:xfrm>
+            <a:off x="457200" y="1371600"/>
+            <a:ext cx="8229600" cy="4572000"/>
+          </a:xfrm>
+          <a:prstGeom prst="rect">
+            <a:avLst/>
+          </a:prstGeom>
+          <a:noFill/>
+        </p:spPr>
+        <p:txBody>
+          <a:bodyPr wrap="square" lIns="0" tIns="0" rIns="0" bIns="0">
+            <a:spAutoFit/>
+          </a:bodyPr>
+          <a:lstStyle/>
+          <a:p>
+            <a:pPr>
+              <a:spcAft>
+                <a:spcPts val="1400"/>
+              </a:spcAft>
+            </a:pPr>
+            <a:r>
+              <a:rPr sz="1800" b="1">
+                <a:solidFill>
+                  <a:srgbClr val="FAFAFA"/>
+                </a:solidFill>
+                <a:latin typeface="Arial"/>
+              </a:rPr>
+              <a:t>Multi-Tier Design:</a:t>
+            </a:r>
+            <a:r>
+              <a:rPr sz="1800">
+                <a:solidFill>
+                  <a:srgbClr val="A1A1AA"/>
+                </a:solidFill>
+                <a:latin typeface="Arial"/>
+              </a:rPr>
+              <a:t> Decoupled client, REST API server, and relational database tiers.</a:t>
+            </a:r>
+          </a:p>
+          <a:p>
+            <a:pPr>
+              <a:spcAft>
+                <a:spcPts val="1400"/>
+              </a:spcAft>
+            </a:pPr>
+            <a:r>
+              <a:rPr sz="1800" b="1">
+                <a:solidFill>
+                  <a:srgbClr val="FAFAFA"/>
+                </a:solidFill>
+                <a:latin typeface="Arial"/>
+              </a:rPr>
+              <a:t>Frontend Client:</a:t>
+            </a:r>
+            <a:r>
+              <a:rPr sz="1800">
+                <a:solidFill>
+                  <a:srgbClr val="A1A1AA"/>
+                </a:solidFill>
+                <a:latin typeface="Arial"/>
+              </a:rPr>
+              <a:t> React TypeScript application executing custom ECharts rendering inside a premium Glassmorphism Zinc dark UI.</a:t>
+            </a:r>
+          </a:p>
+          <a:p>
+            <a:pPr>
+              <a:spcAft>
+                <a:spcPts val="1400"/>
+              </a:spcAft>
+            </a:pPr>
+            <a:r>
+              <a:rPr sz="1800" b="1">
+                <a:solidFill>
+                  <a:srgbClr val="FAFAFA"/>
+                </a:solidFill>
+                <a:latin typeface="Arial"/>
+              </a:rPr>
+              <a:t>FastAPI Backend:</a:t>
+            </a:r>
+            <a:r>
+              <a:rPr sz="1800">
+                <a:solidFill>
+                  <a:srgbClr val="A1A1AA"/>
+                </a:solidFill>
+                <a:latin typeface="Arial"/>
+              </a:rPr>
+              <a:t> High-performance Python ASGI API routing, using NumPy for sliding-window mathematical Z-scores.</a:t>
+            </a:r>
+          </a:p>
+          <a:p>
+            <a:pPr>
+              <a:spcAft>
+                <a:spcPts val="1400"/>
+              </a:spcAft>
+            </a:pPr>
+            <a:r>
+              <a:rPr sz="1800" b="1">
+                <a:solidFill>
+                  <a:srgbClr val="FAFAFA"/>
+                </a:solidFill>
+                <a:latin typeface="Arial"/>
+              </a:rPr>
+              <a:t>Database Layer:</a:t>
+            </a:r>
+            <a:r>
+              <a:rPr sz="1800">
+                <a:solidFill>
+                  <a:srgbClr val="A1A1AA"/>
+                </a:solidFill>
+                <a:latin typeface="Arial"/>
+              </a:rPr>
+              <a:t> SQLAlchemy ORM layer abstracting SQLite (development) and MySQL (production) servers.</a:t>
+            </a:r>
+          </a:p>
+          <a:p>
+            <a:pPr>
+              <a:spcAft>
+                <a:spcPts val="1400"/>
+              </a:spcAft>
+            </a:pPr>
+            <a:r>
+              <a:rPr sz="1800" b="1">
+                <a:solidFill>
+                  <a:srgbClr val="FAFAFA"/>
+                </a:solidFill>
+                <a:latin typeface="Arial"/>
+              </a:rPr>
+              <a:t>Orchestration Stacks:</a:t>
+            </a:r>
+            <a:r>
+              <a:rPr sz="1800">
+                <a:solidFill>
+                  <a:srgbClr val="A1A1AA"/>
+                </a:solidFill>
+                <a:latin typeface="Arial"/>
+              </a:rPr>
+              <a:t> Dockerized compose profiles managing application services, database engines, and pgAdmin monitors.</a:t>
             </a:r>
           </a:p>
         </p:txBody>
@@ -5263,6 +7138,14 @@
 <file path=ppt/slides/slide7.xml><?xml version="1.0" encoding="utf-8"?>
 <p:sld xmlns:a="http://schemas.openxmlformats.org/drawingml/2006/main" xmlns:p="http://schemas.openxmlformats.org/presentationml/2006/main" xmlns:r="http://schemas.openxmlformats.org/officeDocument/2006/relationships">
   <p:cSld>
+    <p:bg>
+      <p:bgPr>
+        <a:solidFill>
+          <a:srgbClr val="0C0C0F"/>
+        </a:solidFill>
+        <a:effectLst/>
+      </p:bgPr>
+    </p:bg>
     <p:spTree>
       <p:nvGrpSpPr>
         <p:cNvPr id="1" name=""/>
@@ -5272,125 +7155,184 @@
       <p:grpSpPr/>
       <p:sp>
         <p:nvSpPr>
-          <p:cNvPr id="2" name="Title 1"/>
-          <p:cNvSpPr>
-            <a:spLocks noGrp="1"/>
-          </p:cNvSpPr>
-          <p:nvPr>
-            <p:ph type="title"/>
-          </p:nvPr>
-        </p:nvSpPr>
-        <p:spPr/>
-        <p:txBody>
-          <a:bodyPr/>
+          <p:cNvPr id="2" name="TextBox 1"/>
+          <p:cNvSpPr txBox="1"/>
+          <p:nvPr/>
+        </p:nvSpPr>
+        <p:spPr>
+          <a:xfrm>
+            <a:off x="457200" y="365760"/>
+            <a:ext cx="8229600" cy="731520"/>
+          </a:xfrm>
+          <a:prstGeom prst="rect">
+            <a:avLst/>
+          </a:prstGeom>
+          <a:noFill/>
+        </p:spPr>
+        <p:txBody>
+          <a:bodyPr wrap="square" lIns="0" tIns="0" rIns="0" bIns="0">
+            <a:spAutoFit/>
+          </a:bodyPr>
           <a:lstStyle/>
           <a:p>
             <a:pPr>
               <a:defRPr sz="3600" b="1">
                 <a:solidFill>
-                  <a:srgbClr val="0F172A"/>
+                  <a:srgbClr val="3B82F6"/>
                 </a:solidFill>
                 <a:latin typeface="Arial"/>
               </a:defRPr>
             </a:pPr>
             <a:r>
-              <a:t>Innovative KPI Framework</a:t>
-            </a:r>
-          </a:p>
-        </p:txBody>
-      </p:sp>
-      <p:sp>
-        <p:nvSpPr>
-          <p:cNvPr id="3" name="Content Placeholder 2"/>
-          <p:cNvSpPr>
-            <a:spLocks noGrp="1"/>
-          </p:cNvSpPr>
-          <p:nvPr>
-            <p:ph idx="1"/>
-          </p:nvPr>
-        </p:nvSpPr>
-        <p:spPr/>
-        <p:txBody>
-          <a:bodyPr/>
-          <a:lstStyle/>
-          <a:p>
-            <a:pPr>
-              <a:spcAft>
-                <a:spcPts val="2400"/>
-              </a:spcAft>
-              <a:defRPr sz="2000" i="1">
-                <a:solidFill>
-                  <a:srgbClr val="6366F1"/>
-                </a:solidFill>
-                <a:latin typeface="Arial"/>
-              </a:defRPr>
-            </a:pPr>
-            <a:r>
-              <a:t>Beyond Technical Metrics: Inventing Business Indicators</a:t>
-            </a:r>
-          </a:p>
-          <a:p>
-            <a:pPr>
-              <a:spcAft>
-                <a:spcPts val="1200"/>
-              </a:spcAft>
-              <a:defRPr sz="1600">
-                <a:solidFill>
-                  <a:srgbClr val="64748B"/>
-                </a:solidFill>
-                <a:latin typeface="Arial"/>
-              </a:defRPr>
-            </a:pPr>
-            <a:r>
-              <a:t>GPU Idle Cost Penalty (GICP): Quantifies the dollar cost of premium compute capacity running under 15% utilization.</a:t>
-            </a:r>
-          </a:p>
-          <a:p>
-            <a:pPr>
-              <a:spcAft>
-                <a:spcPts val="1200"/>
-              </a:spcAft>
-              <a:defRPr sz="1600">
-                <a:solidFill>
-                  <a:srgbClr val="64748B"/>
-                </a:solidFill>
-                <a:latin typeface="Arial"/>
-              </a:defRPr>
-            </a:pPr>
-            <a:r>
-              <a:t>Model Compute Efficiency Score (MCES): Standardizes model throughput against physical power consumption (Tokens/Wh).</a:t>
-            </a:r>
-          </a:p>
-          <a:p>
-            <a:pPr>
-              <a:spcAft>
-                <a:spcPts val="1200"/>
-              </a:spcAft>
-              <a:defRPr sz="1600">
-                <a:solidFill>
-                  <a:srgbClr val="64748B"/>
-                </a:solidFill>
-                <a:latin typeface="Arial"/>
-              </a:defRPr>
-            </a:pPr>
-            <a:r>
-              <a:t>SLA Violation Exposure Index (SLA-VEI): Measures SLA latency breaches weighted non-linearly by overshoot severity.</a:t>
-            </a:r>
-          </a:p>
-          <a:p>
-            <a:pPr>
-              <a:spcAft>
-                <a:spcPts val="1200"/>
-              </a:spcAft>
-              <a:defRPr sz="1600">
-                <a:solidFill>
-                  <a:srgbClr val="64748B"/>
-                </a:solidFill>
-                <a:latin typeface="Arial"/>
-              </a:defRPr>
-            </a:pPr>
-            <a:r>
-              <a:t>Carbon Offset ROI (COROI): Measures the dollar savings generated per kilogram of reduced carbon emissions.</a:t>
+              <a:t>Database Design &amp; Schema</a:t>
+            </a:r>
+          </a:p>
+        </p:txBody>
+      </p:sp>
+      <p:sp>
+        <p:nvSpPr>
+          <p:cNvPr id="3" name="TextBox 2"/>
+          <p:cNvSpPr txBox="1"/>
+          <p:nvPr/>
+        </p:nvSpPr>
+        <p:spPr>
+          <a:xfrm>
+            <a:off x="457200" y="1371600"/>
+            <a:ext cx="8229600" cy="4572000"/>
+          </a:xfrm>
+          <a:prstGeom prst="rect">
+            <a:avLst/>
+          </a:prstGeom>
+          <a:noFill/>
+        </p:spPr>
+        <p:txBody>
+          <a:bodyPr wrap="square" lIns="0" tIns="0" rIns="0" bIns="0">
+            <a:spAutoFit/>
+          </a:bodyPr>
+          <a:lstStyle/>
+          <a:p>
+            <a:pPr>
+              <a:spcAft>
+                <a:spcPts val="1400"/>
+              </a:spcAft>
+            </a:pPr>
+            <a:r>
+              <a:rPr sz="1800" b="1">
+                <a:solidFill>
+                  <a:srgbClr val="FAFAFA"/>
+                </a:solidFill>
+                <a:latin typeface="Arial"/>
+              </a:rPr>
+              <a:t>gpu_cluster_nodes:</a:t>
+            </a:r>
+            <a:r>
+              <a:rPr sz="1800">
+                <a:solidFill>
+                  <a:srgbClr val="A1A1AA"/>
+                </a:solidFill>
+                <a:latin typeface="Arial"/>
+              </a:rPr>
+              <a:t> Node-level registry tracking provider (AWS/GCP/On-Prem), region, instance type, hourly cost, and grid carbon intensity.</a:t>
+            </a:r>
+          </a:p>
+          <a:p>
+            <a:pPr>
+              <a:spcAft>
+                <a:spcPts val="1400"/>
+              </a:spcAft>
+            </a:pPr>
+            <a:r>
+              <a:rPr sz="1800" b="1">
+                <a:solidFill>
+                  <a:srgbClr val="FAFAFA"/>
+                </a:solidFill>
+                <a:latin typeface="Arial"/>
+              </a:rPr>
+              <a:t>model_deployments:</a:t>
+            </a:r>
+            <a:r>
+              <a:rPr sz="1800">
+                <a:solidFill>
+                  <a:srgbClr val="A1A1AA"/>
+                </a:solidFill>
+                <a:latin typeface="Arial"/>
+              </a:rPr>
+              <a:t> Active serving configurations mapping allocated GPUs, latency SLAs, and target TPS thresholds.</a:t>
+            </a:r>
+          </a:p>
+          <a:p>
+            <a:pPr>
+              <a:spcAft>
+                <a:spcPts val="1400"/>
+              </a:spcAft>
+            </a:pPr>
+            <a:r>
+              <a:rPr sz="1800" b="1">
+                <a:solidFill>
+                  <a:srgbClr val="FAFAFA"/>
+                </a:solidFill>
+                <a:latin typeface="Arial"/>
+              </a:rPr>
+              <a:t>gpu_utilization_logs:</a:t>
+            </a:r>
+            <a:r>
+              <a:rPr sz="1800">
+                <a:solidFill>
+                  <a:srgbClr val="A1A1AA"/>
+                </a:solidFill>
+                <a:latin typeface="Arial"/>
+              </a:rPr>
+              <a:t> Telemetry logging hourly average GPU loads and actual power draw in Watts.</a:t>
+            </a:r>
+          </a:p>
+          <a:p>
+            <a:pPr>
+              <a:spcAft>
+                <a:spcPts val="1400"/>
+              </a:spcAft>
+            </a:pPr>
+            <a:r>
+              <a:rPr sz="1800" b="1">
+                <a:solidFill>
+                  <a:srgbClr val="FAFAFA"/>
+                </a:solidFill>
+                <a:latin typeface="Arial"/>
+              </a:rPr>
+              <a:t>carbon_emissions_logs:</a:t>
+            </a:r>
+            <a:r>
+              <a:rPr sz="1800">
+                <a:solidFill>
+                  <a:srgbClr val="A1A1AA"/>
+                </a:solidFill>
+                <a:latin typeface="Arial"/>
+              </a:rPr>
+              <a:t> Correlating power draws to regional grid intensity to log emissions hourly.</a:t>
+            </a:r>
+          </a:p>
+          <a:p>
+            <a:pPr>
+              <a:spcAft>
+                <a:spcPts val="1400"/>
+              </a:spcAft>
+            </a:pPr>
+            <a:r>
+              <a:rPr sz="1800" b="1">
+                <a:solidFill>
+                  <a:srgbClr val="FAFAFA"/>
+                </a:solidFill>
+                <a:latin typeface="Arial"/>
+              </a:rPr>
+              <a:t>inference_request_logs:</a:t>
+            </a:r>
+            <a:r>
+              <a:rPr sz="1800">
+                <a:solidFill>
+                  <a:srgbClr val="A1A1AA"/>
+                </a:solidFill>
+                <a:latin typeface="Arial"/>
+              </a:rPr>
+              <a:t> Transaction logging query parameters, token numbers, latency, and SLA violation status.</a:t>
             </a:r>
           </a:p>
         </p:txBody>
@@ -5406,6 +7348,14 @@
 <file path=ppt/slides/slide8.xml><?xml version="1.0" encoding="utf-8"?>
 <p:sld xmlns:a="http://schemas.openxmlformats.org/drawingml/2006/main" xmlns:p="http://schemas.openxmlformats.org/presentationml/2006/main" xmlns:r="http://schemas.openxmlformats.org/officeDocument/2006/relationships">
   <p:cSld>
+    <p:bg>
+      <p:bgPr>
+        <a:solidFill>
+          <a:srgbClr val="0C0C0F"/>
+        </a:solidFill>
+        <a:effectLst/>
+      </p:bgPr>
+    </p:bg>
     <p:spTree>
       <p:nvGrpSpPr>
         <p:cNvPr id="1" name=""/>
@@ -5415,125 +7365,159 @@
       <p:grpSpPr/>
       <p:sp>
         <p:nvSpPr>
-          <p:cNvPr id="2" name="Title 1"/>
-          <p:cNvSpPr>
-            <a:spLocks noGrp="1"/>
-          </p:cNvSpPr>
-          <p:nvPr>
-            <p:ph type="title"/>
-          </p:nvPr>
-        </p:nvSpPr>
-        <p:spPr/>
-        <p:txBody>
-          <a:bodyPr/>
+          <p:cNvPr id="2" name="TextBox 1"/>
+          <p:cNvSpPr txBox="1"/>
+          <p:nvPr/>
+        </p:nvSpPr>
+        <p:spPr>
+          <a:xfrm>
+            <a:off x="457200" y="365760"/>
+            <a:ext cx="8229600" cy="731520"/>
+          </a:xfrm>
+          <a:prstGeom prst="rect">
+            <a:avLst/>
+          </a:prstGeom>
+          <a:noFill/>
+        </p:spPr>
+        <p:txBody>
+          <a:bodyPr wrap="square" lIns="0" tIns="0" rIns="0" bIns="0">
+            <a:spAutoFit/>
+          </a:bodyPr>
           <a:lstStyle/>
           <a:p>
             <a:pPr>
               <a:defRPr sz="3600" b="1">
                 <a:solidFill>
-                  <a:srgbClr val="0F172A"/>
+                  <a:srgbClr val="3B82F6"/>
                 </a:solidFill>
                 <a:latin typeface="Arial"/>
               </a:defRPr>
             </a:pPr>
             <a:r>
-              <a:t>Trend &amp; Cohort Analytics</a:t>
-            </a:r>
-          </a:p>
-        </p:txBody>
-      </p:sp>
-      <p:sp>
-        <p:nvSpPr>
-          <p:cNvPr id="3" name="Content Placeholder 2"/>
-          <p:cNvSpPr>
-            <a:spLocks noGrp="1"/>
-          </p:cNvSpPr>
-          <p:nvPr>
-            <p:ph idx="1"/>
-          </p:nvPr>
-        </p:nvSpPr>
-        <p:spPr/>
-        <p:txBody>
-          <a:bodyPr/>
-          <a:lstStyle/>
-          <a:p>
-            <a:pPr>
-              <a:spcAft>
-                <a:spcPts val="2400"/>
-              </a:spcAft>
-              <a:defRPr sz="2000" i="1">
-                <a:solidFill>
-                  <a:srgbClr val="6366F1"/>
-                </a:solidFill>
-                <a:latin typeface="Arial"/>
-              </a:defRPr>
-            </a:pPr>
-            <a:r>
-              <a:t>Long-Term Cluster Telemetry Optimization</a:t>
-            </a:r>
-          </a:p>
-          <a:p>
-            <a:pPr>
-              <a:spcAft>
-                <a:spcPts val="1200"/>
-              </a:spcAft>
-              <a:defRPr sz="1600">
-                <a:solidFill>
-                  <a:srgbClr val="64748B"/>
-                </a:solidFill>
-                <a:latin typeface="Arial"/>
-              </a:defRPr>
-            </a:pPr>
-            <a:r>
-              <a:t>Multi-Range Filters: Supports 7-day, 30-day, and custom timeline aggregation windows.</a:t>
-            </a:r>
-          </a:p>
-          <a:p>
-            <a:pPr>
-              <a:spcAft>
-                <a:spcPts val="1200"/>
-              </a:spcAft>
-              <a:defRPr sz="1600">
-                <a:solidFill>
-                  <a:srgbClr val="64748B"/>
-                </a:solidFill>
-                <a:latin typeface="Arial"/>
-              </a:defRPr>
-            </a:pPr>
-            <a:r>
-              <a:t>Diurnal Demand Profiles: Identifies node demand spikes (e.g. peak hours between 9 AM and 6 PM) to plan scheduling.</a:t>
-            </a:r>
-          </a:p>
-          <a:p>
-            <a:pPr>
-              <a:spcAft>
-                <a:spcPts val="1200"/>
-              </a:spcAft>
-              <a:defRPr sz="1600">
-                <a:solidFill>
-                  <a:srgbClr val="64748B"/>
-                </a:solidFill>
-                <a:latin typeface="Arial"/>
-              </a:defRPr>
-            </a:pPr>
-            <a:r>
-              <a:t>Cohort Analysis: Compares model execution profiles to pinpoint underperforming instances and high-risk clusters.</a:t>
-            </a:r>
-          </a:p>
-          <a:p>
-            <a:pPr>
-              <a:spcAft>
-                <a:spcPts val="1200"/>
-              </a:spcAft>
-              <a:defRPr sz="1600">
-                <a:solidFill>
-                  <a:srgbClr val="64748B"/>
-                </a:solidFill>
-                <a:latin typeface="Arial"/>
-              </a:defRPr>
-            </a:pPr>
-            <a:r>
-              <a:t>Green Savings Tracking: Measures GICP improvements and emission reductions before and after optimizations.</a:t>
+              <a:t>Technology Stack</a:t>
+            </a:r>
+          </a:p>
+        </p:txBody>
+      </p:sp>
+      <p:sp>
+        <p:nvSpPr>
+          <p:cNvPr id="3" name="TextBox 2"/>
+          <p:cNvSpPr txBox="1"/>
+          <p:nvPr/>
+        </p:nvSpPr>
+        <p:spPr>
+          <a:xfrm>
+            <a:off x="457200" y="1371600"/>
+            <a:ext cx="8229600" cy="4572000"/>
+          </a:xfrm>
+          <a:prstGeom prst="rect">
+            <a:avLst/>
+          </a:prstGeom>
+          <a:noFill/>
+        </p:spPr>
+        <p:txBody>
+          <a:bodyPr wrap="square" lIns="0" tIns="0" rIns="0" bIns="0">
+            <a:spAutoFit/>
+          </a:bodyPr>
+          <a:lstStyle/>
+          <a:p>
+            <a:pPr>
+              <a:spcAft>
+                <a:spcPts val="1400"/>
+              </a:spcAft>
+            </a:pPr>
+            <a:r>
+              <a:rPr sz="1800" b="1">
+                <a:solidFill>
+                  <a:srgbClr val="FAFAFA"/>
+                </a:solidFill>
+                <a:latin typeface="Arial"/>
+              </a:rPr>
+              <a:t>Frontend:</a:t>
+            </a:r>
+            <a:r>
+              <a:rPr sz="1800">
+                <a:solidFill>
+                  <a:srgbClr val="A1A1AA"/>
+                </a:solidFill>
+                <a:latin typeface="Arial"/>
+              </a:rPr>
+              <a:t> React 18, TypeScript, Vite, ECharts-for-React, Lucide icons, and custom CSS.</a:t>
+            </a:r>
+          </a:p>
+          <a:p>
+            <a:pPr>
+              <a:spcAft>
+                <a:spcPts val="1400"/>
+              </a:spcAft>
+            </a:pPr>
+            <a:r>
+              <a:rPr sz="1800" b="1">
+                <a:solidFill>
+                  <a:srgbClr val="FAFAFA"/>
+                </a:solidFill>
+                <a:latin typeface="Arial"/>
+              </a:rPr>
+              <a:t>Backend:</a:t>
+            </a:r>
+            <a:r>
+              <a:rPr sz="1800">
+                <a:solidFill>
+                  <a:srgbClr val="A1A1AA"/>
+                </a:solidFill>
+                <a:latin typeface="Arial"/>
+              </a:rPr>
+              <a:t> Python 3.11+, FastAPI, Uvicorn, SQLAlchemy, PyJWT, Cryptography, and NumPy.</a:t>
+            </a:r>
+          </a:p>
+          <a:p>
+            <a:pPr>
+              <a:spcAft>
+                <a:spcPts val="1400"/>
+              </a:spcAft>
+            </a:pPr>
+            <a:r>
+              <a:rPr sz="1800" b="1">
+                <a:solidFill>
+                  <a:srgbClr val="FAFAFA"/>
+                </a:solidFill>
+                <a:latin typeface="Arial"/>
+              </a:rPr>
+              <a:t>Database:</a:t>
+            </a:r>
+            <a:r>
+              <a:rPr sz="1800">
+                <a:solidFill>
+                  <a:srgbClr val="A1A1AA"/>
+                </a:solidFill>
+                <a:latin typeface="Arial"/>
+              </a:rPr>
+              <a:t> MySQL (Local/Production), SQLite (Testing), PyMySQL, and PostgreSQL support.</a:t>
+            </a:r>
+          </a:p>
+          <a:p>
+            <a:pPr>
+              <a:spcAft>
+                <a:spcPts val="1400"/>
+              </a:spcAft>
+            </a:pPr>
+            <a:r>
+              <a:rPr sz="1800" b="1">
+                <a:solidFill>
+                  <a:srgbClr val="FAFAFA"/>
+                </a:solidFill>
+                <a:latin typeface="Arial"/>
+              </a:rPr>
+              <a:t>Deployment &amp; DevOps:</a:t>
+            </a:r>
+            <a:r>
+              <a:rPr sz="1800">
+                <a:solidFill>
+                  <a:srgbClr val="A1A1AA"/>
+                </a:solidFill>
+                <a:latin typeface="Arial"/>
+              </a:rPr>
+              <a:t> Docker, Docker Compose, Git repository source control, and Vercel hosting integration.</a:t>
             </a:r>
           </a:p>
         </p:txBody>
@@ -5549,6 +7533,14 @@
 <file path=ppt/slides/slide9.xml><?xml version="1.0" encoding="utf-8"?>
 <p:sld xmlns:a="http://schemas.openxmlformats.org/drawingml/2006/main" xmlns:p="http://schemas.openxmlformats.org/presentationml/2006/main" xmlns:r="http://schemas.openxmlformats.org/officeDocument/2006/relationships">
   <p:cSld>
+    <p:bg>
+      <p:bgPr>
+        <a:solidFill>
+          <a:srgbClr val="0C0C0F"/>
+        </a:solidFill>
+        <a:effectLst/>
+      </p:bgPr>
+    </p:bg>
     <p:spTree>
       <p:nvGrpSpPr>
         <p:cNvPr id="1" name=""/>
@@ -5558,125 +7550,159 @@
       <p:grpSpPr/>
       <p:sp>
         <p:nvSpPr>
-          <p:cNvPr id="2" name="Title 1"/>
-          <p:cNvSpPr>
-            <a:spLocks noGrp="1"/>
-          </p:cNvSpPr>
-          <p:nvPr>
-            <p:ph type="title"/>
-          </p:nvPr>
-        </p:nvSpPr>
-        <p:spPr/>
-        <p:txBody>
-          <a:bodyPr/>
+          <p:cNvPr id="2" name="TextBox 1"/>
+          <p:cNvSpPr txBox="1"/>
+          <p:nvPr/>
+        </p:nvSpPr>
+        <p:spPr>
+          <a:xfrm>
+            <a:off x="457200" y="365760"/>
+            <a:ext cx="8229600" cy="731520"/>
+          </a:xfrm>
+          <a:prstGeom prst="rect">
+            <a:avLst/>
+          </a:prstGeom>
+          <a:noFill/>
+        </p:spPr>
+        <p:txBody>
+          <a:bodyPr wrap="square" lIns="0" tIns="0" rIns="0" bIns="0">
+            <a:spAutoFit/>
+          </a:bodyPr>
           <a:lstStyle/>
           <a:p>
             <a:pPr>
               <a:defRPr sz="3600" b="1">
                 <a:solidFill>
-                  <a:srgbClr val="0F172A"/>
+                  <a:srgbClr val="3B82F6"/>
                 </a:solidFill>
                 <a:latin typeface="Arial"/>
               </a:defRPr>
             </a:pPr>
             <a:r>
-              <a:t>Anomaly Detection System</a:t>
-            </a:r>
-          </a:p>
-        </p:txBody>
-      </p:sp>
-      <p:sp>
-        <p:nvSpPr>
-          <p:cNvPr id="3" name="Content Placeholder 2"/>
-          <p:cNvSpPr>
-            <a:spLocks noGrp="1"/>
-          </p:cNvSpPr>
-          <p:nvPr>
-            <p:ph idx="1"/>
-          </p:nvPr>
-        </p:nvSpPr>
-        <p:spPr/>
-        <p:txBody>
-          <a:bodyPr/>
-          <a:lstStyle/>
-          <a:p>
-            <a:pPr>
-              <a:spcAft>
-                <a:spcPts val="2400"/>
-              </a:spcAft>
-              <a:defRPr sz="2000" i="1">
-                <a:solidFill>
-                  <a:srgbClr val="6366F1"/>
-                </a:solidFill>
-                <a:latin typeface="Arial"/>
-              </a:defRPr>
-            </a:pPr>
-            <a:r>
-              <a:t>Z-Score Statistical Outlier Analysis</a:t>
-            </a:r>
-          </a:p>
-          <a:p>
-            <a:pPr>
-              <a:spcAft>
-                <a:spcPts val="1200"/>
-              </a:spcAft>
-              <a:defRPr sz="1600">
-                <a:solidFill>
-                  <a:srgbClr val="64748B"/>
-                </a:solidFill>
-                <a:latin typeface="Arial"/>
-              </a:defRPr>
-            </a:pPr>
-            <a:r>
-              <a:t>Dynamic Baselines: Avoids static thresholds by computing mean and standard deviation over active sliding windows.</a:t>
-            </a:r>
-          </a:p>
-          <a:p>
-            <a:pPr>
-              <a:spcAft>
-                <a:spcPts val="1200"/>
-              </a:spcAft>
-              <a:defRPr sz="1600">
-                <a:solidFill>
-                  <a:srgbClr val="64748B"/>
-                </a:solidFill>
-                <a:latin typeface="Arial"/>
-              </a:defRPr>
-            </a:pPr>
-            <a:r>
-              <a:t>Z-Score Audits: Identifies latency spikes and power draws exceeding a Z-score of 2.2.</a:t>
-            </a:r>
-          </a:p>
-          <a:p>
-            <a:pPr>
-              <a:spcAft>
-                <a:spcPts val="1200"/>
-              </a:spcAft>
-              <a:defRPr sz="1600">
-                <a:solidFill>
-                  <a:srgbClr val="64748B"/>
-                </a:solidFill>
-                <a:latin typeface="Arial"/>
-              </a:defRPr>
-            </a:pPr>
-            <a:r>
-              <a:t>Waste Alerts: Automatically flags nodes operating under 10% average load for a sustained period of 12+ hours.</a:t>
-            </a:r>
-          </a:p>
-          <a:p>
-            <a:pPr>
-              <a:spcAft>
-                <a:spcPts val="1200"/>
-              </a:spcAft>
-              <a:defRPr sz="1600">
-                <a:solidFill>
-                  <a:srgbClr val="64748B"/>
-                </a:solidFill>
-                <a:latin typeface="Arial"/>
-              </a:defRPr>
-            </a:pPr>
-            <a:r>
-              <a:t>Root-Cause Explanations: Pairs alerts with technical root causes and recommendations (e.g. rerouting traffic).</a:t>
+              <a:t>Innovative KPI Framework</a:t>
+            </a:r>
+          </a:p>
+        </p:txBody>
+      </p:sp>
+      <p:sp>
+        <p:nvSpPr>
+          <p:cNvPr id="3" name="TextBox 2"/>
+          <p:cNvSpPr txBox="1"/>
+          <p:nvPr/>
+        </p:nvSpPr>
+        <p:spPr>
+          <a:xfrm>
+            <a:off x="457200" y="1371600"/>
+            <a:ext cx="8229600" cy="4572000"/>
+          </a:xfrm>
+          <a:prstGeom prst="rect">
+            <a:avLst/>
+          </a:prstGeom>
+          <a:noFill/>
+        </p:spPr>
+        <p:txBody>
+          <a:bodyPr wrap="square" lIns="0" tIns="0" rIns="0" bIns="0">
+            <a:spAutoFit/>
+          </a:bodyPr>
+          <a:lstStyle/>
+          <a:p>
+            <a:pPr>
+              <a:spcAft>
+                <a:spcPts val="1400"/>
+              </a:spcAft>
+            </a:pPr>
+            <a:r>
+              <a:rPr sz="1800" b="1">
+                <a:solidFill>
+                  <a:srgbClr val="FAFAFA"/>
+                </a:solidFill>
+                <a:latin typeface="Arial"/>
+              </a:rPr>
+              <a:t>GPU Idle Cost Penalty (GICP):</a:t>
+            </a:r>
+            <a:r>
+              <a:rPr sz="1800">
+                <a:solidFill>
+                  <a:srgbClr val="A1A1AA"/>
+                </a:solidFill>
+                <a:latin typeface="Arial"/>
+              </a:rPr>
+              <a:t> Translates technical load metrics into dollar waste assessments.</a:t>
+            </a:r>
+          </a:p>
+          <a:p>
+            <a:pPr>
+              <a:spcAft>
+                <a:spcPts val="1400"/>
+              </a:spcAft>
+            </a:pPr>
+            <a:r>
+              <a:rPr sz="1800" b="1">
+                <a:solidFill>
+                  <a:srgbClr val="FAFAFA"/>
+                </a:solidFill>
+                <a:latin typeface="Arial"/>
+              </a:rPr>
+              <a:t>Model Compute Efficiency Score (MCES):</a:t>
+            </a:r>
+            <a:r>
+              <a:rPr sz="1800">
+                <a:solidFill>
+                  <a:srgbClr val="A1A1AA"/>
+                </a:solidFill>
+                <a:latin typeface="Arial"/>
+              </a:rPr>
+              <a:t> Tracks token output density relative to physical energy consumption.</a:t>
+            </a:r>
+          </a:p>
+          <a:p>
+            <a:pPr>
+              <a:spcAft>
+                <a:spcPts val="1400"/>
+              </a:spcAft>
+            </a:pPr>
+            <a:r>
+              <a:rPr sz="1800" b="1">
+                <a:solidFill>
+                  <a:srgbClr val="FAFAFA"/>
+                </a:solidFill>
+                <a:latin typeface="Arial"/>
+              </a:rPr>
+              <a:t>SLA Violation Exposure Index (SLA-VEI):</a:t>
+            </a:r>
+            <a:r>
+              <a:rPr sz="1800">
+                <a:solidFill>
+                  <a:srgbClr val="A1A1AA"/>
+                </a:solidFill>
+                <a:latin typeface="Arial"/>
+              </a:rPr>
+              <a:t> Measures user latency breaches, weighting extreme delays non-linearly.</a:t>
+            </a:r>
+          </a:p>
+          <a:p>
+            <a:pPr>
+              <a:spcAft>
+                <a:spcPts val="1400"/>
+              </a:spcAft>
+            </a:pPr>
+            <a:r>
+              <a:rPr sz="1800" b="1">
+                <a:solidFill>
+                  <a:srgbClr val="FAFAFA"/>
+                </a:solidFill>
+                <a:latin typeface="Arial"/>
+              </a:rPr>
+              <a:t>Carbon Offset ROI (COROI):</a:t>
+            </a:r>
+            <a:r>
+              <a:rPr sz="1800">
+                <a:solidFill>
+                  <a:srgbClr val="A1A1AA"/>
+                </a:solidFill>
+                <a:latin typeface="Arial"/>
+              </a:rPr>
+              <a:t> Correlates financial savings of regional rerouting actions against offset expenses.</a:t>
             </a:r>
           </a:p>
         </p:txBody>

--- a/aetherfin_presentation.pptx
+++ b/aetherfin_presentation.pptx
@@ -4002,8 +4002,8 @@
         </p:nvSpPr>
         <p:spPr>
           <a:xfrm>
-            <a:off x="457200" y="1371600"/>
-            <a:ext cx="8229600" cy="4572000"/>
+            <a:off x="457200" y="1280160"/>
+            <a:ext cx="4114800" cy="3474720"/>
           </a:xfrm>
           <a:prstGeom prst="rect">
             <a:avLst/>
@@ -4018,105 +4018,129 @@
           <a:p>
             <a:pPr>
               <a:spcAft>
-                <a:spcPts val="1400"/>
-              </a:spcAft>
-            </a:pPr>
-            <a:r>
-              <a:rPr sz="1800" b="1">
-                <a:solidFill>
-                  <a:srgbClr val="FAFAFA"/>
-                </a:solidFill>
-                <a:latin typeface="Arial"/>
-              </a:rPr>
-              <a:t>Dashboard Interface (sizing.png):</a:t>
-            </a:r>
-            <a:r>
-              <a:rPr sz="1800">
-                <a:solidFill>
-                  <a:srgbClr val="A1A1AA"/>
-                </a:solidFill>
-                <a:latin typeface="Arial"/>
-              </a:rPr>
-              <a:t> KPI overview widgets, active node grid, and 48-hour utilization timelines.</a:t>
-            </a:r>
-          </a:p>
-          <a:p>
-            <a:pPr>
-              <a:spcAft>
-                <a:spcPts val="1400"/>
-              </a:spcAft>
-            </a:pPr>
-            <a:r>
-              <a:rPr sz="1800" b="1">
-                <a:solidFill>
-                  <a:srgbClr val="FAFAFA"/>
-                </a:solidFill>
-                <a:latin typeface="Arial"/>
-              </a:rPr>
-              <a:t>Outlier Analytics (anomalies.png):</a:t>
-            </a:r>
-            <a:r>
-              <a:rPr sz="1800">
-                <a:solidFill>
-                  <a:srgbClr val="A1A1AA"/>
-                </a:solidFill>
-                <a:latin typeface="Arial"/>
-              </a:rPr>
-              <a:t> Z-score outlier graphs detailing historical server spikes.</a:t>
-            </a:r>
-          </a:p>
-          <a:p>
-            <a:pPr>
-              <a:spcAft>
-                <a:spcPts val="1400"/>
-              </a:spcAft>
-            </a:pPr>
-            <a:r>
-              <a:rPr sz="1800" b="1">
-                <a:solidFill>
-                  <a:srgbClr val="FAFAFA"/>
-                </a:solidFill>
-                <a:latin typeface="Arial"/>
-              </a:rPr>
-              <a:t>KPI Drilldowns (drilldown.png):</a:t>
-            </a:r>
-            <a:r>
-              <a:rPr sz="1800">
-                <a:solidFill>
-                  <a:srgbClr val="A1A1AA"/>
-                </a:solidFill>
-                <a:latin typeface="Arial"/>
-              </a:rPr>
-              <a:t> Sliding sidebar panels displaying node-level cost allocations.</a:t>
-            </a:r>
-          </a:p>
-          <a:p>
-            <a:pPr>
-              <a:spcAft>
-                <a:spcPts val="1400"/>
-              </a:spcAft>
-            </a:pPr>
-            <a:r>
-              <a:rPr sz="1800" b="1">
-                <a:solidFill>
-                  <a:srgbClr val="FAFAFA"/>
-                </a:solidFill>
-                <a:latin typeface="Arial"/>
-              </a:rPr>
-              <a:t>Security &amp; Auditing Portal (admin_logs.png):</a:t>
-            </a:r>
-            <a:r>
-              <a:rPr sz="1800">
-                <a:solidFill>
-                  <a:srgbClr val="A1A1AA"/>
-                </a:solidFill>
-                <a:latin typeface="Arial"/>
-              </a:rPr>
-              <a:t> Immutable transaction log tables displaying JWT user activity.</a:t>
-            </a:r>
-          </a:p>
-        </p:txBody>
-      </p:sp>
+                <a:spcPts val="1000"/>
+              </a:spcAft>
+            </a:pPr>
+            <a:r>
+              <a:rPr sz="1300" b="1">
+                <a:solidFill>
+                  <a:srgbClr val="FAFAFA"/>
+                </a:solidFill>
+                <a:latin typeface="Arial"/>
+              </a:rPr>
+              <a:t>Dashboard (sizing.png):</a:t>
+            </a:r>
+            <a:r>
+              <a:rPr sz="1300">
+                <a:solidFill>
+                  <a:srgbClr val="A1A1AA"/>
+                </a:solidFill>
+                <a:latin typeface="Arial"/>
+              </a:rPr>
+              <a:t> Features the high-level KPI overview panels showing spend and carbon footprint details.</a:t>
+            </a:r>
+          </a:p>
+          <a:p>
+            <a:pPr>
+              <a:spcAft>
+                <a:spcPts val="1000"/>
+              </a:spcAft>
+            </a:pPr>
+            <a:r>
+              <a:rPr sz="1300" b="1">
+                <a:solidFill>
+                  <a:srgbClr val="FAFAFA"/>
+                </a:solidFill>
+                <a:latin typeface="Arial"/>
+              </a:rPr>
+              <a:t>Compute Activity:</a:t>
+            </a:r>
+            <a:r>
+              <a:rPr sz="1300">
+                <a:solidFill>
+                  <a:srgbClr val="A1A1AA"/>
+                </a:solidFill>
+                <a:latin typeface="Arial"/>
+              </a:rPr>
+              <a:t> Renders the active 48-hour timeline detailing node utilization and load fluctuations.</a:t>
+            </a:r>
+          </a:p>
+          <a:p>
+            <a:pPr>
+              <a:spcAft>
+                <a:spcPts val="1000"/>
+              </a:spcAft>
+            </a:pPr>
+            <a:r>
+              <a:rPr sz="1300" b="1">
+                <a:solidFill>
+                  <a:srgbClr val="FAFAFA"/>
+                </a:solidFill>
+                <a:latin typeface="Arial"/>
+              </a:rPr>
+              <a:t>Node Inventory:</a:t>
+            </a:r>
+            <a:r>
+              <a:rPr sz="1300">
+                <a:solidFill>
+                  <a:srgbClr val="A1A1AA"/>
+                </a:solidFill>
+                <a:latin typeface="Arial"/>
+              </a:rPr>
+              <a:t> Renders active database logs of multi-cloud allocations.</a:t>
+            </a:r>
+          </a:p>
+          <a:p>
+            <a:pPr>
+              <a:spcAft>
+                <a:spcPts val="1000"/>
+              </a:spcAft>
+            </a:pPr>
+            <a:r>
+              <a:rPr sz="1300" b="1">
+                <a:solidFill>
+                  <a:srgbClr val="FAFAFA"/>
+                </a:solidFill>
+                <a:latin typeface="Arial"/>
+              </a:rPr>
+              <a:t>One-Click Exports:</a:t>
+            </a:r>
+            <a:r>
+              <a:rPr sz="1300">
+                <a:solidFill>
+                  <a:srgbClr val="A1A1AA"/>
+                </a:solidFill>
+                <a:latin typeface="Arial"/>
+              </a:rPr>
+              <a:t> Stream summaries and audit trails directly to CSV or formatted text reports.</a:t>
+            </a:r>
+          </a:p>
+        </p:txBody>
+      </p:sp>
+      <p:pic>
+        <p:nvPicPr>
+          <p:cNvPr id="4" name="Picture 3" descr="sizing.png"/>
+          <p:cNvPicPr>
+            <a:picLocks noChangeAspect="1"/>
+          </p:cNvPicPr>
+          <p:nvPr/>
+        </p:nvPicPr>
+        <p:blipFill>
+          <a:blip r:embed="rId2"/>
+          <a:stretch>
+            <a:fillRect/>
+          </a:stretch>
+        </p:blipFill>
+        <p:spPr>
+          <a:xfrm>
+            <a:off x="4754880" y="1280160"/>
+            <a:ext cx="3931920" cy="2232184"/>
+          </a:xfrm>
+          <a:prstGeom prst="rect">
+            <a:avLst/>
+          </a:prstGeom>
+        </p:spPr>
+      </p:pic>
     </p:spTree>
   </p:cSld>
   <p:clrMapOvr>
@@ -4187,8 +4211,8 @@
         </p:nvSpPr>
         <p:spPr>
           <a:xfrm>
-            <a:off x="457200" y="1371600"/>
-            <a:ext cx="8229600" cy="4572000"/>
+            <a:off x="457200" y="1280160"/>
+            <a:ext cx="4114800" cy="3474720"/>
           </a:xfrm>
           <a:prstGeom prst="rect">
             <a:avLst/>
@@ -4203,11 +4227,61 @@
           <a:p>
             <a:pPr>
               <a:spcAft>
-                <a:spcPts val="1400"/>
-              </a:spcAft>
-            </a:pPr>
-            <a:r>
-              <a:rPr sz="1800" b="1">
+                <a:spcPts val="1000"/>
+              </a:spcAft>
+            </a:pPr>
+            <a:r>
+              <a:rPr sz="1300" b="1">
+                <a:solidFill>
+                  <a:srgbClr val="FAFAFA"/>
+                </a:solidFill>
+                <a:latin typeface="Arial"/>
+              </a:rPr>
+              <a:t>Interactive Sidebar (drilldown.png):</a:t>
+            </a:r>
+            <a:r>
+              <a:rPr sz="1300">
+                <a:solidFill>
+                  <a:srgbClr val="A1A1AA"/>
+                </a:solidFill>
+                <a:latin typeface="Arial"/>
+              </a:rPr>
+              <a:t> Opens node-level financial details dynamically on click.</a:t>
+            </a:r>
+          </a:p>
+          <a:p>
+            <a:pPr>
+              <a:spcAft>
+                <a:spcPts val="1000"/>
+              </a:spcAft>
+            </a:pPr>
+            <a:r>
+              <a:rPr sz="1300" b="1">
+                <a:solidFill>
+                  <a:srgbClr val="FAFAFA"/>
+                </a:solidFill>
+                <a:latin typeface="Arial"/>
+              </a:rPr>
+              <a:t>Visual Sizing Factors:</a:t>
+            </a:r>
+            <a:r>
+              <a:rPr sz="1300">
+                <a:solidFill>
+                  <a:srgbClr val="A1A1AA"/>
+                </a:solidFill>
+                <a:latin typeface="Arial"/>
+              </a:rPr>
+              <a:t> CFOs can drill down to see exact provider and regional billing components.</a:t>
+            </a:r>
+          </a:p>
+          <a:p>
+            <a:pPr>
+              <a:spcAft>
+                <a:spcPts val="1000"/>
+              </a:spcAft>
+            </a:pPr>
+            <a:r>
+              <a:rPr sz="1300" b="1">
                 <a:solidFill>
                   <a:srgbClr val="FAFAFA"/>
                 </a:solidFill>
@@ -4216,7 +4290,7 @@
               <a:t>Multi-Range Filters:</a:t>
             </a:r>
             <a:r>
-              <a:rPr sz="1800">
+              <a:rPr sz="1300">
                 <a:solidFill>
                   <a:srgbClr val="A1A1AA"/>
                 </a:solidFill>
@@ -4228,36 +4302,11 @@
           <a:p>
             <a:pPr>
               <a:spcAft>
-                <a:spcPts val="1400"/>
-              </a:spcAft>
-            </a:pPr>
-            <a:r>
-              <a:rPr sz="1800" b="1">
-                <a:solidFill>
-                  <a:srgbClr val="FAFAFA"/>
-                </a:solidFill>
-                <a:latin typeface="Arial"/>
-              </a:rPr>
-              <a:t>Diurnal Load Profiles:</a:t>
-            </a:r>
-            <a:r>
-              <a:rPr sz="1800">
-                <a:solidFill>
-                  <a:srgbClr val="A1A1AA"/>
-                </a:solidFill>
-                <a:latin typeface="Arial"/>
-              </a:rPr>
-              <a:t> Identifies node demand spikes (peak hours 9 AM - 6 PM) to plan scheduling.</a:t>
-            </a:r>
-          </a:p>
-          <a:p>
-            <a:pPr>
-              <a:spcAft>
-                <a:spcPts val="1400"/>
-              </a:spcAft>
-            </a:pPr>
-            <a:r>
-              <a:rPr sz="1800" b="1">
+                <a:spcPts val="1000"/>
+              </a:spcAft>
+            </a:pPr>
+            <a:r>
+              <a:rPr sz="1300" b="1">
                 <a:solidFill>
                   <a:srgbClr val="FAFAFA"/>
                 </a:solidFill>
@@ -4266,7 +4315,7 @@
               <a:t>Cohort Analysis:</a:t>
             </a:r>
             <a:r>
-              <a:rPr sz="1800">
+              <a:rPr sz="1300">
                 <a:solidFill>
                   <a:srgbClr val="A1A1AA"/>
                 </a:solidFill>
@@ -4275,33 +4324,32 @@
               <a:t> Compares model execution profiles to pinpoint underperforming instances.</a:t>
             </a:r>
           </a:p>
-          <a:p>
-            <a:pPr>
-              <a:spcAft>
-                <a:spcPts val="1400"/>
-              </a:spcAft>
-            </a:pPr>
-            <a:r>
-              <a:rPr sz="1800" b="1">
-                <a:solidFill>
-                  <a:srgbClr val="FAFAFA"/>
-                </a:solidFill>
-                <a:latin typeface="Arial"/>
-              </a:rPr>
-              <a:t>Green Savings Tracking:</a:t>
-            </a:r>
-            <a:r>
-              <a:rPr sz="1800">
-                <a:solidFill>
-                  <a:srgbClr val="A1A1AA"/>
-                </a:solidFill>
-                <a:latin typeface="Arial"/>
-              </a:rPr>
-              <a:t> Measures GICP improvements and emission reductions post-optimization.</a:t>
-            </a:r>
-          </a:p>
-        </p:txBody>
-      </p:sp>
+        </p:txBody>
+      </p:sp>
+      <p:pic>
+        <p:nvPicPr>
+          <p:cNvPr id="4" name="Picture 3" descr="drilldown.png"/>
+          <p:cNvPicPr>
+            <a:picLocks noChangeAspect="1"/>
+          </p:cNvPicPr>
+          <p:nvPr/>
+        </p:nvPicPr>
+        <p:blipFill>
+          <a:blip r:embed="rId2"/>
+          <a:stretch>
+            <a:fillRect/>
+          </a:stretch>
+        </p:blipFill>
+        <p:spPr>
+          <a:xfrm>
+            <a:off x="4754880" y="1280160"/>
+            <a:ext cx="3931920" cy="2232184"/>
+          </a:xfrm>
+          <a:prstGeom prst="rect">
+            <a:avLst/>
+          </a:prstGeom>
+        </p:spPr>
+      </p:pic>
     </p:spTree>
   </p:cSld>
   <p:clrMapOvr>
@@ -4372,8 +4420,8 @@
         </p:nvSpPr>
         <p:spPr>
           <a:xfrm>
-            <a:off x="457200" y="1371600"/>
-            <a:ext cx="8229600" cy="4572000"/>
+            <a:off x="457200" y="1280160"/>
+            <a:ext cx="4114800" cy="3474720"/>
           </a:xfrm>
           <a:prstGeom prst="rect">
             <a:avLst/>
@@ -4388,11 +4436,86 @@
           <a:p>
             <a:pPr>
               <a:spcAft>
-                <a:spcPts val="1400"/>
-              </a:spcAft>
-            </a:pPr>
-            <a:r>
-              <a:rPr sz="1800" b="1">
+                <a:spcPts val="1000"/>
+              </a:spcAft>
+            </a:pPr>
+            <a:r>
+              <a:rPr sz="1300" b="1">
+                <a:solidFill>
+                  <a:srgbClr val="FAFAFA"/>
+                </a:solidFill>
+                <a:latin typeface="Arial"/>
+              </a:rPr>
+              <a:t>Outliers Graph (anomalies.png):</a:t>
+            </a:r>
+            <a:r>
+              <a:rPr sz="1300">
+                <a:solidFill>
+                  <a:srgbClr val="A1A1AA"/>
+                </a:solidFill>
+                <a:latin typeface="Arial"/>
+              </a:rPr>
+              <a:t> Renders Z-score statistical outlier plots tracking latency spikes.</a:t>
+            </a:r>
+          </a:p>
+          <a:p>
+            <a:pPr>
+              <a:spcAft>
+                <a:spcPts val="1000"/>
+              </a:spcAft>
+            </a:pPr>
+            <a:r>
+              <a:rPr sz="1300" b="1">
+                <a:solidFill>
+                  <a:srgbClr val="FAFAFA"/>
+                </a:solidFill>
+                <a:latin typeface="Arial"/>
+              </a:rPr>
+              <a:t>Waste Alerts:</a:t>
+            </a:r>
+            <a:r>
+              <a:rPr sz="1300">
+                <a:solidFill>
+                  <a:srgbClr val="A1A1AA"/>
+                </a:solidFill>
+                <a:latin typeface="Arial"/>
+              </a:rPr>
+              <a:t> Automatically flags nodes operating under 10% average load for 12+ consecutive hours.</a:t>
+            </a:r>
+          </a:p>
+          <a:p>
+            <a:pPr>
+              <a:spcAft>
+                <a:spcPts val="1000"/>
+              </a:spcAft>
+            </a:pPr>
+            <a:r>
+              <a:rPr sz="1300" b="1">
+                <a:solidFill>
+                  <a:srgbClr val="FAFAFA"/>
+                </a:solidFill>
+                <a:latin typeface="Arial"/>
+              </a:rPr>
+              <a:t>Root Cause Diagnostics:</a:t>
+            </a:r>
+            <a:r>
+              <a:rPr sz="1300">
+                <a:solidFill>
+                  <a:srgbClr val="A1A1AA"/>
+                </a:solidFill>
+                <a:latin typeface="Arial"/>
+              </a:rPr>
+              <a:t> Automatically pairs anomalies with technical diagnoses and routing solutions.</a:t>
+            </a:r>
+          </a:p>
+          <a:p>
+            <a:pPr>
+              <a:spcAft>
+                <a:spcPts val="1000"/>
+              </a:spcAft>
+            </a:pPr>
+            <a:r>
+              <a:rPr sz="1300" b="1">
                 <a:solidFill>
                   <a:srgbClr val="FAFAFA"/>
                 </a:solidFill>
@@ -4401,7 +4524,7 @@
               <a:t>Dynamic Baselines:</a:t>
             </a:r>
             <a:r>
-              <a:rPr sz="1800">
+              <a:rPr sz="1300">
                 <a:solidFill>
                   <a:srgbClr val="A1A1AA"/>
                 </a:solidFill>
@@ -4410,83 +4533,32 @@
               <a:t> Avoids static thresholds by computing sliding-window mean and standard deviations.</a:t>
             </a:r>
           </a:p>
-          <a:p>
-            <a:pPr>
-              <a:spcAft>
-                <a:spcPts val="1400"/>
-              </a:spcAft>
-            </a:pPr>
-            <a:r>
-              <a:rPr sz="1800" b="1">
-                <a:solidFill>
-                  <a:srgbClr val="FAFAFA"/>
-                </a:solidFill>
-                <a:latin typeface="Arial"/>
-              </a:rPr>
-              <a:t>Latency Spikes:</a:t>
-            </a:r>
-            <a:r>
-              <a:rPr sz="1800">
-                <a:solidFill>
-                  <a:srgbClr val="A1A1AA"/>
-                </a:solidFill>
-                <a:latin typeface="Arial"/>
-              </a:rPr>
-              <a:t> Flags transactions exceeding a Z-score of 2.2 as high severity spikes.</a:t>
-            </a:r>
-          </a:p>
-          <a:p>
-            <a:pPr>
-              <a:spcAft>
-                <a:spcPts val="1400"/>
-              </a:spcAft>
-            </a:pPr>
-            <a:r>
-              <a:rPr sz="1800" b="1">
-                <a:solidFill>
-                  <a:srgbClr val="FAFAFA"/>
-                </a:solidFill>
-                <a:latin typeface="Arial"/>
-              </a:rPr>
-              <a:t>Idle Waste Warnings:</a:t>
-            </a:r>
-            <a:r>
-              <a:rPr sz="1800">
-                <a:solidFill>
-                  <a:srgbClr val="A1A1AA"/>
-                </a:solidFill>
-                <a:latin typeface="Arial"/>
-              </a:rPr>
-              <a:t> Triggers alerts for nodes running under 10% average load for 12+ consecutive hours.</a:t>
-            </a:r>
-          </a:p>
-          <a:p>
-            <a:pPr>
-              <a:spcAft>
-                <a:spcPts val="1400"/>
-              </a:spcAft>
-            </a:pPr>
-            <a:r>
-              <a:rPr sz="1800" b="1">
-                <a:solidFill>
-                  <a:srgbClr val="FAFAFA"/>
-                </a:solidFill>
-                <a:latin typeface="Arial"/>
-              </a:rPr>
-              <a:t>Root Cause Diagnostics:</a:t>
-            </a:r>
-            <a:r>
-              <a:rPr sz="1800">
-                <a:solidFill>
-                  <a:srgbClr val="A1A1AA"/>
-                </a:solidFill>
-                <a:latin typeface="Arial"/>
-              </a:rPr>
-              <a:t> Automatically pairs anomalies with technical diagnoses and routing solutions.</a:t>
-            </a:r>
-          </a:p>
-        </p:txBody>
-      </p:sp>
+        </p:txBody>
+      </p:sp>
+      <p:pic>
+        <p:nvPicPr>
+          <p:cNvPr id="4" name="Picture 3" descr="anomalies.png"/>
+          <p:cNvPicPr>
+            <a:picLocks noChangeAspect="1"/>
+          </p:cNvPicPr>
+          <p:nvPr/>
+        </p:nvPicPr>
+        <p:blipFill>
+          <a:blip r:embed="rId2"/>
+          <a:stretch>
+            <a:fillRect/>
+          </a:stretch>
+        </p:blipFill>
+        <p:spPr>
+          <a:xfrm>
+            <a:off x="4754880" y="1280160"/>
+            <a:ext cx="3931920" cy="2232184"/>
+          </a:xfrm>
+          <a:prstGeom prst="rect">
+            <a:avLst/>
+          </a:prstGeom>
+        </p:spPr>
+      </p:pic>
     </p:spTree>
   </p:cSld>
   <p:clrMapOvr>
@@ -4557,8 +4629,8 @@
         </p:nvSpPr>
         <p:spPr>
           <a:xfrm>
-            <a:off x="457200" y="1371600"/>
-            <a:ext cx="8229600" cy="4572000"/>
+            <a:off x="457200" y="1280160"/>
+            <a:ext cx="4114800" cy="3474720"/>
           </a:xfrm>
           <a:prstGeom prst="rect">
             <a:avLst/>
@@ -4573,105 +4645,129 @@
           <a:p>
             <a:pPr>
               <a:spcAft>
-                <a:spcPts val="1400"/>
-              </a:spcAft>
-            </a:pPr>
-            <a:r>
-              <a:rPr sz="1800" b="1">
-                <a:solidFill>
-                  <a:srgbClr val="FAFAFA"/>
-                </a:solidFill>
-                <a:latin typeface="Arial"/>
-              </a:rPr>
-              <a:t>Context Integration:</a:t>
-            </a:r>
-            <a:r>
-              <a:rPr sz="1800">
-                <a:solidFill>
-                  <a:srgbClr val="A1A1AA"/>
-                </a:solidFill>
-                <a:latin typeface="Arial"/>
-              </a:rPr>
-              <a:t> Feeds active cluster costs, idle penalties, and carbon metrics directly to the LLM context.</a:t>
-            </a:r>
-          </a:p>
-          <a:p>
-            <a:pPr>
-              <a:spcAft>
-                <a:spcPts val="1400"/>
-              </a:spcAft>
-            </a:pPr>
-            <a:r>
-              <a:rPr sz="1800" b="1">
-                <a:solidFill>
-                  <a:srgbClr val="FAFAFA"/>
-                </a:solidFill>
-                <a:latin typeface="Arial"/>
-              </a:rPr>
-              <a:t>Natural Language Interface:</a:t>
-            </a:r>
-            <a:r>
-              <a:rPr sz="1800">
-                <a:solidFill>
-                  <a:srgbClr val="A1A1AA"/>
-                </a:solidFill>
-                <a:latin typeface="Arial"/>
-              </a:rPr>
-              <a:t> Answering queries like 'How can I reduce costs by 20%?' or 'Which nodes are underperforming?'.</a:t>
-            </a:r>
-          </a:p>
-          <a:p>
-            <a:pPr>
-              <a:spcAft>
-                <a:spcPts val="1400"/>
-              </a:spcAft>
-            </a:pPr>
-            <a:r>
-              <a:rPr sz="1800" b="1">
-                <a:solidFill>
-                  <a:srgbClr val="FAFAFA"/>
-                </a:solidFill>
-                <a:latin typeface="Arial"/>
-              </a:rPr>
-              <a:t>Actionable Recommendations:</a:t>
-            </a:r>
-            <a:r>
-              <a:rPr sz="1800">
-                <a:solidFill>
-                  <a:srgbClr val="A1A1AA"/>
-                </a:solidFill>
-                <a:latin typeface="Arial"/>
-              </a:rPr>
-              <a:t> Provides consulting-grade suggestions detailing weekly cost savings.</a:t>
-            </a:r>
-          </a:p>
-          <a:p>
-            <a:pPr>
-              <a:spcAft>
-                <a:spcPts val="1400"/>
-              </a:spcAft>
-            </a:pPr>
-            <a:r>
-              <a:rPr sz="1800" b="1">
-                <a:solidFill>
-                  <a:srgbClr val="FAFAFA"/>
-                </a:solidFill>
-                <a:latin typeface="Arial"/>
-              </a:rPr>
-              <a:t>Technical Fallback Rules:</a:t>
-            </a:r>
-            <a:r>
-              <a:rPr sz="1800">
-                <a:solidFill>
-                  <a:srgbClr val="A1A1AA"/>
-                </a:solidFill>
-                <a:latin typeface="Arial"/>
-              </a:rPr>
-              <a:t> Rule-based fallback executes on the database if the LLM API is offline.</a:t>
-            </a:r>
-          </a:p>
-        </p:txBody>
-      </p:sp>
+                <a:spcPts val="1000"/>
+              </a:spcAft>
+            </a:pPr>
+            <a:r>
+              <a:rPr sz="1300" b="1">
+                <a:solidFill>
+                  <a:srgbClr val="FAFAFA"/>
+                </a:solidFill>
+                <a:latin typeface="Arial"/>
+              </a:rPr>
+              <a:t>Conversational Interface (casestudy.png):</a:t>
+            </a:r>
+            <a:r>
+              <a:rPr sz="1300">
+                <a:solidFill>
+                  <a:srgbClr val="A1A1AA"/>
+                </a:solidFill>
+                <a:latin typeface="Arial"/>
+              </a:rPr>
+              <a:t> Provides context-enriched advisory panels displaying strategic plans.</a:t>
+            </a:r>
+          </a:p>
+          <a:p>
+            <a:pPr>
+              <a:spcAft>
+                <a:spcPts val="1000"/>
+              </a:spcAft>
+            </a:pPr>
+            <a:r>
+              <a:rPr sz="1300" b="1">
+                <a:solidFill>
+                  <a:srgbClr val="FAFAFA"/>
+                </a:solidFill>
+                <a:latin typeface="Arial"/>
+              </a:rPr>
+              <a:t>Direct Answers:</a:t>
+            </a:r>
+            <a:r>
+              <a:rPr sz="1300">
+                <a:solidFill>
+                  <a:srgbClr val="A1A1AA"/>
+                </a:solidFill>
+                <a:latin typeface="Arial"/>
+              </a:rPr>
+              <a:t> Responds to inquiries like 'How can I reduce costs by 20%?' with detailed, multi-step actions.</a:t>
+            </a:r>
+          </a:p>
+          <a:p>
+            <a:pPr>
+              <a:spcAft>
+                <a:spcPts val="1000"/>
+              </a:spcAft>
+            </a:pPr>
+            <a:r>
+              <a:rPr sz="1300" b="1">
+                <a:solidFill>
+                  <a:srgbClr val="FAFAFA"/>
+                </a:solidFill>
+                <a:latin typeface="Arial"/>
+              </a:rPr>
+              <a:t>Fallback Rules:</a:t>
+            </a:r>
+            <a:r>
+              <a:rPr sz="1300">
+                <a:solidFill>
+                  <a:srgbClr val="A1A1AA"/>
+                </a:solidFill>
+                <a:latin typeface="Arial"/>
+              </a:rPr>
+              <a:t> Implements rule-based fallback logic to analyze local database statistics if the LLM API is offline.</a:t>
+            </a:r>
+          </a:p>
+          <a:p>
+            <a:pPr>
+              <a:spcAft>
+                <a:spcPts val="1000"/>
+              </a:spcAft>
+            </a:pPr>
+            <a:r>
+              <a:rPr sz="1300" b="1">
+                <a:solidFill>
+                  <a:srgbClr val="FAFAFA"/>
+                </a:solidFill>
+                <a:latin typeface="Arial"/>
+              </a:rPr>
+              <a:t>Action Chips:</a:t>
+            </a:r>
+            <a:r>
+              <a:rPr sz="1300">
+                <a:solidFill>
+                  <a:srgbClr val="A1A1AA"/>
+                </a:solidFill>
+                <a:latin typeface="Arial"/>
+              </a:rPr>
+              <a:t> Interactive cards allowing users to click common queries instantly.</a:t>
+            </a:r>
+          </a:p>
+        </p:txBody>
+      </p:sp>
+      <p:pic>
+        <p:nvPicPr>
+          <p:cNvPr id="4" name="Picture 3" descr="casestudy.png"/>
+          <p:cNvPicPr>
+            <a:picLocks noChangeAspect="1"/>
+          </p:cNvPicPr>
+          <p:nvPr/>
+        </p:nvPicPr>
+        <p:blipFill>
+          <a:blip r:embed="rId2"/>
+          <a:stretch>
+            <a:fillRect/>
+          </a:stretch>
+        </p:blipFill>
+        <p:spPr>
+          <a:xfrm>
+            <a:off x="4754880" y="1280160"/>
+            <a:ext cx="3931920" cy="2232184"/>
+          </a:xfrm>
+          <a:prstGeom prst="rect">
+            <a:avLst/>
+          </a:prstGeom>
+        </p:spPr>
+      </p:pic>
     </p:spTree>
   </p:cSld>
   <p:clrMapOvr>
@@ -5322,8 +5418,8 @@
         </p:nvSpPr>
         <p:spPr>
           <a:xfrm>
-            <a:off x="457200" y="1371600"/>
-            <a:ext cx="8229600" cy="4572000"/>
+            <a:off x="457200" y="1280160"/>
+            <a:ext cx="4114800" cy="3474720"/>
           </a:xfrm>
           <a:prstGeom prst="rect">
             <a:avLst/>
@@ -5338,11 +5434,36 @@
           <a:p>
             <a:pPr>
               <a:spcAft>
-                <a:spcPts val="1400"/>
-              </a:spcAft>
-            </a:pPr>
-            <a:r>
-              <a:rPr sz="1800" b="1">
+                <a:spcPts val="1000"/>
+              </a:spcAft>
+            </a:pPr>
+            <a:r>
+              <a:rPr sz="1300" b="1">
+                <a:solidFill>
+                  <a:srgbClr val="FAFAFA"/>
+                </a:solidFill>
+                <a:latin typeface="Arial"/>
+              </a:rPr>
+              <a:t>Audit Log Viewer (admin_logs.png):</a:t>
+            </a:r>
+            <a:r>
+              <a:rPr sz="1300">
+                <a:solidFill>
+                  <a:srgbClr val="A1A1AA"/>
+                </a:solidFill>
+                <a:latin typeface="Arial"/>
+              </a:rPr>
+              <a:t> Renders secure table logging details of all system modifications.</a:t>
+            </a:r>
+          </a:p>
+          <a:p>
+            <a:pPr>
+              <a:spcAft>
+                <a:spcPts val="1000"/>
+              </a:spcAft>
+            </a:pPr>
+            <a:r>
+              <a:rPr sz="1300" b="1">
                 <a:solidFill>
                   <a:srgbClr val="FAFAFA"/>
                 </a:solidFill>
@@ -5351,7 +5472,7 @@
               <a:t>Access Protection:</a:t>
             </a:r>
             <a:r>
-              <a:rPr sz="1800">
+              <a:rPr sz="1300">
                 <a:solidFill>
                   <a:srgbClr val="A1A1AA"/>
                 </a:solidFill>
@@ -5363,11 +5484,11 @@
           <a:p>
             <a:pPr>
               <a:spcAft>
-                <a:spcPts val="1400"/>
-              </a:spcAft>
-            </a:pPr>
-            <a:r>
-              <a:rPr sz="1800" b="1">
+                <a:spcPts val="1000"/>
+              </a:spcAft>
+            </a:pPr>
+            <a:r>
+              <a:rPr sz="1300" b="1">
                 <a:solidFill>
                   <a:srgbClr val="FAFAFA"/>
                 </a:solidFill>
@@ -5376,7 +5497,7 @@
               <a:t>Type Safety Validation:</a:t>
             </a:r>
             <a:r>
-              <a:rPr sz="1800">
+              <a:rPr sz="1300">
                 <a:solidFill>
                   <a:srgbClr val="A1A1AA"/>
                 </a:solidFill>
@@ -5388,11 +5509,11 @@
           <a:p>
             <a:pPr>
               <a:spcAft>
-                <a:spcPts val="1400"/>
-              </a:spcAft>
-            </a:pPr>
-            <a:r>
-              <a:rPr sz="1800" b="1">
+                <a:spcPts val="1000"/>
+              </a:spcAft>
+            </a:pPr>
+            <a:r>
+              <a:rPr sz="1300" b="1">
                 <a:solidFill>
                   <a:srgbClr val="FAFAFA"/>
                 </a:solidFill>
@@ -5401,7 +5522,7 @@
               <a:t>SQL Injection Prevention:</a:t>
             </a:r>
             <a:r>
-              <a:rPr sz="1800">
+              <a:rPr sz="1300">
                 <a:solidFill>
                   <a:srgbClr val="A1A1AA"/>
                 </a:solidFill>
@@ -5410,33 +5531,32 @@
               <a:t> Parameterized queries in SQLAlchemy ORM eliminate injection vectors.</a:t>
             </a:r>
           </a:p>
-          <a:p>
-            <a:pPr>
-              <a:spcAft>
-                <a:spcPts val="1400"/>
-              </a:spcAft>
-            </a:pPr>
-            <a:r>
-              <a:rPr sz="1800" b="1">
-                <a:solidFill>
-                  <a:srgbClr val="FAFAFA"/>
-                </a:solidFill>
-                <a:latin typeface="Arial"/>
-              </a:rPr>
-              <a:t>CORS Access Controls:</a:t>
-            </a:r>
-            <a:r>
-              <a:rPr sz="1800">
-                <a:solidFill>
-                  <a:srgbClr val="A1A1AA"/>
-                </a:solidFill>
-                <a:latin typeface="Arial"/>
-              </a:rPr>
-              <a:t> Restricted origins block unauthorized external domains from querying backend API endpoints.</a:t>
-            </a:r>
-          </a:p>
-        </p:txBody>
-      </p:sp>
+        </p:txBody>
+      </p:sp>
+      <p:pic>
+        <p:nvPicPr>
+          <p:cNvPr id="4" name="Picture 3" descr="admin_logs.png"/>
+          <p:cNvPicPr>
+            <a:picLocks noChangeAspect="1"/>
+          </p:cNvPicPr>
+          <p:nvPr/>
+        </p:nvPicPr>
+        <p:blipFill>
+          <a:blip r:embed="rId2"/>
+          <a:stretch>
+            <a:fillRect/>
+          </a:stretch>
+        </p:blipFill>
+        <p:spPr>
+          <a:xfrm>
+            <a:off x="4754880" y="1280160"/>
+            <a:ext cx="3931920" cy="2232184"/>
+          </a:xfrm>
+          <a:prstGeom prst="rect">
+            <a:avLst/>
+          </a:prstGeom>
+        </p:spPr>
+      </p:pic>
     </p:spTree>
   </p:cSld>
   <p:clrMapOvr>
@@ -6247,8 +6367,8 @@
         </p:nvSpPr>
         <p:spPr>
           <a:xfrm>
-            <a:off x="457200" y="1371600"/>
-            <a:ext cx="8229600" cy="4572000"/>
+            <a:off x="457200" y="1280160"/>
+            <a:ext cx="4114800" cy="3474720"/>
           </a:xfrm>
           <a:prstGeom prst="rect">
             <a:avLst/>
@@ -6263,11 +6383,11 @@
           <a:p>
             <a:pPr>
               <a:spcAft>
-                <a:spcPts val="1400"/>
-              </a:spcAft>
-            </a:pPr>
-            <a:r>
-              <a:rPr sz="1800" b="1">
+                <a:spcPts val="1000"/>
+              </a:spcAft>
+            </a:pPr>
+            <a:r>
+              <a:rPr sz="1300" b="1">
                 <a:solidFill>
                   <a:srgbClr val="FAFAFA"/>
                 </a:solidFill>
@@ -6276,7 +6396,7 @@
               <a:t>Recruiter-Ready Platform:</a:t>
             </a:r>
             <a:r>
-              <a:rPr sz="1800">
+              <a:rPr sz="1300">
                 <a:solidFill>
                   <a:srgbClr val="A1A1AA"/>
                 </a:solidFill>
@@ -6288,36 +6408,36 @@
           <a:p>
             <a:pPr>
               <a:spcAft>
-                <a:spcPts val="1400"/>
-              </a:spcAft>
-            </a:pPr>
-            <a:r>
-              <a:rPr sz="1800" b="1">
-                <a:solidFill>
-                  <a:srgbClr val="FAFAFA"/>
-                </a:solidFill>
-                <a:latin typeface="Arial"/>
-              </a:rPr>
-              <a:t>Sophisticated Calculations:</a:t>
-            </a:r>
-            <a:r>
-              <a:rPr sz="1800">
-                <a:solidFill>
-                  <a:srgbClr val="A1A1AA"/>
-                </a:solidFill>
-                <a:latin typeface="Arial"/>
-              </a:rPr>
-              <a:t> Implements custom formulas (GICP, MCES, SLA-VEI, COROI) on local telemetry.</a:t>
-            </a:r>
-          </a:p>
-          <a:p>
-            <a:pPr>
-              <a:spcAft>
-                <a:spcPts val="1400"/>
-              </a:spcAft>
-            </a:pPr>
-            <a:r>
-              <a:rPr sz="1800" b="1">
+                <a:spcPts val="1000"/>
+              </a:spcAft>
+            </a:pPr>
+            <a:r>
+              <a:rPr sz="1300" b="1">
+                <a:solidFill>
+                  <a:srgbClr val="FAFAFA"/>
+                </a:solidFill>
+                <a:latin typeface="Arial"/>
+              </a:rPr>
+              <a:t>Designed UI (login.png):</a:t>
+            </a:r>
+            <a:r>
+              <a:rPr sz="1300">
+                <a:solidFill>
+                  <a:srgbClr val="A1A1AA"/>
+                </a:solidFill>
+                <a:latin typeface="Arial"/>
+              </a:rPr>
+              <a:t> Offers secure credentials authentication layout using Zinc dark themes.</a:t>
+            </a:r>
+          </a:p>
+          <a:p>
+            <a:pPr>
+              <a:spcAft>
+                <a:spcPts val="1000"/>
+              </a:spcAft>
+            </a:pPr>
+            <a:r>
+              <a:rPr sz="1300" b="1">
                 <a:solidFill>
                   <a:srgbClr val="FAFAFA"/>
                 </a:solidFill>
@@ -6326,7 +6446,7 @@
               <a:t>Production-Grade Performance:</a:t>
             </a:r>
             <a:r>
-              <a:rPr sz="1800">
+              <a:rPr sz="1300">
                 <a:solidFill>
                   <a:srgbClr val="A1A1AA"/>
                 </a:solidFill>
@@ -6338,11 +6458,11 @@
           <a:p>
             <a:pPr>
               <a:spcAft>
-                <a:spcPts val="1400"/>
-              </a:spcAft>
-            </a:pPr>
-            <a:r>
-              <a:rPr sz="1800" b="1">
+                <a:spcPts val="1000"/>
+              </a:spcAft>
+            </a:pPr>
+            <a:r>
+              <a:rPr sz="1300" b="1">
                 <a:solidFill>
                   <a:srgbClr val="FAFAFA"/>
                 </a:solidFill>
@@ -6351,7 +6471,7 @@
               <a:t>Advanced Competency:</a:t>
             </a:r>
             <a:r>
-              <a:rPr sz="1800">
+              <a:rPr sz="1300">
                 <a:solidFill>
                   <a:srgbClr val="A1A1AA"/>
                 </a:solidFill>
@@ -6362,6 +6482,30 @@
           </a:p>
         </p:txBody>
       </p:sp>
+      <p:pic>
+        <p:nvPicPr>
+          <p:cNvPr id="4" name="Picture 3" descr="login.png"/>
+          <p:cNvPicPr>
+            <a:picLocks noChangeAspect="1"/>
+          </p:cNvPicPr>
+          <p:nvPr/>
+        </p:nvPicPr>
+        <p:blipFill>
+          <a:blip r:embed="rId2"/>
+          <a:stretch>
+            <a:fillRect/>
+          </a:stretch>
+        </p:blipFill>
+        <p:spPr>
+          <a:xfrm>
+            <a:off x="4754880" y="1280160"/>
+            <a:ext cx="3931920" cy="2232184"/>
+          </a:xfrm>
+          <a:prstGeom prst="rect">
+            <a:avLst/>
+          </a:prstGeom>
+        </p:spPr>
+      </p:pic>
     </p:spTree>
   </p:cSld>
   <p:clrMapOvr>
@@ -6652,7 +6796,7 @@
                 </a:solidFill>
                 <a:latin typeface="Arial"/>
               </a:rPr>
-              <a:t> Up to 60% of GPU compute budgets are wasted on idle allocations.</a:t>
+              <a:t> Over 60% of GPU compute budgets are wasted on idle allocations.</a:t>
             </a:r>
           </a:p>
           <a:p>
